--- a/docs/pitch/VisionEPI-pitch-v2.pptx
+++ b/docs/pitch/VisionEPI-pitch-v2.pptx
@@ -1589,14 +1589,63 @@
       </p:grpSpPr>
       <p:sp>
         <p:nvSpPr>
-          <p:cNvPr id="2" name="Text 0"/>
+          <p:cNvPr id="2" name="Shape 0"/>
+          <p:cNvSpPr/>
+          <p:nvPr/>
+        </p:nvSpPr>
+        <p:spPr>
+          <a:xfrm>
+            <a:off x="5760720" y="822960"/>
+            <a:ext cx="3108960" cy="3108960"/>
+          </a:xfrm>
+          <a:prstGeom prst="ellipse">
+            <a:avLst/>
+          </a:prstGeom>
+          <a:solidFill>
+            <a:srgbClr val="12324A"/>
+          </a:solidFill>
+          <a:ln w="6350">
+            <a:solidFill>
+              <a:srgbClr val="12324A"/>
+            </a:solidFill>
+            <a:prstDash val="solid"/>
+          </a:ln>
+        </p:spPr>
+      </p:sp>
+      <p:pic>
+        <p:nvPicPr>
+          <p:cNvPr id="3" name="Image 0" descr="preencoded.png">    </p:cNvPr>
+          <p:cNvPicPr>
+            <a:picLocks noChangeAspect="1"/>
+          </p:cNvPicPr>
+          <p:nvPr/>
+        </p:nvPicPr>
+        <p:blipFill>
+          <a:blip r:embed="rId1"/>
+          <a:stretch>
+            <a:fillRect/>
+          </a:stretch>
+        </p:blipFill>
+        <p:spPr>
+          <a:xfrm>
+            <a:off x="6446520" y="1508760"/>
+            <a:ext cx="1737360" cy="1737360"/>
+          </a:xfrm>
+          <a:prstGeom prst="rect">
+            <a:avLst/>
+          </a:prstGeom>
+        </p:spPr>
+      </p:pic>
+      <p:sp>
+        <p:nvSpPr>
+          <p:cNvPr id="4" name="Text 1"/>
           <p:cNvSpPr txBox="1"/>
           <p:nvPr/>
         </p:nvSpPr>
         <p:spPr>
           <a:xfrm>
             <a:off x="640080" y="1234440"/>
-            <a:ext cx="7863840" cy="1188720"/>
+            <a:ext cx="5120640" cy="1188720"/>
           </a:xfrm>
           <a:prstGeom prst="rect">
             <a:avLst/>
@@ -1628,14 +1677,14 @@
       </p:sp>
       <p:sp>
         <p:nvSpPr>
-          <p:cNvPr id="3" name="Text 1"/>
+          <p:cNvPr id="5" name="Text 2"/>
           <p:cNvSpPr txBox="1"/>
           <p:nvPr/>
         </p:nvSpPr>
         <p:spPr>
           <a:xfrm>
             <a:off x="640080" y="2514600"/>
-            <a:ext cx="7863840" cy="914400"/>
+            <a:ext cx="4937760" cy="914400"/>
           </a:xfrm>
           <a:prstGeom prst="rect">
             <a:avLst/>
@@ -1651,7 +1700,7 @@
               <a:buNone/>
             </a:pPr>
             <a:r>
-              <a:rPr lang="en-US" sz="2200" dirty="0">
+              <a:rPr lang="en-US" sz="2100" dirty="0">
                 <a:solidFill>
                   <a:srgbClr val="CBD5E1"/>
                 </a:solidFill>
@@ -1661,14 +1710,14 @@
               </a:rPr>
               <a:t>Monitoramento inteligente de EPIs</a:t>
             </a:r>
-            <a:endParaRPr lang="en-US" sz="2200" dirty="0"/>
-          </a:p>
-          <a:p>
-            <a:pPr indent="0" marL="0">
-              <a:buNone/>
-            </a:pPr>
-            <a:r>
-              <a:rPr lang="en-US" sz="2200" dirty="0">
+            <a:endParaRPr lang="en-US" sz="2100" dirty="0"/>
+          </a:p>
+          <a:p>
+            <a:pPr indent="0" marL="0">
+              <a:buNone/>
+            </a:pPr>
+            <a:r>
+              <a:rPr lang="en-US" sz="2100" dirty="0">
                 <a:solidFill>
                   <a:srgbClr val="CBD5E1"/>
                 </a:solidFill>
@@ -1678,13 +1727,13 @@
               </a:rPr>
               <a:t>com visão computacional e IA</a:t>
             </a:r>
-            <a:endParaRPr lang="en-US" sz="2200" dirty="0"/>
-          </a:p>
-        </p:txBody>
-      </p:sp>
-      <p:sp>
-        <p:nvSpPr>
-          <p:cNvPr id="4" name="Text 2"/>
+            <a:endParaRPr lang="en-US" sz="2100" dirty="0"/>
+          </a:p>
+        </p:txBody>
+      </p:sp>
+      <p:sp>
+        <p:nvSpPr>
+          <p:cNvPr id="6" name="Text 3"/>
           <p:cNvSpPr txBox="1"/>
           <p:nvPr/>
         </p:nvSpPr>
@@ -1723,7 +1772,7 @@
       </p:sp>
       <p:sp>
         <p:nvSpPr>
-          <p:cNvPr id="5" name="Text 3"/>
+          <p:cNvPr id="7" name="Text 4"/>
           <p:cNvSpPr txBox="1"/>
           <p:nvPr/>
         </p:nvSpPr>
@@ -1860,7 +1909,7 @@
         <p:spPr>
           <a:xfrm>
             <a:off x="640080" y="2377440"/>
-            <a:ext cx="3840480" cy="1463040"/>
+            <a:ext cx="3749040" cy="1463040"/>
           </a:xfrm>
           <a:prstGeom prst="rect">
             <a:avLst/>
@@ -1892,14 +1941,90 @@
       </p:sp>
       <p:sp>
         <p:nvSpPr>
-          <p:cNvPr id="4" name="Text 2"/>
-          <p:cNvSpPr txBox="1"/>
-          <p:nvPr/>
-        </p:nvSpPr>
-        <p:spPr>
-          <a:xfrm>
-            <a:off x="5120640" y="960120"/>
-            <a:ext cx="640080" cy="457200"/>
+          <p:cNvPr id="4" name="Shape 2"/>
+          <p:cNvSpPr/>
+          <p:nvPr/>
+        </p:nvSpPr>
+        <p:spPr>
+          <a:xfrm>
+            <a:off x="4846320" y="731520"/>
+            <a:ext cx="3657600" cy="3749040"/>
+          </a:xfrm>
+          <a:prstGeom prst="roundRect">
+            <a:avLst>
+              <a:gd name="adj" fmla="val 3000"/>
+            </a:avLst>
+          </a:prstGeom>
+          <a:solidFill>
+            <a:srgbClr val="F3F5F8"/>
+          </a:solidFill>
+          <a:ln w="6350">
+            <a:solidFill>
+              <a:srgbClr val="F3F5F8"/>
+            </a:solidFill>
+            <a:prstDash val="solid"/>
+          </a:ln>
+        </p:spPr>
+      </p:sp>
+      <p:sp>
+        <p:nvSpPr>
+          <p:cNvPr id="5" name="Shape 3"/>
+          <p:cNvSpPr/>
+          <p:nvPr/>
+        </p:nvSpPr>
+        <p:spPr>
+          <a:xfrm>
+            <a:off x="5120640" y="1051560"/>
+            <a:ext cx="640080" cy="640080"/>
+          </a:xfrm>
+          <a:prstGeom prst="ellipse">
+            <a:avLst/>
+          </a:prstGeom>
+          <a:solidFill>
+            <a:srgbClr val="DDF1F5"/>
+          </a:solidFill>
+          <a:ln w="6350">
+            <a:solidFill>
+              <a:srgbClr val="DDF1F5"/>
+            </a:solidFill>
+            <a:prstDash val="solid"/>
+          </a:ln>
+        </p:spPr>
+      </p:sp>
+      <p:pic>
+        <p:nvPicPr>
+          <p:cNvPr id="6" name="Image 0" descr="preencoded.png">    </p:cNvPr>
+          <p:cNvPicPr>
+            <a:picLocks noChangeAspect="1"/>
+          </p:cNvPicPr>
+          <p:nvPr/>
+        </p:nvPicPr>
+        <p:blipFill>
+          <a:blip r:embed="rId1"/>
+          <a:stretch>
+            <a:fillRect/>
+          </a:stretch>
+        </p:blipFill>
+        <p:spPr>
+          <a:xfrm>
+            <a:off x="5287061" y="1217981"/>
+            <a:ext cx="307238" cy="307238"/>
+          </a:xfrm>
+          <a:prstGeom prst="rect">
+            <a:avLst/>
+          </a:prstGeom>
+        </p:spPr>
+      </p:pic>
+      <p:sp>
+        <p:nvSpPr>
+          <p:cNvPr id="7" name="Text 4"/>
+          <p:cNvSpPr txBox="1"/>
+          <p:nvPr/>
+        </p:nvSpPr>
+        <p:spPr>
+          <a:xfrm>
+            <a:off x="5943600" y="1033272"/>
+            <a:ext cx="2377440" cy="731520"/>
           </a:xfrm>
           <a:prstGeom prst="rect">
             <a:avLst/>
@@ -1915,46 +2040,7 @@
               <a:buNone/>
             </a:pPr>
             <a:r>
-              <a:rPr lang="en-US" sz="2600" b="1" dirty="0">
-                <a:solidFill>
-                  <a:srgbClr val="0E7490"/>
-                </a:solidFill>
-                <a:latin typeface="Calibri" pitchFamily="34" charset="0"/>
-                <a:ea typeface="Calibri" pitchFamily="34" charset="-122"/>
-                <a:cs typeface="Calibri" pitchFamily="34" charset="-120"/>
-              </a:rPr>
-              <a:t>01</a:t>
-            </a:r>
-            <a:endParaRPr lang="en-US" sz="2600" dirty="0"/>
-          </a:p>
-        </p:txBody>
-      </p:sp>
-      <p:sp>
-        <p:nvSpPr>
-          <p:cNvPr id="5" name="Text 3"/>
-          <p:cNvSpPr txBox="1"/>
-          <p:nvPr/>
-        </p:nvSpPr>
-        <p:spPr>
-          <a:xfrm>
-            <a:off x="5806440" y="978408"/>
-            <a:ext cx="2743200" cy="731520"/>
-          </a:xfrm>
-          <a:prstGeom prst="rect">
-            <a:avLst/>
-          </a:prstGeom>
-          <a:noFill/>
-          <a:ln/>
-        </p:spPr>
-        <p:txBody>
-          <a:bodyPr wrap="square" lIns="0" tIns="0" rIns="0" bIns="0" rtlCol="0" anchor="t"/>
-          <a:lstStyle/>
-          <a:p>
-            <a:pPr indent="0" marL="0">
-              <a:buNone/>
-            </a:pPr>
-            <a:r>
-              <a:rPr lang="en-US" sz="1700" dirty="0">
+              <a:rPr lang="en-US" sz="1600" b="1" dirty="0">
                 <a:solidFill>
                   <a:srgbClr val="1F2937"/>
                 </a:solidFill>
@@ -1964,20 +2050,69 @@
               </a:rPr>
               <a:t>Ver na hora quem está sem EPI</a:t>
             </a:r>
-            <a:endParaRPr lang="en-US" sz="1700" dirty="0"/>
-          </a:p>
-        </p:txBody>
-      </p:sp>
-      <p:sp>
-        <p:nvSpPr>
-          <p:cNvPr id="6" name="Text 4"/>
-          <p:cNvSpPr txBox="1"/>
-          <p:nvPr/>
-        </p:nvSpPr>
-        <p:spPr>
-          <a:xfrm>
-            <a:off x="5120640" y="2011680"/>
-            <a:ext cx="640080" cy="457200"/>
+            <a:endParaRPr lang="en-US" sz="1600" dirty="0"/>
+          </a:p>
+        </p:txBody>
+      </p:sp>
+      <p:sp>
+        <p:nvSpPr>
+          <p:cNvPr id="8" name="Shape 5"/>
+          <p:cNvSpPr/>
+          <p:nvPr/>
+        </p:nvSpPr>
+        <p:spPr>
+          <a:xfrm>
+            <a:off x="5120640" y="2148840"/>
+            <a:ext cx="640080" cy="640080"/>
+          </a:xfrm>
+          <a:prstGeom prst="ellipse">
+            <a:avLst/>
+          </a:prstGeom>
+          <a:solidFill>
+            <a:srgbClr val="DDF1F5"/>
+          </a:solidFill>
+          <a:ln w="6350">
+            <a:solidFill>
+              <a:srgbClr val="DDF1F5"/>
+            </a:solidFill>
+            <a:prstDash val="solid"/>
+          </a:ln>
+        </p:spPr>
+      </p:sp>
+      <p:pic>
+        <p:nvPicPr>
+          <p:cNvPr id="9" name="Image 1" descr="preencoded.png">    </p:cNvPr>
+          <p:cNvPicPr>
+            <a:picLocks noChangeAspect="1"/>
+          </p:cNvPicPr>
+          <p:nvPr/>
+        </p:nvPicPr>
+        <p:blipFill>
+          <a:blip r:embed="rId2"/>
+          <a:stretch>
+            <a:fillRect/>
+          </a:stretch>
+        </p:blipFill>
+        <p:spPr>
+          <a:xfrm>
+            <a:off x="5287061" y="2315261"/>
+            <a:ext cx="307238" cy="307238"/>
+          </a:xfrm>
+          <a:prstGeom prst="rect">
+            <a:avLst/>
+          </a:prstGeom>
+        </p:spPr>
+      </p:pic>
+      <p:sp>
+        <p:nvSpPr>
+          <p:cNvPr id="10" name="Text 6"/>
+          <p:cNvSpPr txBox="1"/>
+          <p:nvPr/>
+        </p:nvSpPr>
+        <p:spPr>
+          <a:xfrm>
+            <a:off x="5943600" y="2130552"/>
+            <a:ext cx="2377440" cy="731520"/>
           </a:xfrm>
           <a:prstGeom prst="rect">
             <a:avLst/>
@@ -1993,46 +2128,7 @@
               <a:buNone/>
             </a:pPr>
             <a:r>
-              <a:rPr lang="en-US" sz="2600" b="1" dirty="0">
-                <a:solidFill>
-                  <a:srgbClr val="0E7490"/>
-                </a:solidFill>
-                <a:latin typeface="Calibri" pitchFamily="34" charset="0"/>
-                <a:ea typeface="Calibri" pitchFamily="34" charset="-122"/>
-                <a:cs typeface="Calibri" pitchFamily="34" charset="-120"/>
-              </a:rPr>
-              <a:t>02</a:t>
-            </a:r>
-            <a:endParaRPr lang="en-US" sz="2600" dirty="0"/>
-          </a:p>
-        </p:txBody>
-      </p:sp>
-      <p:sp>
-        <p:nvSpPr>
-          <p:cNvPr id="7" name="Text 5"/>
-          <p:cNvSpPr txBox="1"/>
-          <p:nvPr/>
-        </p:nvSpPr>
-        <p:spPr>
-          <a:xfrm>
-            <a:off x="5806440" y="2029968"/>
-            <a:ext cx="2743200" cy="731520"/>
-          </a:xfrm>
-          <a:prstGeom prst="rect">
-            <a:avLst/>
-          </a:prstGeom>
-          <a:noFill/>
-          <a:ln/>
-        </p:spPr>
-        <p:txBody>
-          <a:bodyPr wrap="square" lIns="0" tIns="0" rIns="0" bIns="0" rtlCol="0" anchor="t"/>
-          <a:lstStyle/>
-          <a:p>
-            <a:pPr indent="0" marL="0">
-              <a:buNone/>
-            </a:pPr>
-            <a:r>
-              <a:rPr lang="en-US" sz="1700" dirty="0">
+              <a:rPr lang="en-US" sz="1600" b="1" dirty="0">
                 <a:solidFill>
                   <a:srgbClr val="1F2937"/>
                 </a:solidFill>
@@ -2042,20 +2138,69 @@
               </a:rPr>
               <a:t>Barrar a entrada de quem não está protegido</a:t>
             </a:r>
-            <a:endParaRPr lang="en-US" sz="1700" dirty="0"/>
-          </a:p>
-        </p:txBody>
-      </p:sp>
-      <p:sp>
-        <p:nvSpPr>
-          <p:cNvPr id="8" name="Text 6"/>
-          <p:cNvSpPr txBox="1"/>
-          <p:nvPr/>
-        </p:nvSpPr>
-        <p:spPr>
-          <a:xfrm>
-            <a:off x="5120640" y="3063240"/>
-            <a:ext cx="640080" cy="457200"/>
+            <a:endParaRPr lang="en-US" sz="1600" dirty="0"/>
+          </a:p>
+        </p:txBody>
+      </p:sp>
+      <p:sp>
+        <p:nvSpPr>
+          <p:cNvPr id="11" name="Shape 7"/>
+          <p:cNvSpPr/>
+          <p:nvPr/>
+        </p:nvSpPr>
+        <p:spPr>
+          <a:xfrm>
+            <a:off x="5120640" y="3246120"/>
+            <a:ext cx="640080" cy="640080"/>
+          </a:xfrm>
+          <a:prstGeom prst="ellipse">
+            <a:avLst/>
+          </a:prstGeom>
+          <a:solidFill>
+            <a:srgbClr val="DDF1F5"/>
+          </a:solidFill>
+          <a:ln w="6350">
+            <a:solidFill>
+              <a:srgbClr val="DDF1F5"/>
+            </a:solidFill>
+            <a:prstDash val="solid"/>
+          </a:ln>
+        </p:spPr>
+      </p:sp>
+      <p:pic>
+        <p:nvPicPr>
+          <p:cNvPr id="12" name="Image 2" descr="preencoded.png">    </p:cNvPr>
+          <p:cNvPicPr>
+            <a:picLocks noChangeAspect="1"/>
+          </p:cNvPicPr>
+          <p:nvPr/>
+        </p:nvPicPr>
+        <p:blipFill>
+          <a:blip r:embed="rId3"/>
+          <a:stretch>
+            <a:fillRect/>
+          </a:stretch>
+        </p:blipFill>
+        <p:spPr>
+          <a:xfrm>
+            <a:off x="5287061" y="3412541"/>
+            <a:ext cx="307238" cy="307238"/>
+          </a:xfrm>
+          <a:prstGeom prst="rect">
+            <a:avLst/>
+          </a:prstGeom>
+        </p:spPr>
+      </p:pic>
+      <p:sp>
+        <p:nvSpPr>
+          <p:cNvPr id="13" name="Text 8"/>
+          <p:cNvSpPr txBox="1"/>
+          <p:nvPr/>
+        </p:nvSpPr>
+        <p:spPr>
+          <a:xfrm>
+            <a:off x="5943600" y="3227832"/>
+            <a:ext cx="2377440" cy="731520"/>
           </a:xfrm>
           <a:prstGeom prst="rect">
             <a:avLst/>
@@ -2071,46 +2216,7 @@
               <a:buNone/>
             </a:pPr>
             <a:r>
-              <a:rPr lang="en-US" sz="2600" b="1" dirty="0">
-                <a:solidFill>
-                  <a:srgbClr val="0E7490"/>
-                </a:solidFill>
-                <a:latin typeface="Calibri" pitchFamily="34" charset="0"/>
-                <a:ea typeface="Calibri" pitchFamily="34" charset="-122"/>
-                <a:cs typeface="Calibri" pitchFamily="34" charset="-120"/>
-              </a:rPr>
-              <a:t>03</a:t>
-            </a:r>
-            <a:endParaRPr lang="en-US" sz="2600" dirty="0"/>
-          </a:p>
-        </p:txBody>
-      </p:sp>
-      <p:sp>
-        <p:nvSpPr>
-          <p:cNvPr id="9" name="Text 7"/>
-          <p:cNvSpPr txBox="1"/>
-          <p:nvPr/>
-        </p:nvSpPr>
-        <p:spPr>
-          <a:xfrm>
-            <a:off x="5806440" y="3081528"/>
-            <a:ext cx="2743200" cy="731520"/>
-          </a:xfrm>
-          <a:prstGeom prst="rect">
-            <a:avLst/>
-          </a:prstGeom>
-          <a:noFill/>
-          <a:ln/>
-        </p:spPr>
-        <p:txBody>
-          <a:bodyPr wrap="square" lIns="0" tIns="0" rIns="0" bIns="0" rtlCol="0" anchor="t"/>
-          <a:lstStyle/>
-          <a:p>
-            <a:pPr indent="0" marL="0">
-              <a:buNone/>
-            </a:pPr>
-            <a:r>
-              <a:rPr lang="en-US" sz="1700" dirty="0">
+              <a:rPr lang="en-US" sz="1600" b="1" dirty="0">
                 <a:solidFill>
                   <a:srgbClr val="1F2937"/>
                 </a:solidFill>
@@ -2120,20 +2226,20 @@
               </a:rPr>
               <a:t>Avisar sem inundar de alertas falsos</a:t>
             </a:r>
-            <a:endParaRPr lang="en-US" sz="1700" dirty="0"/>
-          </a:p>
-        </p:txBody>
-      </p:sp>
-      <p:sp>
-        <p:nvSpPr>
-          <p:cNvPr id="10" name="Text 8"/>
-          <p:cNvSpPr txBox="1"/>
-          <p:nvPr/>
-        </p:nvSpPr>
-        <p:spPr>
-          <a:xfrm>
-            <a:off x="8229600" y="4617720"/>
-            <a:ext cx="457200" cy="274320"/>
+            <a:endParaRPr lang="en-US" sz="1600" dirty="0"/>
+          </a:p>
+        </p:txBody>
+      </p:sp>
+      <p:sp>
+        <p:nvSpPr>
+          <p:cNvPr id="14" name="Text 9"/>
+          <p:cNvSpPr txBox="1"/>
+          <p:nvPr/>
+        </p:nvSpPr>
+        <p:spPr>
+          <a:xfrm>
+            <a:off x="8229600" y="4709160"/>
+            <a:ext cx="457200" cy="228600"/>
           </a:xfrm>
           <a:prstGeom prst="rect">
             <a:avLst/>
@@ -2206,7 +2312,7 @@
         </p:nvSpPr>
         <p:spPr>
           <a:xfrm>
-            <a:off x="640080" y="457200"/>
+            <a:off x="640080" y="411480"/>
             <a:ext cx="7863840" cy="640080"/>
           </a:xfrm>
           <a:prstGeom prst="rect">
@@ -2239,14 +2345,90 @@
       </p:sp>
       <p:sp>
         <p:nvSpPr>
-          <p:cNvPr id="3" name="Text 1"/>
-          <p:cNvSpPr txBox="1"/>
-          <p:nvPr/>
-        </p:nvSpPr>
-        <p:spPr>
-          <a:xfrm>
-            <a:off x="640080" y="1463040"/>
-            <a:ext cx="548640" cy="365760"/>
+          <p:cNvPr id="3" name="Shape 1"/>
+          <p:cNvSpPr/>
+          <p:nvPr/>
+        </p:nvSpPr>
+        <p:spPr>
+          <a:xfrm>
+            <a:off x="640080" y="1280160"/>
+            <a:ext cx="3840480" cy="1463040"/>
+          </a:xfrm>
+          <a:prstGeom prst="roundRect">
+            <a:avLst>
+              <a:gd name="adj" fmla="val 7500"/>
+            </a:avLst>
+          </a:prstGeom>
+          <a:solidFill>
+            <a:srgbClr val="F3F5F8"/>
+          </a:solidFill>
+          <a:ln w="6350">
+            <a:solidFill>
+              <a:srgbClr val="F3F5F8"/>
+            </a:solidFill>
+            <a:prstDash val="solid"/>
+          </a:ln>
+        </p:spPr>
+      </p:sp>
+      <p:sp>
+        <p:nvSpPr>
+          <p:cNvPr id="4" name="Shape 2"/>
+          <p:cNvSpPr/>
+          <p:nvPr/>
+        </p:nvSpPr>
+        <p:spPr>
+          <a:xfrm>
+            <a:off x="868680" y="1536192"/>
+            <a:ext cx="566928" cy="566928"/>
+          </a:xfrm>
+          <a:prstGeom prst="ellipse">
+            <a:avLst/>
+          </a:prstGeom>
+          <a:solidFill>
+            <a:srgbClr val="DDF1F5"/>
+          </a:solidFill>
+          <a:ln w="6350">
+            <a:solidFill>
+              <a:srgbClr val="DDF1F5"/>
+            </a:solidFill>
+            <a:prstDash val="solid"/>
+          </a:ln>
+        </p:spPr>
+      </p:sp>
+      <p:pic>
+        <p:nvPicPr>
+          <p:cNvPr id="5" name="Image 0" descr="preencoded.png">    </p:cNvPr>
+          <p:cNvPicPr>
+            <a:picLocks noChangeAspect="1"/>
+          </p:cNvPicPr>
+          <p:nvPr/>
+        </p:nvPicPr>
+        <p:blipFill>
+          <a:blip r:embed="rId1"/>
+          <a:stretch>
+            <a:fillRect/>
+          </a:stretch>
+        </p:blipFill>
+        <p:spPr>
+          <a:xfrm>
+            <a:off x="1016081" y="1683593"/>
+            <a:ext cx="272125" cy="272125"/>
+          </a:xfrm>
+          <a:prstGeom prst="rect">
+            <a:avLst/>
+          </a:prstGeom>
+        </p:spPr>
+      </p:pic>
+      <p:sp>
+        <p:nvSpPr>
+          <p:cNvPr id="6" name="Text 3"/>
+          <p:cNvSpPr txBox="1"/>
+          <p:nvPr/>
+        </p:nvSpPr>
+        <p:spPr>
+          <a:xfrm>
+            <a:off x="1600200" y="1463040"/>
+            <a:ext cx="2743200" cy="365760"/>
           </a:xfrm>
           <a:prstGeom prst="rect">
             <a:avLst/>
@@ -2262,30 +2444,145 @@
               <a:buNone/>
             </a:pPr>
             <a:r>
-              <a:rPr lang="en-US" sz="1600" b="1" dirty="0">
-                <a:solidFill>
-                  <a:srgbClr val="0E7490"/>
-                </a:solidFill>
-                <a:latin typeface="Calibri" pitchFamily="34" charset="0"/>
-                <a:ea typeface="Calibri" pitchFamily="34" charset="-122"/>
-                <a:cs typeface="Calibri" pitchFamily="34" charset="-120"/>
-              </a:rPr>
-              <a:t>01</a:t>
-            </a:r>
-            <a:endParaRPr lang="en-US" sz="1600" dirty="0"/>
-          </a:p>
-        </p:txBody>
-      </p:sp>
-      <p:sp>
-        <p:nvSpPr>
-          <p:cNvPr id="4" name="Text 2"/>
-          <p:cNvSpPr txBox="1"/>
-          <p:nvPr/>
-        </p:nvSpPr>
-        <p:spPr>
-          <a:xfrm>
-            <a:off x="1188720" y="1463040"/>
-            <a:ext cx="3108960" cy="365760"/>
+              <a:rPr lang="en-US" sz="1700" b="1" dirty="0">
+                <a:solidFill>
+                  <a:srgbClr val="0B1220"/>
+                </a:solidFill>
+                <a:latin typeface="Calibri" pitchFamily="34" charset="0"/>
+                <a:ea typeface="Calibri" pitchFamily="34" charset="-122"/>
+                <a:cs typeface="Calibri" pitchFamily="34" charset="-120"/>
+              </a:rPr>
+              <a:t>Dois modelos de visão</a:t>
+            </a:r>
+            <a:endParaRPr lang="en-US" sz="1700" dirty="0"/>
+          </a:p>
+        </p:txBody>
+      </p:sp>
+      <p:sp>
+        <p:nvSpPr>
+          <p:cNvPr id="7" name="Text 4"/>
+          <p:cNvSpPr txBox="1"/>
+          <p:nvPr/>
+        </p:nvSpPr>
+        <p:spPr>
+          <a:xfrm>
+            <a:off x="1600200" y="1847088"/>
+            <a:ext cx="2743200" cy="822960"/>
+          </a:xfrm>
+          <a:prstGeom prst="rect">
+            <a:avLst/>
+          </a:prstGeom>
+          <a:noFill/>
+          <a:ln/>
+        </p:spPr>
+        <p:txBody>
+          <a:bodyPr wrap="square" lIns="0" tIns="0" rIns="0" bIns="0" rtlCol="0" anchor="t"/>
+          <a:lstStyle/>
+          <a:p>
+            <a:pPr indent="0" marL="0">
+              <a:buNone/>
+            </a:pPr>
+            <a:r>
+              <a:rPr lang="en-US" sz="1200" dirty="0">
+                <a:solidFill>
+                  <a:srgbClr val="6B7280"/>
+                </a:solidFill>
+                <a:latin typeface="Calibri" pitchFamily="34" charset="0"/>
+                <a:ea typeface="Calibri" pitchFamily="34" charset="-122"/>
+                <a:cs typeface="Calibri" pitchFamily="34" charset="-120"/>
+              </a:rPr>
+              <a:t>Um pronto (Vyra) e outro treinado por nós em 8.099 imagens (SH17), com os resultados fundidos.</a:t>
+            </a:r>
+            <a:endParaRPr lang="en-US" sz="1200" dirty="0"/>
+          </a:p>
+        </p:txBody>
+      </p:sp>
+      <p:sp>
+        <p:nvSpPr>
+          <p:cNvPr id="8" name="Shape 5"/>
+          <p:cNvSpPr/>
+          <p:nvPr/>
+        </p:nvSpPr>
+        <p:spPr>
+          <a:xfrm>
+            <a:off x="4663440" y="1280160"/>
+            <a:ext cx="3840480" cy="1463040"/>
+          </a:xfrm>
+          <a:prstGeom prst="roundRect">
+            <a:avLst>
+              <a:gd name="adj" fmla="val 7500"/>
+            </a:avLst>
+          </a:prstGeom>
+          <a:solidFill>
+            <a:srgbClr val="F3F5F8"/>
+          </a:solidFill>
+          <a:ln w="6350">
+            <a:solidFill>
+              <a:srgbClr val="F3F5F8"/>
+            </a:solidFill>
+            <a:prstDash val="solid"/>
+          </a:ln>
+        </p:spPr>
+      </p:sp>
+      <p:sp>
+        <p:nvSpPr>
+          <p:cNvPr id="9" name="Shape 6"/>
+          <p:cNvSpPr/>
+          <p:nvPr/>
+        </p:nvSpPr>
+        <p:spPr>
+          <a:xfrm>
+            <a:off x="4892040" y="1536192"/>
+            <a:ext cx="566928" cy="566928"/>
+          </a:xfrm>
+          <a:prstGeom prst="ellipse">
+            <a:avLst/>
+          </a:prstGeom>
+          <a:solidFill>
+            <a:srgbClr val="DDF1F5"/>
+          </a:solidFill>
+          <a:ln w="6350">
+            <a:solidFill>
+              <a:srgbClr val="DDF1F5"/>
+            </a:solidFill>
+            <a:prstDash val="solid"/>
+          </a:ln>
+        </p:spPr>
+      </p:sp>
+      <p:pic>
+        <p:nvPicPr>
+          <p:cNvPr id="10" name="Image 1" descr="preencoded.png">    </p:cNvPr>
+          <p:cNvPicPr>
+            <a:picLocks noChangeAspect="1"/>
+          </p:cNvPicPr>
+          <p:nvPr/>
+        </p:nvPicPr>
+        <p:blipFill>
+          <a:blip r:embed="rId2"/>
+          <a:stretch>
+            <a:fillRect/>
+          </a:stretch>
+        </p:blipFill>
+        <p:spPr>
+          <a:xfrm>
+            <a:off x="5039441" y="1683593"/>
+            <a:ext cx="272125" cy="272125"/>
+          </a:xfrm>
+          <a:prstGeom prst="rect">
+            <a:avLst/>
+          </a:prstGeom>
+        </p:spPr>
+      </p:pic>
+      <p:sp>
+        <p:nvSpPr>
+          <p:cNvPr id="11" name="Text 7"/>
+          <p:cNvSpPr txBox="1"/>
+          <p:nvPr/>
+        </p:nvSpPr>
+        <p:spPr>
+          <a:xfrm>
+            <a:off x="5623560" y="1463040"/>
+            <a:ext cx="2743200" cy="365760"/>
           </a:xfrm>
           <a:prstGeom prst="rect">
             <a:avLst/>
@@ -2301,7 +2598,7 @@
               <a:buNone/>
             </a:pPr>
             <a:r>
-              <a:rPr lang="en-US" sz="1800" b="1" dirty="0">
+              <a:rPr lang="en-US" sz="1700" b="1" dirty="0">
                 <a:solidFill>
                   <a:srgbClr val="0B1220"/>
                 </a:solidFill>
@@ -2309,22 +2606,22 @@
                 <a:ea typeface="Calibri" pitchFamily="34" charset="-122"/>
                 <a:cs typeface="Calibri" pitchFamily="34" charset="-120"/>
               </a:rPr>
-              <a:t>Dois modelos de visão</a:t>
-            </a:r>
-            <a:endParaRPr lang="en-US" sz="1800" dirty="0"/>
-          </a:p>
-        </p:txBody>
-      </p:sp>
-      <p:sp>
-        <p:nvSpPr>
-          <p:cNvPr id="5" name="Text 3"/>
-          <p:cNvSpPr txBox="1"/>
-          <p:nvPr/>
-        </p:nvSpPr>
-        <p:spPr>
-          <a:xfrm>
-            <a:off x="1188720" y="1874520"/>
-            <a:ext cx="3108960" cy="914400"/>
+              <a:t>Portaria que nega na dúvida</a:t>
+            </a:r>
+            <a:endParaRPr lang="en-US" sz="1700" dirty="0"/>
+          </a:p>
+        </p:txBody>
+      </p:sp>
+      <p:sp>
+        <p:nvSpPr>
+          <p:cNvPr id="12" name="Text 8"/>
+          <p:cNvSpPr txBox="1"/>
+          <p:nvPr/>
+        </p:nvSpPr>
+        <p:spPr>
+          <a:xfrm>
+            <a:off x="5623560" y="1847088"/>
+            <a:ext cx="2743200" cy="822960"/>
           </a:xfrm>
           <a:prstGeom prst="rect">
             <a:avLst/>
@@ -2340,7 +2637,7 @@
               <a:buNone/>
             </a:pPr>
             <a:r>
-              <a:rPr lang="en-US" sz="1300" dirty="0">
+              <a:rPr lang="en-US" sz="1200" dirty="0">
                 <a:solidFill>
                   <a:srgbClr val="6B7280"/>
                 </a:solidFill>
@@ -2348,22 +2645,98 @@
                 <a:ea typeface="Calibri" pitchFamily="34" charset="-122"/>
                 <a:cs typeface="Calibri" pitchFamily="34" charset="-120"/>
               </a:rPr>
-              <a:t>Um pronto (Vyra) e outro treinado por nós em 8.099 imagens (SH17), com os resultados fundidos.</a:t>
-            </a:r>
-            <a:endParaRPr lang="en-US" sz="1300" dirty="0"/>
-          </a:p>
-        </p:txBody>
-      </p:sp>
-      <p:sp>
-        <p:nvSpPr>
-          <p:cNvPr id="6" name="Text 4"/>
-          <p:cNvSpPr txBox="1"/>
-          <p:nvPr/>
-        </p:nvSpPr>
-        <p:spPr>
-          <a:xfrm>
-            <a:off x="4663440" y="1463040"/>
-            <a:ext cx="548640" cy="365760"/>
+              <a:t>Cada câmera exige os EPIs escolhidos. Só libera se todos forem vistos.</a:t>
+            </a:r>
+            <a:endParaRPr lang="en-US" sz="1200" dirty="0"/>
+          </a:p>
+        </p:txBody>
+      </p:sp>
+      <p:sp>
+        <p:nvSpPr>
+          <p:cNvPr id="13" name="Shape 9"/>
+          <p:cNvSpPr/>
+          <p:nvPr/>
+        </p:nvSpPr>
+        <p:spPr>
+          <a:xfrm>
+            <a:off x="640080" y="2926080"/>
+            <a:ext cx="3840480" cy="1463040"/>
+          </a:xfrm>
+          <a:prstGeom prst="roundRect">
+            <a:avLst>
+              <a:gd name="adj" fmla="val 7500"/>
+            </a:avLst>
+          </a:prstGeom>
+          <a:solidFill>
+            <a:srgbClr val="F3F5F8"/>
+          </a:solidFill>
+          <a:ln w="6350">
+            <a:solidFill>
+              <a:srgbClr val="F3F5F8"/>
+            </a:solidFill>
+            <a:prstDash val="solid"/>
+          </a:ln>
+        </p:spPr>
+      </p:sp>
+      <p:sp>
+        <p:nvSpPr>
+          <p:cNvPr id="14" name="Shape 10"/>
+          <p:cNvSpPr/>
+          <p:nvPr/>
+        </p:nvSpPr>
+        <p:spPr>
+          <a:xfrm>
+            <a:off x="868680" y="3182112"/>
+            <a:ext cx="566928" cy="566928"/>
+          </a:xfrm>
+          <a:prstGeom prst="ellipse">
+            <a:avLst/>
+          </a:prstGeom>
+          <a:solidFill>
+            <a:srgbClr val="DDF1F5"/>
+          </a:solidFill>
+          <a:ln w="6350">
+            <a:solidFill>
+              <a:srgbClr val="DDF1F5"/>
+            </a:solidFill>
+            <a:prstDash val="solid"/>
+          </a:ln>
+        </p:spPr>
+      </p:sp>
+      <p:pic>
+        <p:nvPicPr>
+          <p:cNvPr id="15" name="Image 2" descr="preencoded.png">    </p:cNvPr>
+          <p:cNvPicPr>
+            <a:picLocks noChangeAspect="1"/>
+          </p:cNvPicPr>
+          <p:nvPr/>
+        </p:nvPicPr>
+        <p:blipFill>
+          <a:blip r:embed="rId3"/>
+          <a:stretch>
+            <a:fillRect/>
+          </a:stretch>
+        </p:blipFill>
+        <p:spPr>
+          <a:xfrm>
+            <a:off x="1016081" y="3329513"/>
+            <a:ext cx="272125" cy="272125"/>
+          </a:xfrm>
+          <a:prstGeom prst="rect">
+            <a:avLst/>
+          </a:prstGeom>
+        </p:spPr>
+      </p:pic>
+      <p:sp>
+        <p:nvSpPr>
+          <p:cNvPr id="16" name="Text 11"/>
+          <p:cNvSpPr txBox="1"/>
+          <p:nvPr/>
+        </p:nvSpPr>
+        <p:spPr>
+          <a:xfrm>
+            <a:off x="1600200" y="3108960"/>
+            <a:ext cx="2743200" cy="365760"/>
           </a:xfrm>
           <a:prstGeom prst="rect">
             <a:avLst/>
@@ -2379,30 +2752,145 @@
               <a:buNone/>
             </a:pPr>
             <a:r>
-              <a:rPr lang="en-US" sz="1600" b="1" dirty="0">
-                <a:solidFill>
-                  <a:srgbClr val="0E7490"/>
-                </a:solidFill>
-                <a:latin typeface="Calibri" pitchFamily="34" charset="0"/>
-                <a:ea typeface="Calibri" pitchFamily="34" charset="-122"/>
-                <a:cs typeface="Calibri" pitchFamily="34" charset="-120"/>
-              </a:rPr>
-              <a:t>02</a:t>
-            </a:r>
-            <a:endParaRPr lang="en-US" sz="1600" dirty="0"/>
-          </a:p>
-        </p:txBody>
-      </p:sp>
-      <p:sp>
-        <p:nvSpPr>
-          <p:cNvPr id="7" name="Text 5"/>
-          <p:cNvSpPr txBox="1"/>
-          <p:nvPr/>
-        </p:nvSpPr>
-        <p:spPr>
-          <a:xfrm>
-            <a:off x="5212080" y="1463040"/>
-            <a:ext cx="3108960" cy="365760"/>
+              <a:rPr lang="en-US" sz="1700" b="1" dirty="0">
+                <a:solidFill>
+                  <a:srgbClr val="0B1220"/>
+                </a:solidFill>
+                <a:latin typeface="Calibri" pitchFamily="34" charset="0"/>
+                <a:ea typeface="Calibri" pitchFamily="34" charset="-122"/>
+                <a:cs typeface="Calibri" pitchFamily="34" charset="-120"/>
+              </a:rPr>
+              <a:t>LLM como segunda opinião</a:t>
+            </a:r>
+            <a:endParaRPr lang="en-US" sz="1700" dirty="0"/>
+          </a:p>
+        </p:txBody>
+      </p:sp>
+      <p:sp>
+        <p:nvSpPr>
+          <p:cNvPr id="17" name="Text 12"/>
+          <p:cNvSpPr txBox="1"/>
+          <p:nvPr/>
+        </p:nvSpPr>
+        <p:spPr>
+          <a:xfrm>
+            <a:off x="1600200" y="3493008"/>
+            <a:ext cx="2743200" cy="822960"/>
+          </a:xfrm>
+          <a:prstGeom prst="rect">
+            <a:avLst/>
+          </a:prstGeom>
+          <a:noFill/>
+          <a:ln/>
+        </p:spPr>
+        <p:txBody>
+          <a:bodyPr wrap="square" lIns="0" tIns="0" rIns="0" bIns="0" rtlCol="0" anchor="t"/>
+          <a:lstStyle/>
+          <a:p>
+            <a:pPr indent="0" marL="0">
+              <a:buNone/>
+            </a:pPr>
+            <a:r>
+              <a:rPr lang="en-US" sz="1200" dirty="0">
+                <a:solidFill>
+                  <a:srgbClr val="6B7280"/>
+                </a:solidFill>
+                <a:latin typeface="Calibri" pitchFamily="34" charset="0"/>
+                <a:ea typeface="Calibri" pitchFamily="34" charset="-122"/>
+                <a:cs typeface="Calibri" pitchFamily="34" charset="-120"/>
+              </a:rPr>
+              <a:t>Um modelo de linguagem com visão revisa o quadro. Nunca cria nem apaga alertas.</a:t>
+            </a:r>
+            <a:endParaRPr lang="en-US" sz="1200" dirty="0"/>
+          </a:p>
+        </p:txBody>
+      </p:sp>
+      <p:sp>
+        <p:nvSpPr>
+          <p:cNvPr id="18" name="Shape 13"/>
+          <p:cNvSpPr/>
+          <p:nvPr/>
+        </p:nvSpPr>
+        <p:spPr>
+          <a:xfrm>
+            <a:off x="4663440" y="2926080"/>
+            <a:ext cx="3840480" cy="1463040"/>
+          </a:xfrm>
+          <a:prstGeom prst="roundRect">
+            <a:avLst>
+              <a:gd name="adj" fmla="val 7500"/>
+            </a:avLst>
+          </a:prstGeom>
+          <a:solidFill>
+            <a:srgbClr val="F3F5F8"/>
+          </a:solidFill>
+          <a:ln w="6350">
+            <a:solidFill>
+              <a:srgbClr val="F3F5F8"/>
+            </a:solidFill>
+            <a:prstDash val="solid"/>
+          </a:ln>
+        </p:spPr>
+      </p:sp>
+      <p:sp>
+        <p:nvSpPr>
+          <p:cNvPr id="19" name="Shape 14"/>
+          <p:cNvSpPr/>
+          <p:nvPr/>
+        </p:nvSpPr>
+        <p:spPr>
+          <a:xfrm>
+            <a:off x="4892040" y="3182112"/>
+            <a:ext cx="566928" cy="566928"/>
+          </a:xfrm>
+          <a:prstGeom prst="ellipse">
+            <a:avLst/>
+          </a:prstGeom>
+          <a:solidFill>
+            <a:srgbClr val="DDF1F5"/>
+          </a:solidFill>
+          <a:ln w="6350">
+            <a:solidFill>
+              <a:srgbClr val="DDF1F5"/>
+            </a:solidFill>
+            <a:prstDash val="solid"/>
+          </a:ln>
+        </p:spPr>
+      </p:sp>
+      <p:pic>
+        <p:nvPicPr>
+          <p:cNvPr id="20" name="Image 3" descr="preencoded.png">    </p:cNvPr>
+          <p:cNvPicPr>
+            <a:picLocks noChangeAspect="1"/>
+          </p:cNvPicPr>
+          <p:nvPr/>
+        </p:nvPicPr>
+        <p:blipFill>
+          <a:blip r:embed="rId4"/>
+          <a:stretch>
+            <a:fillRect/>
+          </a:stretch>
+        </p:blipFill>
+        <p:spPr>
+          <a:xfrm>
+            <a:off x="5039441" y="3329513"/>
+            <a:ext cx="272125" cy="272125"/>
+          </a:xfrm>
+          <a:prstGeom prst="rect">
+            <a:avLst/>
+          </a:prstGeom>
+        </p:spPr>
+      </p:pic>
+      <p:sp>
+        <p:nvSpPr>
+          <p:cNvPr id="21" name="Text 15"/>
+          <p:cNvSpPr txBox="1"/>
+          <p:nvPr/>
+        </p:nvSpPr>
+        <p:spPr>
+          <a:xfrm>
+            <a:off x="5623560" y="3108960"/>
+            <a:ext cx="2743200" cy="365760"/>
           </a:xfrm>
           <a:prstGeom prst="rect">
             <a:avLst/>
@@ -2418,7 +2906,7 @@
               <a:buNone/>
             </a:pPr>
             <a:r>
-              <a:rPr lang="en-US" sz="1800" b="1" dirty="0">
+              <a:rPr lang="en-US" sz="1700" b="1" dirty="0">
                 <a:solidFill>
                   <a:srgbClr val="0B1220"/>
                 </a:solidFill>
@@ -2426,22 +2914,22 @@
                 <a:ea typeface="Calibri" pitchFamily="34" charset="-122"/>
                 <a:cs typeface="Calibri" pitchFamily="34" charset="-120"/>
               </a:rPr>
-              <a:t>Portaria que nega na dúvida</a:t>
-            </a:r>
-            <a:endParaRPr lang="en-US" sz="1800" dirty="0"/>
-          </a:p>
-        </p:txBody>
-      </p:sp>
-      <p:sp>
-        <p:nvSpPr>
-          <p:cNvPr id="8" name="Text 6"/>
-          <p:cNvSpPr txBox="1"/>
-          <p:nvPr/>
-        </p:nvSpPr>
-        <p:spPr>
-          <a:xfrm>
-            <a:off x="5212080" y="1874520"/>
-            <a:ext cx="3108960" cy="914400"/>
+              <a:t>Alertas para o supervisor</a:t>
+            </a:r>
+            <a:endParaRPr lang="en-US" sz="1700" dirty="0"/>
+          </a:p>
+        </p:txBody>
+      </p:sp>
+      <p:sp>
+        <p:nvSpPr>
+          <p:cNvPr id="22" name="Text 16"/>
+          <p:cNvSpPr txBox="1"/>
+          <p:nvPr/>
+        </p:nvSpPr>
+        <p:spPr>
+          <a:xfrm>
+            <a:off x="5623560" y="3493008"/>
+            <a:ext cx="2743200" cy="822960"/>
           </a:xfrm>
           <a:prstGeom prst="rect">
             <a:avLst/>
@@ -2457,7 +2945,7 @@
               <a:buNone/>
             </a:pPr>
             <a:r>
-              <a:rPr lang="en-US" sz="1300" dirty="0">
+              <a:rPr lang="en-US" sz="1200" dirty="0">
                 <a:solidFill>
                   <a:srgbClr val="6B7280"/>
                 </a:solidFill>
@@ -2465,256 +2953,22 @@
                 <a:ea typeface="Calibri" pitchFamily="34" charset="-122"/>
                 <a:cs typeface="Calibri" pitchFamily="34" charset="-120"/>
               </a:rPr>
-              <a:t>Cada câmera exige os EPIs escolhidos. Só libera se todos forem vistos.</a:t>
-            </a:r>
-            <a:endParaRPr lang="en-US" sz="1300" dirty="0"/>
-          </a:p>
-        </p:txBody>
-      </p:sp>
-      <p:sp>
-        <p:nvSpPr>
-          <p:cNvPr id="9" name="Text 7"/>
-          <p:cNvSpPr txBox="1"/>
-          <p:nvPr/>
-        </p:nvSpPr>
-        <p:spPr>
-          <a:xfrm>
-            <a:off x="640080" y="3063240"/>
-            <a:ext cx="548640" cy="365760"/>
-          </a:xfrm>
-          <a:prstGeom prst="rect">
-            <a:avLst/>
-          </a:prstGeom>
-          <a:noFill/>
-          <a:ln/>
-        </p:spPr>
-        <p:txBody>
-          <a:bodyPr wrap="square" lIns="0" tIns="0" rIns="0" bIns="0" rtlCol="0" anchor="ctr"/>
-          <a:lstStyle/>
-          <a:p>
-            <a:pPr indent="0" marL="0">
-              <a:buNone/>
-            </a:pPr>
-            <a:r>
-              <a:rPr lang="en-US" sz="1600" b="1" dirty="0">
-                <a:solidFill>
-                  <a:srgbClr val="0E7490"/>
-                </a:solidFill>
-                <a:latin typeface="Calibri" pitchFamily="34" charset="0"/>
-                <a:ea typeface="Calibri" pitchFamily="34" charset="-122"/>
-                <a:cs typeface="Calibri" pitchFamily="34" charset="-120"/>
-              </a:rPr>
-              <a:t>03</a:t>
-            </a:r>
-            <a:endParaRPr lang="en-US" sz="1600" dirty="0"/>
-          </a:p>
-        </p:txBody>
-      </p:sp>
-      <p:sp>
-        <p:nvSpPr>
-          <p:cNvPr id="10" name="Text 8"/>
-          <p:cNvSpPr txBox="1"/>
-          <p:nvPr/>
-        </p:nvSpPr>
-        <p:spPr>
-          <a:xfrm>
-            <a:off x="1188720" y="3063240"/>
-            <a:ext cx="3108960" cy="365760"/>
-          </a:xfrm>
-          <a:prstGeom prst="rect">
-            <a:avLst/>
-          </a:prstGeom>
-          <a:noFill/>
-          <a:ln/>
-        </p:spPr>
-        <p:txBody>
-          <a:bodyPr wrap="square" lIns="0" tIns="0" rIns="0" bIns="0" rtlCol="0" anchor="ctr"/>
-          <a:lstStyle/>
-          <a:p>
-            <a:pPr indent="0" marL="0">
-              <a:buNone/>
-            </a:pPr>
-            <a:r>
-              <a:rPr lang="en-US" sz="1800" b="1" dirty="0">
-                <a:solidFill>
-                  <a:srgbClr val="0B1220"/>
-                </a:solidFill>
-                <a:latin typeface="Calibri" pitchFamily="34" charset="0"/>
-                <a:ea typeface="Calibri" pitchFamily="34" charset="-122"/>
-                <a:cs typeface="Calibri" pitchFamily="34" charset="-120"/>
-              </a:rPr>
-              <a:t>LLM como segunda opinião</a:t>
-            </a:r>
-            <a:endParaRPr lang="en-US" sz="1800" dirty="0"/>
-          </a:p>
-        </p:txBody>
-      </p:sp>
-      <p:sp>
-        <p:nvSpPr>
-          <p:cNvPr id="11" name="Text 9"/>
-          <p:cNvSpPr txBox="1"/>
-          <p:nvPr/>
-        </p:nvSpPr>
-        <p:spPr>
-          <a:xfrm>
-            <a:off x="1188720" y="3474720"/>
-            <a:ext cx="3108960" cy="914400"/>
-          </a:xfrm>
-          <a:prstGeom prst="rect">
-            <a:avLst/>
-          </a:prstGeom>
-          <a:noFill/>
-          <a:ln/>
-        </p:spPr>
-        <p:txBody>
-          <a:bodyPr wrap="square" lIns="0" tIns="0" rIns="0" bIns="0" rtlCol="0" anchor="t"/>
-          <a:lstStyle/>
-          <a:p>
-            <a:pPr indent="0" marL="0">
-              <a:buNone/>
-            </a:pPr>
-            <a:r>
-              <a:rPr lang="en-US" sz="1300" dirty="0">
-                <a:solidFill>
-                  <a:srgbClr val="6B7280"/>
-                </a:solidFill>
-                <a:latin typeface="Calibri" pitchFamily="34" charset="0"/>
-                <a:ea typeface="Calibri" pitchFamily="34" charset="-122"/>
-                <a:cs typeface="Calibri" pitchFamily="34" charset="-120"/>
-              </a:rPr>
-              <a:t>Um modelo de linguagem com visão revisa o quadro. Nunca cria nem apaga alertas.</a:t>
-            </a:r>
-            <a:endParaRPr lang="en-US" sz="1300" dirty="0"/>
-          </a:p>
-        </p:txBody>
-      </p:sp>
-      <p:sp>
-        <p:nvSpPr>
-          <p:cNvPr id="12" name="Text 10"/>
-          <p:cNvSpPr txBox="1"/>
-          <p:nvPr/>
-        </p:nvSpPr>
-        <p:spPr>
-          <a:xfrm>
-            <a:off x="4663440" y="3063240"/>
-            <a:ext cx="548640" cy="365760"/>
-          </a:xfrm>
-          <a:prstGeom prst="rect">
-            <a:avLst/>
-          </a:prstGeom>
-          <a:noFill/>
-          <a:ln/>
-        </p:spPr>
-        <p:txBody>
-          <a:bodyPr wrap="square" lIns="0" tIns="0" rIns="0" bIns="0" rtlCol="0" anchor="ctr"/>
-          <a:lstStyle/>
-          <a:p>
-            <a:pPr indent="0" marL="0">
-              <a:buNone/>
-            </a:pPr>
-            <a:r>
-              <a:rPr lang="en-US" sz="1600" b="1" dirty="0">
-                <a:solidFill>
-                  <a:srgbClr val="0E7490"/>
-                </a:solidFill>
-                <a:latin typeface="Calibri" pitchFamily="34" charset="0"/>
-                <a:ea typeface="Calibri" pitchFamily="34" charset="-122"/>
-                <a:cs typeface="Calibri" pitchFamily="34" charset="-120"/>
-              </a:rPr>
-              <a:t>04</a:t>
-            </a:r>
-            <a:endParaRPr lang="en-US" sz="1600" dirty="0"/>
-          </a:p>
-        </p:txBody>
-      </p:sp>
-      <p:sp>
-        <p:nvSpPr>
-          <p:cNvPr id="13" name="Text 11"/>
-          <p:cNvSpPr txBox="1"/>
-          <p:nvPr/>
-        </p:nvSpPr>
-        <p:spPr>
-          <a:xfrm>
-            <a:off x="5212080" y="3063240"/>
-            <a:ext cx="3108960" cy="365760"/>
-          </a:xfrm>
-          <a:prstGeom prst="rect">
-            <a:avLst/>
-          </a:prstGeom>
-          <a:noFill/>
-          <a:ln/>
-        </p:spPr>
-        <p:txBody>
-          <a:bodyPr wrap="square" lIns="0" tIns="0" rIns="0" bIns="0" rtlCol="0" anchor="ctr"/>
-          <a:lstStyle/>
-          <a:p>
-            <a:pPr indent="0" marL="0">
-              <a:buNone/>
-            </a:pPr>
-            <a:r>
-              <a:rPr lang="en-US" sz="1800" b="1" dirty="0">
-                <a:solidFill>
-                  <a:srgbClr val="0B1220"/>
-                </a:solidFill>
-                <a:latin typeface="Calibri" pitchFamily="34" charset="0"/>
-                <a:ea typeface="Calibri" pitchFamily="34" charset="-122"/>
-                <a:cs typeface="Calibri" pitchFamily="34" charset="-120"/>
-              </a:rPr>
-              <a:t>Alertas para o supervisor</a:t>
-            </a:r>
-            <a:endParaRPr lang="en-US" sz="1800" dirty="0"/>
-          </a:p>
-        </p:txBody>
-      </p:sp>
-      <p:sp>
-        <p:nvSpPr>
-          <p:cNvPr id="14" name="Text 12"/>
-          <p:cNvSpPr txBox="1"/>
-          <p:nvPr/>
-        </p:nvSpPr>
-        <p:spPr>
-          <a:xfrm>
-            <a:off x="5212080" y="3474720"/>
-            <a:ext cx="3108960" cy="914400"/>
-          </a:xfrm>
-          <a:prstGeom prst="rect">
-            <a:avLst/>
-          </a:prstGeom>
-          <a:noFill/>
-          <a:ln/>
-        </p:spPr>
-        <p:txBody>
-          <a:bodyPr wrap="square" lIns="0" tIns="0" rIns="0" bIns="0" rtlCol="0" anchor="t"/>
-          <a:lstStyle/>
-          <a:p>
-            <a:pPr indent="0" marL="0">
-              <a:buNone/>
-            </a:pPr>
-            <a:r>
-              <a:rPr lang="en-US" sz="1300" dirty="0">
-                <a:solidFill>
-                  <a:srgbClr val="6B7280"/>
-                </a:solidFill>
-                <a:latin typeface="Calibri" pitchFamily="34" charset="0"/>
-                <a:ea typeface="Calibri" pitchFamily="34" charset="-122"/>
-                <a:cs typeface="Calibri" pitchFamily="34" charset="-120"/>
-              </a:rPr>
               <a:t>Agrupados por pessoa, sem piscar, com zona de risco própria por câmera.</a:t>
             </a:r>
-            <a:endParaRPr lang="en-US" sz="1300" dirty="0"/>
-          </a:p>
-        </p:txBody>
-      </p:sp>
-      <p:sp>
-        <p:nvSpPr>
-          <p:cNvPr id="15" name="Text 13"/>
-          <p:cNvSpPr txBox="1"/>
-          <p:nvPr/>
-        </p:nvSpPr>
-        <p:spPr>
-          <a:xfrm>
-            <a:off x="8229600" y="4617720"/>
-            <a:ext cx="457200" cy="274320"/>
+            <a:endParaRPr lang="en-US" sz="1200" dirty="0"/>
+          </a:p>
+        </p:txBody>
+      </p:sp>
+      <p:sp>
+        <p:nvSpPr>
+          <p:cNvPr id="23" name="Text 17"/>
+          <p:cNvSpPr txBox="1"/>
+          <p:nvPr/>
+        </p:nvSpPr>
+        <p:spPr>
+          <a:xfrm>
+            <a:off x="8229600" y="4709160"/>
+            <a:ext cx="457200" cy="228600"/>
           </a:xfrm>
           <a:prstGeom prst="rect">
             <a:avLst/>
@@ -2787,7 +3041,7 @@
         </p:nvSpPr>
         <p:spPr>
           <a:xfrm>
-            <a:off x="640080" y="457200"/>
+            <a:off x="640080" y="411480"/>
             <a:ext cx="7863840" cy="640080"/>
           </a:xfrm>
           <a:prstGeom prst="rect">
@@ -2826,7 +3080,34 @@
         </p:nvSpPr>
         <p:spPr>
           <a:xfrm>
-            <a:off x="640080" y="1417320"/>
+            <a:off x="502920" y="1143000"/>
+            <a:ext cx="8138160" cy="3429000"/>
+          </a:xfrm>
+          <a:prstGeom prst="roundRect">
+            <a:avLst>
+              <a:gd name="adj" fmla="val 3200"/>
+            </a:avLst>
+          </a:prstGeom>
+          <a:solidFill>
+            <a:srgbClr val="F8FAFC"/>
+          </a:solidFill>
+          <a:ln w="6350">
+            <a:solidFill>
+              <a:srgbClr val="F8FAFC"/>
+            </a:solidFill>
+            <a:prstDash val="solid"/>
+          </a:ln>
+        </p:spPr>
+      </p:sp>
+      <p:sp>
+        <p:nvSpPr>
+          <p:cNvPr id="4" name="Shape 2"/>
+          <p:cNvSpPr/>
+          <p:nvPr/>
+        </p:nvSpPr>
+        <p:spPr>
+          <a:xfrm>
+            <a:off x="685800" y="1417320"/>
             <a:ext cx="1188720" cy="777240"/>
           </a:xfrm>
           <a:prstGeom prst="roundRect">
@@ -2847,13 +3128,13 @@
       </p:sp>
       <p:sp>
         <p:nvSpPr>
-          <p:cNvPr id="4" name="Text 2"/>
-          <p:cNvSpPr txBox="1"/>
-          <p:nvPr/>
-        </p:nvSpPr>
-        <p:spPr>
-          <a:xfrm>
-            <a:off x="640080" y="1417320"/>
+          <p:cNvPr id="5" name="Text 3"/>
+          <p:cNvSpPr txBox="1"/>
+          <p:nvPr/>
+        </p:nvSpPr>
+        <p:spPr>
+          <a:xfrm>
+            <a:off x="685800" y="1417320"/>
             <a:ext cx="1188720" cy="777240"/>
           </a:xfrm>
           <a:prstGeom prst="rect">
@@ -2903,13 +3184,13 @@
       </p:sp>
       <p:sp>
         <p:nvSpPr>
-          <p:cNvPr id="5" name="Shape 3"/>
+          <p:cNvPr id="6" name="Shape 4"/>
           <p:cNvSpPr/>
           <p:nvPr/>
         </p:nvSpPr>
         <p:spPr>
           <a:xfrm>
-            <a:off x="2103120" y="1417320"/>
+            <a:off x="2148840" y="1417320"/>
             <a:ext cx="1188720" cy="777240"/>
           </a:xfrm>
           <a:prstGeom prst="roundRect">
@@ -2930,13 +3211,13 @@
       </p:sp>
       <p:sp>
         <p:nvSpPr>
-          <p:cNvPr id="6" name="Text 4"/>
-          <p:cNvSpPr txBox="1"/>
-          <p:nvPr/>
-        </p:nvSpPr>
-        <p:spPr>
-          <a:xfrm>
-            <a:off x="2103120" y="1417320"/>
+          <p:cNvPr id="7" name="Text 5"/>
+          <p:cNvSpPr txBox="1"/>
+          <p:nvPr/>
+        </p:nvSpPr>
+        <p:spPr>
+          <a:xfrm>
+            <a:off x="2148840" y="1417320"/>
             <a:ext cx="1188720" cy="777240"/>
           </a:xfrm>
           <a:prstGeom prst="rect">
@@ -2986,13 +3267,13 @@
       </p:sp>
       <p:sp>
         <p:nvSpPr>
-          <p:cNvPr id="7" name="Shape 5"/>
+          <p:cNvPr id="8" name="Shape 6"/>
           <p:cNvSpPr/>
           <p:nvPr/>
         </p:nvSpPr>
         <p:spPr>
           <a:xfrm>
-            <a:off x="3566160" y="1280160"/>
+            <a:off x="3611880" y="1280160"/>
             <a:ext cx="2103120" cy="1051560"/>
           </a:xfrm>
           <a:prstGeom prst="roundRect">
@@ -3001,7 +3282,7 @@
             </a:avLst>
           </a:prstGeom>
           <a:solidFill>
-            <a:srgbClr val="FFFFFF"/>
+            <a:srgbClr val="DDF1F5"/>
           </a:solidFill>
           <a:ln w="15875">
             <a:solidFill>
@@ -3013,13 +3294,13 @@
       </p:sp>
       <p:sp>
         <p:nvSpPr>
-          <p:cNvPr id="8" name="Text 6"/>
-          <p:cNvSpPr txBox="1"/>
-          <p:nvPr/>
-        </p:nvSpPr>
-        <p:spPr>
-          <a:xfrm>
-            <a:off x="3566160" y="1280160"/>
+          <p:cNvPr id="9" name="Text 7"/>
+          <p:cNvSpPr txBox="1"/>
+          <p:nvPr/>
+        </p:nvSpPr>
+        <p:spPr>
+          <a:xfrm>
+            <a:off x="3611880" y="1280160"/>
             <a:ext cx="2103120" cy="1051560"/>
           </a:xfrm>
           <a:prstGeom prst="rect">
@@ -3086,13 +3367,13 @@
       </p:sp>
       <p:sp>
         <p:nvSpPr>
-          <p:cNvPr id="9" name="Shape 7"/>
+          <p:cNvPr id="10" name="Shape 8"/>
           <p:cNvSpPr/>
           <p:nvPr/>
         </p:nvSpPr>
         <p:spPr>
           <a:xfrm>
-            <a:off x="5943600" y="1417320"/>
+            <a:off x="5989320" y="1417320"/>
             <a:ext cx="1280160" cy="777240"/>
           </a:xfrm>
           <a:prstGeom prst="roundRect">
@@ -3113,13 +3394,13 @@
       </p:sp>
       <p:sp>
         <p:nvSpPr>
-          <p:cNvPr id="10" name="Text 8"/>
-          <p:cNvSpPr txBox="1"/>
-          <p:nvPr/>
-        </p:nvSpPr>
-        <p:spPr>
-          <a:xfrm>
-            <a:off x="5943600" y="1417320"/>
+          <p:cNvPr id="11" name="Text 9"/>
+          <p:cNvSpPr txBox="1"/>
+          <p:nvPr/>
+        </p:nvSpPr>
+        <p:spPr>
+          <a:xfrm>
+            <a:off x="5989320" y="1417320"/>
             <a:ext cx="1280160" cy="777240"/>
           </a:xfrm>
           <a:prstGeom prst="rect">
@@ -3169,14 +3450,14 @@
       </p:sp>
       <p:sp>
         <p:nvSpPr>
-          <p:cNvPr id="11" name="Shape 9"/>
+          <p:cNvPr id="12" name="Shape 10"/>
           <p:cNvSpPr/>
           <p:nvPr/>
         </p:nvSpPr>
         <p:spPr>
           <a:xfrm>
             <a:off x="7498080" y="1417320"/>
-            <a:ext cx="1005840" cy="777240"/>
+            <a:ext cx="914400" cy="777240"/>
           </a:xfrm>
           <a:prstGeom prst="roundRect">
             <a:avLst>
@@ -3196,14 +3477,14 @@
       </p:sp>
       <p:sp>
         <p:nvSpPr>
-          <p:cNvPr id="12" name="Text 10"/>
+          <p:cNvPr id="13" name="Text 11"/>
           <p:cNvSpPr txBox="1"/>
           <p:nvPr/>
         </p:nvSpPr>
         <p:spPr>
           <a:xfrm>
             <a:off x="7498080" y="1417320"/>
-            <a:ext cx="1005840" cy="777240"/>
+            <a:ext cx="914400" cy="777240"/>
           </a:xfrm>
           <a:prstGeom prst="rect">
             <a:avLst/>
@@ -3252,13 +3533,13 @@
       </p:sp>
       <p:sp>
         <p:nvSpPr>
-          <p:cNvPr id="13" name="Shape 11"/>
+          <p:cNvPr id="14" name="Shape 12"/>
           <p:cNvSpPr/>
           <p:nvPr/>
         </p:nvSpPr>
         <p:spPr>
           <a:xfrm>
-            <a:off x="1828800" y="1801368"/>
+            <a:off x="1874520" y="1801368"/>
             <a:ext cx="274320" cy="0"/>
           </a:xfrm>
           <a:prstGeom prst="line">
@@ -3276,13 +3557,13 @@
       </p:sp>
       <p:sp>
         <p:nvSpPr>
-          <p:cNvPr id="14" name="Shape 12"/>
+          <p:cNvPr id="15" name="Shape 13"/>
           <p:cNvSpPr/>
           <p:nvPr/>
         </p:nvSpPr>
         <p:spPr>
           <a:xfrm>
-            <a:off x="3291840" y="1801368"/>
+            <a:off x="3337560" y="1801368"/>
             <a:ext cx="274320" cy="0"/>
           </a:xfrm>
           <a:prstGeom prst="line">
@@ -3300,13 +3581,13 @@
       </p:sp>
       <p:sp>
         <p:nvSpPr>
-          <p:cNvPr id="15" name="Shape 13"/>
+          <p:cNvPr id="16" name="Shape 14"/>
           <p:cNvSpPr/>
           <p:nvPr/>
         </p:nvSpPr>
         <p:spPr>
           <a:xfrm>
-            <a:off x="5669280" y="1801368"/>
+            <a:off x="5715000" y="1801368"/>
             <a:ext cx="274320" cy="0"/>
           </a:xfrm>
           <a:prstGeom prst="line">
@@ -3324,14 +3605,14 @@
       </p:sp>
       <p:sp>
         <p:nvSpPr>
-          <p:cNvPr id="16" name="Shape 14"/>
+          <p:cNvPr id="17" name="Shape 15"/>
           <p:cNvSpPr/>
           <p:nvPr/>
         </p:nvSpPr>
         <p:spPr>
           <a:xfrm>
-            <a:off x="7223760" y="1801368"/>
-            <a:ext cx="274320" cy="0"/>
+            <a:off x="7269480" y="1801368"/>
+            <a:ext cx="228600" cy="0"/>
           </a:xfrm>
           <a:prstGeom prst="line">
             <a:avLst/>
@@ -3348,13 +3629,13 @@
       </p:sp>
       <p:sp>
         <p:nvSpPr>
-          <p:cNvPr id="17" name="Shape 15"/>
+          <p:cNvPr id="18" name="Shape 16"/>
           <p:cNvSpPr/>
           <p:nvPr/>
         </p:nvSpPr>
         <p:spPr>
           <a:xfrm>
-            <a:off x="5943600" y="2834640"/>
+            <a:off x="5989320" y="2834640"/>
             <a:ext cx="1280160" cy="731520"/>
           </a:xfrm>
           <a:prstGeom prst="roundRect">
@@ -3375,13 +3656,13 @@
       </p:sp>
       <p:sp>
         <p:nvSpPr>
-          <p:cNvPr id="18" name="Text 16"/>
-          <p:cNvSpPr txBox="1"/>
-          <p:nvPr/>
-        </p:nvSpPr>
-        <p:spPr>
-          <a:xfrm>
-            <a:off x="5943600" y="2834640"/>
+          <p:cNvPr id="19" name="Text 17"/>
+          <p:cNvSpPr txBox="1"/>
+          <p:nvPr/>
+        </p:nvSpPr>
+        <p:spPr>
+          <a:xfrm>
+            <a:off x="5989320" y="2834640"/>
             <a:ext cx="1280160" cy="731520"/>
           </a:xfrm>
           <a:prstGeom prst="rect">
@@ -3431,26 +3712,26 @@
       </p:sp>
       <p:sp>
         <p:nvSpPr>
-          <p:cNvPr id="19" name="Shape 17"/>
+          <p:cNvPr id="20" name="Shape 18"/>
           <p:cNvSpPr/>
           <p:nvPr/>
         </p:nvSpPr>
         <p:spPr>
           <a:xfrm>
-            <a:off x="5943600" y="3931920"/>
-            <a:ext cx="2560320" cy="640080"/>
+            <a:off x="5989320" y="3886200"/>
+            <a:ext cx="2423160" cy="594360"/>
           </a:xfrm>
           <a:prstGeom prst="roundRect">
             <a:avLst>
-              <a:gd name="adj" fmla="val 14286"/>
+              <a:gd name="adj" fmla="val 15385"/>
             </a:avLst>
           </a:prstGeom>
           <a:solidFill>
-            <a:srgbClr val="F5F6F8"/>
+            <a:srgbClr val="FFFFFF"/>
           </a:solidFill>
           <a:ln w="15875">
             <a:solidFill>
-              <a:srgbClr val="F5F6F8"/>
+              <a:srgbClr val="CBD5E1"/>
             </a:solidFill>
             <a:prstDash val="solid"/>
           </a:ln>
@@ -3458,14 +3739,14 @@
       </p:sp>
       <p:sp>
         <p:nvSpPr>
-          <p:cNvPr id="20" name="Text 18"/>
-          <p:cNvSpPr txBox="1"/>
-          <p:nvPr/>
-        </p:nvSpPr>
-        <p:spPr>
-          <a:xfrm>
-            <a:off x="5943600" y="3931920"/>
-            <a:ext cx="2560320" cy="640080"/>
+          <p:cNvPr id="21" name="Text 19"/>
+          <p:cNvSpPr txBox="1"/>
+          <p:nvPr/>
+        </p:nvSpPr>
+        <p:spPr>
+          <a:xfrm>
+            <a:off x="5989320" y="3886200"/>
+            <a:ext cx="2423160" cy="594360"/>
           </a:xfrm>
           <a:prstGeom prst="rect">
             <a:avLst/>
@@ -3481,7 +3762,7 @@
               <a:buNone/>
             </a:pPr>
             <a:r>
-              <a:rPr lang="en-US" sz="1100" dirty="0">
+              <a:rPr lang="en-US" sz="1000" dirty="0">
                 <a:solidFill>
                   <a:srgbClr val="1F2937"/>
                 </a:solidFill>
@@ -3489,21 +3770,38 @@
                 <a:ea typeface="Calibri" pitchFamily="34" charset="-122"/>
                 <a:cs typeface="Calibri" pitchFamily="34" charset="-120"/>
               </a:rPr>
-              <a:t>Dashboard React · supervisor, técnico, operador e portaria</a:t>
-            </a:r>
-            <a:endParaRPr lang="en-US" sz="1100" dirty="0"/>
-          </a:p>
-        </p:txBody>
-      </p:sp>
-      <p:sp>
-        <p:nvSpPr>
-          <p:cNvPr id="21" name="Shape 19"/>
+              <a:t>Dashboard React</a:t>
+            </a:r>
+            <a:endParaRPr lang="en-US" sz="1000" dirty="0"/>
+          </a:p>
+          <a:p>
+            <a:pPr algn="ctr" indent="0" marL="0">
+              <a:buNone/>
+            </a:pPr>
+            <a:r>
+              <a:rPr lang="en-US" sz="1000" dirty="0">
+                <a:solidFill>
+                  <a:srgbClr val="1F2937"/>
+                </a:solidFill>
+                <a:latin typeface="Calibri" pitchFamily="34" charset="0"/>
+                <a:ea typeface="Calibri" pitchFamily="34" charset="-122"/>
+                <a:cs typeface="Calibri" pitchFamily="34" charset="-120"/>
+              </a:rPr>
+              <a:t>supervisor · técnico · operador · portaria</a:t>
+            </a:r>
+            <a:endParaRPr lang="en-US" sz="1000" dirty="0"/>
+          </a:p>
+        </p:txBody>
+      </p:sp>
+      <p:sp>
+        <p:nvSpPr>
+          <p:cNvPr id="22" name="Shape 20"/>
           <p:cNvSpPr/>
           <p:nvPr/>
         </p:nvSpPr>
         <p:spPr>
           <a:xfrm>
-            <a:off x="6583680" y="2194560"/>
+            <a:off x="6629400" y="2194560"/>
             <a:ext cx="0" cy="640080"/>
           </a:xfrm>
           <a:prstGeom prst="line">
@@ -3521,14 +3819,14 @@
       </p:sp>
       <p:sp>
         <p:nvSpPr>
-          <p:cNvPr id="22" name="Shape 20"/>
+          <p:cNvPr id="23" name="Shape 21"/>
           <p:cNvSpPr/>
           <p:nvPr/>
         </p:nvSpPr>
         <p:spPr>
           <a:xfrm>
-            <a:off x="6583680" y="3566160"/>
-            <a:ext cx="0" cy="365760"/>
+            <a:off x="6629400" y="3566160"/>
+            <a:ext cx="0" cy="320040"/>
           </a:xfrm>
           <a:prstGeom prst="line">
             <a:avLst/>
@@ -3545,13 +3843,13 @@
       </p:sp>
       <p:sp>
         <p:nvSpPr>
-          <p:cNvPr id="23" name="Shape 21"/>
+          <p:cNvPr id="24" name="Shape 22"/>
           <p:cNvSpPr/>
           <p:nvPr/>
         </p:nvSpPr>
         <p:spPr>
           <a:xfrm>
-            <a:off x="3566160" y="2834640"/>
+            <a:off x="3611880" y="2834640"/>
             <a:ext cx="2103120" cy="731520"/>
           </a:xfrm>
           <a:prstGeom prst="roundRect">
@@ -3560,7 +3858,7 @@
             </a:avLst>
           </a:prstGeom>
           <a:solidFill>
-            <a:srgbClr val="FFFFFF"/>
+            <a:srgbClr val="F5F3FF"/>
           </a:solidFill>
           <a:ln w="15875">
             <a:solidFill>
@@ -3572,13 +3870,13 @@
       </p:sp>
       <p:sp>
         <p:nvSpPr>
-          <p:cNvPr id="24" name="Text 22"/>
-          <p:cNvSpPr txBox="1"/>
-          <p:nvPr/>
-        </p:nvSpPr>
-        <p:spPr>
-          <a:xfrm>
-            <a:off x="3566160" y="2834640"/>
+          <p:cNvPr id="25" name="Text 23"/>
+          <p:cNvSpPr txBox="1"/>
+          <p:nvPr/>
+        </p:nvSpPr>
+        <p:spPr>
+          <a:xfrm>
+            <a:off x="3611880" y="2834640"/>
             <a:ext cx="2103120" cy="731520"/>
           </a:xfrm>
           <a:prstGeom prst="rect">
@@ -3628,14 +3926,14 @@
       </p:sp>
       <p:sp>
         <p:nvSpPr>
-          <p:cNvPr id="25" name="Shape 23"/>
+          <p:cNvPr id="26" name="Shape 24"/>
           <p:cNvSpPr/>
           <p:nvPr/>
         </p:nvSpPr>
         <p:spPr>
           <a:xfrm flipH="1">
             <a:off x="4937760" y="2103120"/>
-            <a:ext cx="1005840" cy="731520"/>
+            <a:ext cx="1051560" cy="731520"/>
           </a:xfrm>
           <a:prstGeom prst="line">
             <a:avLst/>
@@ -3652,13 +3950,13 @@
       </p:sp>
       <p:sp>
         <p:nvSpPr>
-          <p:cNvPr id="26" name="Shape 24"/>
+          <p:cNvPr id="27" name="Shape 25"/>
           <p:cNvSpPr/>
           <p:nvPr/>
         </p:nvSpPr>
         <p:spPr>
           <a:xfrm>
-            <a:off x="5669280" y="3200400"/>
+            <a:off x="5715000" y="3200400"/>
             <a:ext cx="274320" cy="0"/>
           </a:xfrm>
           <a:prstGeom prst="line">
@@ -3676,14 +3974,14 @@
       </p:sp>
       <p:sp>
         <p:nvSpPr>
-          <p:cNvPr id="27" name="Text 25"/>
-          <p:cNvSpPr txBox="1"/>
-          <p:nvPr/>
-        </p:nvSpPr>
-        <p:spPr>
-          <a:xfrm>
-            <a:off x="640080" y="3063240"/>
-            <a:ext cx="2743200" cy="548640"/>
+          <p:cNvPr id="28" name="Text 26"/>
+          <p:cNvSpPr txBox="1"/>
+          <p:nvPr/>
+        </p:nvSpPr>
+        <p:spPr>
+          <a:xfrm>
+            <a:off x="685800" y="3017520"/>
+            <a:ext cx="2651760" cy="548640"/>
           </a:xfrm>
           <a:prstGeom prst="rect">
             <a:avLst/>
@@ -3707,7 +4005,7 @@
                 <a:ea typeface="Calibri" pitchFamily="34" charset="-122"/>
                 <a:cs typeface="Calibri" pitchFamily="34" charset="-120"/>
               </a:rPr>
-              <a:t>Roxo: a segunda opinião roda fora do caminho do vídeo.</a:t>
+              <a:t>A segunda opinião (roxo) roda fora do caminho do vídeo.</a:t>
             </a:r>
             <a:endParaRPr lang="en-US" sz="1100" dirty="0"/>
           </a:p>
@@ -3715,14 +4013,14 @@
       </p:sp>
       <p:sp>
         <p:nvSpPr>
-          <p:cNvPr id="28" name="Text 26"/>
-          <p:cNvSpPr txBox="1"/>
-          <p:nvPr/>
-        </p:nvSpPr>
-        <p:spPr>
-          <a:xfrm>
-            <a:off x="8229600" y="4617720"/>
-            <a:ext cx="457200" cy="274320"/>
+          <p:cNvPr id="29" name="Text 27"/>
+          <p:cNvSpPr txBox="1"/>
+          <p:nvPr/>
+        </p:nvSpPr>
+        <p:spPr>
+          <a:xfrm>
+            <a:off x="8229600" y="4709160"/>
+            <a:ext cx="457200" cy="228600"/>
           </a:xfrm>
           <a:prstGeom prst="rect">
             <a:avLst/>
@@ -3795,7 +4093,7 @@
         </p:nvSpPr>
         <p:spPr>
           <a:xfrm>
-            <a:off x="640080" y="457200"/>
+            <a:off x="640080" y="411480"/>
             <a:ext cx="7863840" cy="640080"/>
           </a:xfrm>
           <a:prstGeom prst="rect">
@@ -3828,14 +4126,41 @@
       </p:sp>
       <p:sp>
         <p:nvSpPr>
-          <p:cNvPr id="3" name="Text 1"/>
-          <p:cNvSpPr txBox="1"/>
-          <p:nvPr/>
-        </p:nvSpPr>
-        <p:spPr>
-          <a:xfrm>
-            <a:off x="640080" y="1463040"/>
-            <a:ext cx="2468880" cy="274320"/>
+          <p:cNvPr id="3" name="Shape 1"/>
+          <p:cNvSpPr/>
+          <p:nvPr/>
+        </p:nvSpPr>
+        <p:spPr>
+          <a:xfrm>
+            <a:off x="640080" y="1188720"/>
+            <a:ext cx="2514600" cy="1645920"/>
+          </a:xfrm>
+          <a:prstGeom prst="roundRect">
+            <a:avLst>
+              <a:gd name="adj" fmla="val 6667"/>
+            </a:avLst>
+          </a:prstGeom>
+          <a:solidFill>
+            <a:srgbClr val="F3F5F8"/>
+          </a:solidFill>
+          <a:ln w="6350">
+            <a:solidFill>
+              <a:srgbClr val="F3F5F8"/>
+            </a:solidFill>
+            <a:prstDash val="solid"/>
+          </a:ln>
+        </p:spPr>
+      </p:sp>
+      <p:sp>
+        <p:nvSpPr>
+          <p:cNvPr id="4" name="Text 2"/>
+          <p:cNvSpPr txBox="1"/>
+          <p:nvPr/>
+        </p:nvSpPr>
+        <p:spPr>
+          <a:xfrm>
+            <a:off x="868680" y="1325880"/>
+            <a:ext cx="2103120" cy="256032"/>
           </a:xfrm>
           <a:prstGeom prst="rect">
             <a:avLst/>
@@ -3851,7 +4176,7 @@
               <a:buNone/>
             </a:pPr>
             <a:r>
-              <a:rPr lang="en-US" sz="1100" b="1" spc="200" kern="0" dirty="0">
+              <a:rPr lang="en-US" sz="1050" b="1" spc="200" kern="0" dirty="0">
                 <a:solidFill>
                   <a:srgbClr val="0E7490"/>
                 </a:solidFill>
@@ -3861,39 +4186,60 @@
               </a:rPr>
               <a:t>LINGUAGENS</a:t>
             </a:r>
-            <a:endParaRPr lang="en-US" sz="1100" dirty="0"/>
-          </a:p>
-        </p:txBody>
-      </p:sp>
-      <p:sp>
-        <p:nvSpPr>
-          <p:cNvPr id="4" name="Text 2"/>
-          <p:cNvSpPr txBox="1"/>
-          <p:nvPr/>
-        </p:nvSpPr>
-        <p:spPr>
-          <a:xfrm>
-            <a:off x="640080" y="1828800"/>
-            <a:ext cx="2468880" cy="1097280"/>
-          </a:xfrm>
-          <a:prstGeom prst="rect">
-            <a:avLst/>
-          </a:prstGeom>
-          <a:noFill/>
-          <a:ln/>
-        </p:spPr>
-        <p:txBody>
-          <a:bodyPr wrap="square" lIns="0" tIns="0" rIns="0" bIns="0" rtlCol="0" anchor="t"/>
-          <a:lstStyle/>
-          <a:p>
-            <a:pPr indent="0" marL="0">
-              <a:spcAft>
-                <a:spcPts val="400"/>
-              </a:spcAft>
-              <a:buNone/>
-            </a:pPr>
-            <a:r>
-              <a:rPr lang="en-US" sz="1500" dirty="0">
+            <a:endParaRPr lang="en-US" sz="1050" dirty="0"/>
+          </a:p>
+        </p:txBody>
+      </p:sp>
+      <p:pic>
+        <p:nvPicPr>
+          <p:cNvPr id="5" name="Image 0" descr="preencoded.png">    </p:cNvPr>
+          <p:cNvPicPr>
+            <a:picLocks noChangeAspect="1"/>
+          </p:cNvPicPr>
+          <p:nvPr/>
+        </p:nvPicPr>
+        <p:blipFill>
+          <a:blip r:embed="rId1"/>
+          <a:stretch>
+            <a:fillRect/>
+          </a:stretch>
+        </p:blipFill>
+        <p:spPr>
+          <a:xfrm>
+            <a:off x="886968" y="1709928"/>
+            <a:ext cx="246888" cy="246888"/>
+          </a:xfrm>
+          <a:prstGeom prst="rect">
+            <a:avLst/>
+          </a:prstGeom>
+        </p:spPr>
+      </p:pic>
+      <p:sp>
+        <p:nvSpPr>
+          <p:cNvPr id="6" name="Text 3"/>
+          <p:cNvSpPr txBox="1"/>
+          <p:nvPr/>
+        </p:nvSpPr>
+        <p:spPr>
+          <a:xfrm>
+            <a:off x="1280160" y="1691640"/>
+            <a:ext cx="1783080" cy="283464"/>
+          </a:xfrm>
+          <a:prstGeom prst="rect">
+            <a:avLst/>
+          </a:prstGeom>
+          <a:noFill/>
+          <a:ln/>
+        </p:spPr>
+        <p:txBody>
+          <a:bodyPr wrap="square" lIns="0" tIns="0" rIns="0" bIns="0" rtlCol="0" anchor="ctr"/>
+          <a:lstStyle/>
+          <a:p>
+            <a:pPr indent="0" marL="0">
+              <a:buNone/>
+            </a:pPr>
+            <a:r>
+              <a:rPr lang="en-US" sz="1350" dirty="0">
                 <a:solidFill>
                   <a:srgbClr val="1F2937"/>
                 </a:solidFill>
@@ -3903,17 +4249,60 @@
               </a:rPr>
               <a:t>Python 3.11</a:t>
             </a:r>
-            <a:endParaRPr lang="en-US" sz="1500" dirty="0"/>
-          </a:p>
-          <a:p>
-            <a:pPr indent="0" marL="0">
-              <a:spcAft>
-                <a:spcPts val="400"/>
-              </a:spcAft>
-              <a:buNone/>
-            </a:pPr>
-            <a:r>
-              <a:rPr lang="en-US" sz="1500" dirty="0">
+            <a:endParaRPr lang="en-US" sz="1350" dirty="0"/>
+          </a:p>
+        </p:txBody>
+      </p:sp>
+      <p:pic>
+        <p:nvPicPr>
+          <p:cNvPr id="7" name="Image 1" descr="preencoded.png">    </p:cNvPr>
+          <p:cNvPicPr>
+            <a:picLocks noChangeAspect="1"/>
+          </p:cNvPicPr>
+          <p:nvPr/>
+        </p:nvPicPr>
+        <p:blipFill>
+          <a:blip r:embed="rId2"/>
+          <a:stretch>
+            <a:fillRect/>
+          </a:stretch>
+        </p:blipFill>
+        <p:spPr>
+          <a:xfrm>
+            <a:off x="886968" y="2066544"/>
+            <a:ext cx="246888" cy="246888"/>
+          </a:xfrm>
+          <a:prstGeom prst="rect">
+            <a:avLst/>
+          </a:prstGeom>
+        </p:spPr>
+      </p:pic>
+      <p:sp>
+        <p:nvSpPr>
+          <p:cNvPr id="8" name="Text 4"/>
+          <p:cNvSpPr txBox="1"/>
+          <p:nvPr/>
+        </p:nvSpPr>
+        <p:spPr>
+          <a:xfrm>
+            <a:off x="1280160" y="2048256"/>
+            <a:ext cx="1783080" cy="283464"/>
+          </a:xfrm>
+          <a:prstGeom prst="rect">
+            <a:avLst/>
+          </a:prstGeom>
+          <a:noFill/>
+          <a:ln/>
+        </p:spPr>
+        <p:txBody>
+          <a:bodyPr wrap="square" lIns="0" tIns="0" rIns="0" bIns="0" rtlCol="0" anchor="ctr"/>
+          <a:lstStyle/>
+          <a:p>
+            <a:pPr indent="0" marL="0">
+              <a:buNone/>
+            </a:pPr>
+            <a:r>
+              <a:rPr lang="en-US" sz="1350" dirty="0">
                 <a:solidFill>
                   <a:srgbClr val="1F2937"/>
                 </a:solidFill>
@@ -3923,20 +4312,47 @@
               </a:rPr>
               <a:t>TypeScript</a:t>
             </a:r>
-            <a:endParaRPr lang="en-US" sz="1500" dirty="0"/>
-          </a:p>
-        </p:txBody>
-      </p:sp>
-      <p:sp>
-        <p:nvSpPr>
-          <p:cNvPr id="5" name="Text 3"/>
-          <p:cNvSpPr txBox="1"/>
-          <p:nvPr/>
-        </p:nvSpPr>
-        <p:spPr>
-          <a:xfrm>
-            <a:off x="3337560" y="1463040"/>
-            <a:ext cx="2468880" cy="274320"/>
+            <a:endParaRPr lang="en-US" sz="1350" dirty="0"/>
+          </a:p>
+        </p:txBody>
+      </p:sp>
+      <p:sp>
+        <p:nvSpPr>
+          <p:cNvPr id="9" name="Shape 5"/>
+          <p:cNvSpPr/>
+          <p:nvPr/>
+        </p:nvSpPr>
+        <p:spPr>
+          <a:xfrm>
+            <a:off x="3337560" y="1188720"/>
+            <a:ext cx="2514600" cy="1645920"/>
+          </a:xfrm>
+          <a:prstGeom prst="roundRect">
+            <a:avLst>
+              <a:gd name="adj" fmla="val 6667"/>
+            </a:avLst>
+          </a:prstGeom>
+          <a:solidFill>
+            <a:srgbClr val="F3F5F8"/>
+          </a:solidFill>
+          <a:ln w="6350">
+            <a:solidFill>
+              <a:srgbClr val="F3F5F8"/>
+            </a:solidFill>
+            <a:prstDash val="solid"/>
+          </a:ln>
+        </p:spPr>
+      </p:sp>
+      <p:sp>
+        <p:nvSpPr>
+          <p:cNvPr id="10" name="Text 6"/>
+          <p:cNvSpPr txBox="1"/>
+          <p:nvPr/>
+        </p:nvSpPr>
+        <p:spPr>
+          <a:xfrm>
+            <a:off x="3566160" y="1325880"/>
+            <a:ext cx="2103120" cy="256032"/>
           </a:xfrm>
           <a:prstGeom prst="rect">
             <a:avLst/>
@@ -3952,7 +4368,7 @@
               <a:buNone/>
             </a:pPr>
             <a:r>
-              <a:rPr lang="en-US" sz="1100" b="1" spc="200" kern="0" dirty="0">
+              <a:rPr lang="en-US" sz="1050" b="1" spc="200" kern="0" dirty="0">
                 <a:solidFill>
                   <a:srgbClr val="0E7490"/>
                 </a:solidFill>
@@ -3962,39 +4378,60 @@
               </a:rPr>
               <a:t>BACKEND</a:t>
             </a:r>
-            <a:endParaRPr lang="en-US" sz="1100" dirty="0"/>
-          </a:p>
-        </p:txBody>
-      </p:sp>
-      <p:sp>
-        <p:nvSpPr>
-          <p:cNvPr id="6" name="Text 4"/>
-          <p:cNvSpPr txBox="1"/>
-          <p:nvPr/>
-        </p:nvSpPr>
-        <p:spPr>
-          <a:xfrm>
-            <a:off x="3337560" y="1828800"/>
-            <a:ext cx="2468880" cy="1097280"/>
-          </a:xfrm>
-          <a:prstGeom prst="rect">
-            <a:avLst/>
-          </a:prstGeom>
-          <a:noFill/>
-          <a:ln/>
-        </p:spPr>
-        <p:txBody>
-          <a:bodyPr wrap="square" lIns="0" tIns="0" rIns="0" bIns="0" rtlCol="0" anchor="t"/>
-          <a:lstStyle/>
-          <a:p>
-            <a:pPr indent="0" marL="0">
-              <a:spcAft>
-                <a:spcPts val="400"/>
-              </a:spcAft>
-              <a:buNone/>
-            </a:pPr>
-            <a:r>
-              <a:rPr lang="en-US" sz="1500" dirty="0">
+            <a:endParaRPr lang="en-US" sz="1050" dirty="0"/>
+          </a:p>
+        </p:txBody>
+      </p:sp>
+      <p:pic>
+        <p:nvPicPr>
+          <p:cNvPr id="11" name="Image 2" descr="preencoded.png">    </p:cNvPr>
+          <p:cNvPicPr>
+            <a:picLocks noChangeAspect="1"/>
+          </p:cNvPicPr>
+          <p:nvPr/>
+        </p:nvPicPr>
+        <p:blipFill>
+          <a:blip r:embed="rId3"/>
+          <a:stretch>
+            <a:fillRect/>
+          </a:stretch>
+        </p:blipFill>
+        <p:spPr>
+          <a:xfrm>
+            <a:off x="3584448" y="1709928"/>
+            <a:ext cx="246888" cy="246888"/>
+          </a:xfrm>
+          <a:prstGeom prst="rect">
+            <a:avLst/>
+          </a:prstGeom>
+        </p:spPr>
+      </p:pic>
+      <p:sp>
+        <p:nvSpPr>
+          <p:cNvPr id="12" name="Text 7"/>
+          <p:cNvSpPr txBox="1"/>
+          <p:nvPr/>
+        </p:nvSpPr>
+        <p:spPr>
+          <a:xfrm>
+            <a:off x="3977640" y="1691640"/>
+            <a:ext cx="1783080" cy="283464"/>
+          </a:xfrm>
+          <a:prstGeom prst="rect">
+            <a:avLst/>
+          </a:prstGeom>
+          <a:noFill/>
+          <a:ln/>
+        </p:spPr>
+        <p:txBody>
+          <a:bodyPr wrap="square" lIns="0" tIns="0" rIns="0" bIns="0" rtlCol="0" anchor="ctr"/>
+          <a:lstStyle/>
+          <a:p>
+            <a:pPr indent="0" marL="0">
+              <a:buNone/>
+            </a:pPr>
+            <a:r>
+              <a:rPr lang="en-US" sz="1350" dirty="0">
                 <a:solidFill>
                   <a:srgbClr val="1F2937"/>
                 </a:solidFill>
@@ -4002,19 +4439,62 @@
                 <a:ea typeface="Calibri" pitchFamily="34" charset="-122"/>
                 <a:cs typeface="Calibri" pitchFamily="34" charset="-120"/>
               </a:rPr>
-              <a:t>Flask · Socket.IO</a:t>
-            </a:r>
-            <a:endParaRPr lang="en-US" sz="1500" dirty="0"/>
-          </a:p>
-          <a:p>
-            <a:pPr indent="0" marL="0">
-              <a:spcAft>
-                <a:spcPts val="400"/>
-              </a:spcAft>
-              <a:buNone/>
-            </a:pPr>
-            <a:r>
-              <a:rPr lang="en-US" sz="1500" dirty="0">
+              <a:t>Flask</a:t>
+            </a:r>
+            <a:endParaRPr lang="en-US" sz="1350" dirty="0"/>
+          </a:p>
+        </p:txBody>
+      </p:sp>
+      <p:pic>
+        <p:nvPicPr>
+          <p:cNvPr id="13" name="Image 3" descr="preencoded.png">    </p:cNvPr>
+          <p:cNvPicPr>
+            <a:picLocks noChangeAspect="1"/>
+          </p:cNvPicPr>
+          <p:nvPr/>
+        </p:nvPicPr>
+        <p:blipFill>
+          <a:blip r:embed="rId4"/>
+          <a:stretch>
+            <a:fillRect/>
+          </a:stretch>
+        </p:blipFill>
+        <p:spPr>
+          <a:xfrm>
+            <a:off x="3584448" y="2066544"/>
+            <a:ext cx="246888" cy="246888"/>
+          </a:xfrm>
+          <a:prstGeom prst="rect">
+            <a:avLst/>
+          </a:prstGeom>
+        </p:spPr>
+      </p:pic>
+      <p:sp>
+        <p:nvSpPr>
+          <p:cNvPr id="14" name="Text 8"/>
+          <p:cNvSpPr txBox="1"/>
+          <p:nvPr/>
+        </p:nvSpPr>
+        <p:spPr>
+          <a:xfrm>
+            <a:off x="3977640" y="2048256"/>
+            <a:ext cx="1783080" cy="283464"/>
+          </a:xfrm>
+          <a:prstGeom prst="rect">
+            <a:avLst/>
+          </a:prstGeom>
+          <a:noFill/>
+          <a:ln/>
+        </p:spPr>
+        <p:txBody>
+          <a:bodyPr wrap="square" lIns="0" tIns="0" rIns="0" bIns="0" rtlCol="0" anchor="ctr"/>
+          <a:lstStyle/>
+          <a:p>
+            <a:pPr indent="0" marL="0">
+              <a:buNone/>
+            </a:pPr>
+            <a:r>
+              <a:rPr lang="en-US" sz="1350" dirty="0">
                 <a:solidFill>
                   <a:srgbClr val="1F2937"/>
                 </a:solidFill>
@@ -4024,17 +4504,60 @@
               </a:rPr>
               <a:t>SQLAlchemy · Alembic</a:t>
             </a:r>
-            <a:endParaRPr lang="en-US" sz="1500" dirty="0"/>
-          </a:p>
-          <a:p>
-            <a:pPr indent="0" marL="0">
-              <a:spcAft>
-                <a:spcPts val="400"/>
-              </a:spcAft>
-              <a:buNone/>
-            </a:pPr>
-            <a:r>
-              <a:rPr lang="en-US" sz="1500" dirty="0">
+            <a:endParaRPr lang="en-US" sz="1350" dirty="0"/>
+          </a:p>
+        </p:txBody>
+      </p:sp>
+      <p:pic>
+        <p:nvPicPr>
+          <p:cNvPr id="15" name="Image 4" descr="preencoded.png">    </p:cNvPr>
+          <p:cNvPicPr>
+            <a:picLocks noChangeAspect="1"/>
+          </p:cNvPicPr>
+          <p:nvPr/>
+        </p:nvPicPr>
+        <p:blipFill>
+          <a:blip r:embed="rId5"/>
+          <a:stretch>
+            <a:fillRect/>
+          </a:stretch>
+        </p:blipFill>
+        <p:spPr>
+          <a:xfrm>
+            <a:off x="3584448" y="2423160"/>
+            <a:ext cx="246888" cy="246888"/>
+          </a:xfrm>
+          <a:prstGeom prst="rect">
+            <a:avLst/>
+          </a:prstGeom>
+        </p:spPr>
+      </p:pic>
+      <p:sp>
+        <p:nvSpPr>
+          <p:cNvPr id="16" name="Text 9"/>
+          <p:cNvSpPr txBox="1"/>
+          <p:nvPr/>
+        </p:nvSpPr>
+        <p:spPr>
+          <a:xfrm>
+            <a:off x="3977640" y="2404872"/>
+            <a:ext cx="1783080" cy="283464"/>
+          </a:xfrm>
+          <a:prstGeom prst="rect">
+            <a:avLst/>
+          </a:prstGeom>
+          <a:noFill/>
+          <a:ln/>
+        </p:spPr>
+        <p:txBody>
+          <a:bodyPr wrap="square" lIns="0" tIns="0" rIns="0" bIns="0" rtlCol="0" anchor="ctr"/>
+          <a:lstStyle/>
+          <a:p>
+            <a:pPr indent="0" marL="0">
+              <a:buNone/>
+            </a:pPr>
+            <a:r>
+              <a:rPr lang="en-US" sz="1350" dirty="0">
                 <a:solidFill>
                   <a:srgbClr val="1F2937"/>
                 </a:solidFill>
@@ -4044,20 +4567,47 @@
               </a:rPr>
               <a:t>SQLite</a:t>
             </a:r>
-            <a:endParaRPr lang="en-US" sz="1500" dirty="0"/>
-          </a:p>
-        </p:txBody>
-      </p:sp>
-      <p:sp>
-        <p:nvSpPr>
-          <p:cNvPr id="7" name="Text 5"/>
-          <p:cNvSpPr txBox="1"/>
-          <p:nvPr/>
-        </p:nvSpPr>
-        <p:spPr>
-          <a:xfrm>
-            <a:off x="6035040" y="1463040"/>
-            <a:ext cx="2468880" cy="274320"/>
+            <a:endParaRPr lang="en-US" sz="1350" dirty="0"/>
+          </a:p>
+        </p:txBody>
+      </p:sp>
+      <p:sp>
+        <p:nvSpPr>
+          <p:cNvPr id="17" name="Shape 10"/>
+          <p:cNvSpPr/>
+          <p:nvPr/>
+        </p:nvSpPr>
+        <p:spPr>
+          <a:xfrm>
+            <a:off x="6035040" y="1188720"/>
+            <a:ext cx="2514600" cy="1645920"/>
+          </a:xfrm>
+          <a:prstGeom prst="roundRect">
+            <a:avLst>
+              <a:gd name="adj" fmla="val 6667"/>
+            </a:avLst>
+          </a:prstGeom>
+          <a:solidFill>
+            <a:srgbClr val="F3F5F8"/>
+          </a:solidFill>
+          <a:ln w="6350">
+            <a:solidFill>
+              <a:srgbClr val="F3F5F8"/>
+            </a:solidFill>
+            <a:prstDash val="solid"/>
+          </a:ln>
+        </p:spPr>
+      </p:sp>
+      <p:sp>
+        <p:nvSpPr>
+          <p:cNvPr id="18" name="Text 11"/>
+          <p:cNvSpPr txBox="1"/>
+          <p:nvPr/>
+        </p:nvSpPr>
+        <p:spPr>
+          <a:xfrm>
+            <a:off x="6263640" y="1325880"/>
+            <a:ext cx="2103120" cy="256032"/>
           </a:xfrm>
           <a:prstGeom prst="rect">
             <a:avLst/>
@@ -4073,7 +4623,7 @@
               <a:buNone/>
             </a:pPr>
             <a:r>
-              <a:rPr lang="en-US" sz="1100" b="1" spc="200" kern="0" dirty="0">
+              <a:rPr lang="en-US" sz="1050" b="1" spc="200" kern="0" dirty="0">
                 <a:solidFill>
                   <a:srgbClr val="0E7490"/>
                 </a:solidFill>
@@ -4083,39 +4633,60 @@
               </a:rPr>
               <a:t>FRONTEND</a:t>
             </a:r>
-            <a:endParaRPr lang="en-US" sz="1100" dirty="0"/>
-          </a:p>
-        </p:txBody>
-      </p:sp>
-      <p:sp>
-        <p:nvSpPr>
-          <p:cNvPr id="8" name="Text 6"/>
-          <p:cNvSpPr txBox="1"/>
-          <p:nvPr/>
-        </p:nvSpPr>
-        <p:spPr>
-          <a:xfrm>
-            <a:off x="6035040" y="1828800"/>
-            <a:ext cx="2468880" cy="1097280"/>
-          </a:xfrm>
-          <a:prstGeom prst="rect">
-            <a:avLst/>
-          </a:prstGeom>
-          <a:noFill/>
-          <a:ln/>
-        </p:spPr>
-        <p:txBody>
-          <a:bodyPr wrap="square" lIns="0" tIns="0" rIns="0" bIns="0" rtlCol="0" anchor="t"/>
-          <a:lstStyle/>
-          <a:p>
-            <a:pPr indent="0" marL="0">
-              <a:spcAft>
-                <a:spcPts val="400"/>
-              </a:spcAft>
-              <a:buNone/>
-            </a:pPr>
-            <a:r>
-              <a:rPr lang="en-US" sz="1500" dirty="0">
+            <a:endParaRPr lang="en-US" sz="1050" dirty="0"/>
+          </a:p>
+        </p:txBody>
+      </p:sp>
+      <p:pic>
+        <p:nvPicPr>
+          <p:cNvPr id="19" name="Image 5" descr="preencoded.png">    </p:cNvPr>
+          <p:cNvPicPr>
+            <a:picLocks noChangeAspect="1"/>
+          </p:cNvPicPr>
+          <p:nvPr/>
+        </p:nvPicPr>
+        <p:blipFill>
+          <a:blip r:embed="rId6"/>
+          <a:stretch>
+            <a:fillRect/>
+          </a:stretch>
+        </p:blipFill>
+        <p:spPr>
+          <a:xfrm>
+            <a:off x="6281928" y="1709928"/>
+            <a:ext cx="246888" cy="246888"/>
+          </a:xfrm>
+          <a:prstGeom prst="rect">
+            <a:avLst/>
+          </a:prstGeom>
+        </p:spPr>
+      </p:pic>
+      <p:sp>
+        <p:nvSpPr>
+          <p:cNvPr id="20" name="Text 12"/>
+          <p:cNvSpPr txBox="1"/>
+          <p:nvPr/>
+        </p:nvSpPr>
+        <p:spPr>
+          <a:xfrm>
+            <a:off x="6675120" y="1691640"/>
+            <a:ext cx="1783080" cy="283464"/>
+          </a:xfrm>
+          <a:prstGeom prst="rect">
+            <a:avLst/>
+          </a:prstGeom>
+          <a:noFill/>
+          <a:ln/>
+        </p:spPr>
+        <p:txBody>
+          <a:bodyPr wrap="square" lIns="0" tIns="0" rIns="0" bIns="0" rtlCol="0" anchor="ctr"/>
+          <a:lstStyle/>
+          <a:p>
+            <a:pPr indent="0" marL="0">
+              <a:buNone/>
+            </a:pPr>
+            <a:r>
+              <a:rPr lang="en-US" sz="1350" dirty="0">
                 <a:solidFill>
                   <a:srgbClr val="1F2937"/>
                 </a:solidFill>
@@ -4123,19 +4694,62 @@
                 <a:ea typeface="Calibri" pitchFamily="34" charset="-122"/>
                 <a:cs typeface="Calibri" pitchFamily="34" charset="-120"/>
               </a:rPr>
-              <a:t>React 18 · Vite</a:t>
-            </a:r>
-            <a:endParaRPr lang="en-US" sz="1500" dirty="0"/>
-          </a:p>
-          <a:p>
-            <a:pPr indent="0" marL="0">
-              <a:spcAft>
-                <a:spcPts val="400"/>
-              </a:spcAft>
-              <a:buNone/>
-            </a:pPr>
-            <a:r>
-              <a:rPr lang="en-US" sz="1500" dirty="0">
+              <a:t>React 18</a:t>
+            </a:r>
+            <a:endParaRPr lang="en-US" sz="1350" dirty="0"/>
+          </a:p>
+        </p:txBody>
+      </p:sp>
+      <p:pic>
+        <p:nvPicPr>
+          <p:cNvPr id="21" name="Image 6" descr="preencoded.png">    </p:cNvPr>
+          <p:cNvPicPr>
+            <a:picLocks noChangeAspect="1"/>
+          </p:cNvPicPr>
+          <p:nvPr/>
+        </p:nvPicPr>
+        <p:blipFill>
+          <a:blip r:embed="rId7"/>
+          <a:stretch>
+            <a:fillRect/>
+          </a:stretch>
+        </p:blipFill>
+        <p:spPr>
+          <a:xfrm>
+            <a:off x="6281928" y="2066544"/>
+            <a:ext cx="246888" cy="246888"/>
+          </a:xfrm>
+          <a:prstGeom prst="rect">
+            <a:avLst/>
+          </a:prstGeom>
+        </p:spPr>
+      </p:pic>
+      <p:sp>
+        <p:nvSpPr>
+          <p:cNvPr id="22" name="Text 13"/>
+          <p:cNvSpPr txBox="1"/>
+          <p:nvPr/>
+        </p:nvSpPr>
+        <p:spPr>
+          <a:xfrm>
+            <a:off x="6675120" y="2048256"/>
+            <a:ext cx="1783080" cy="283464"/>
+          </a:xfrm>
+          <a:prstGeom prst="rect">
+            <a:avLst/>
+          </a:prstGeom>
+          <a:noFill/>
+          <a:ln/>
+        </p:spPr>
+        <p:txBody>
+          <a:bodyPr wrap="square" lIns="0" tIns="0" rIns="0" bIns="0" rtlCol="0" anchor="ctr"/>
+          <a:lstStyle/>
+          <a:p>
+            <a:pPr indent="0" marL="0">
+              <a:buNone/>
+            </a:pPr>
+            <a:r>
+              <a:rPr lang="en-US" sz="1350" dirty="0">
                 <a:solidFill>
                   <a:srgbClr val="1F2937"/>
                 </a:solidFill>
@@ -4143,22 +4757,46 @@
                 <a:ea typeface="Calibri" pitchFamily="34" charset="-122"/>
                 <a:cs typeface="Calibri" pitchFamily="34" charset="-120"/>
               </a:rPr>
-              <a:t>Zustand · Motion</a:t>
-            </a:r>
-            <a:endParaRPr lang="en-US" sz="1500" dirty="0"/>
-          </a:p>
-        </p:txBody>
-      </p:sp>
-      <p:sp>
-        <p:nvSpPr>
-          <p:cNvPr id="9" name="Text 7"/>
-          <p:cNvSpPr txBox="1"/>
-          <p:nvPr/>
-        </p:nvSpPr>
-        <p:spPr>
-          <a:xfrm>
-            <a:off x="640080" y="3063240"/>
-            <a:ext cx="2468880" cy="274320"/>
+              <a:t>Vite</a:t>
+            </a:r>
+            <a:endParaRPr lang="en-US" sz="1350" dirty="0"/>
+          </a:p>
+        </p:txBody>
+      </p:sp>
+      <p:pic>
+        <p:nvPicPr>
+          <p:cNvPr id="23" name="Image 7" descr="preencoded.png">    </p:cNvPr>
+          <p:cNvPicPr>
+            <a:picLocks noChangeAspect="1"/>
+          </p:cNvPicPr>
+          <p:nvPr/>
+        </p:nvPicPr>
+        <p:blipFill>
+          <a:blip r:embed="rId8"/>
+          <a:stretch>
+            <a:fillRect/>
+          </a:stretch>
+        </p:blipFill>
+        <p:spPr>
+          <a:xfrm>
+            <a:off x="6281928" y="2423160"/>
+            <a:ext cx="246888" cy="246888"/>
+          </a:xfrm>
+          <a:prstGeom prst="rect">
+            <a:avLst/>
+          </a:prstGeom>
+        </p:spPr>
+      </p:pic>
+      <p:sp>
+        <p:nvSpPr>
+          <p:cNvPr id="24" name="Text 14"/>
+          <p:cNvSpPr txBox="1"/>
+          <p:nvPr/>
+        </p:nvSpPr>
+        <p:spPr>
+          <a:xfrm>
+            <a:off x="6675120" y="2404872"/>
+            <a:ext cx="1783080" cy="283464"/>
           </a:xfrm>
           <a:prstGeom prst="rect">
             <a:avLst/>
@@ -4174,7 +4812,73 @@
               <a:buNone/>
             </a:pPr>
             <a:r>
-              <a:rPr lang="en-US" sz="1100" b="1" spc="200" kern="0" dirty="0">
+              <a:rPr lang="en-US" sz="1350" dirty="0">
+                <a:solidFill>
+                  <a:srgbClr val="1F2937"/>
+                </a:solidFill>
+                <a:latin typeface="Calibri" pitchFamily="34" charset="0"/>
+                <a:ea typeface="Calibri" pitchFamily="34" charset="-122"/>
+                <a:cs typeface="Calibri" pitchFamily="34" charset="-120"/>
+              </a:rPr>
+              <a:t>Socket.IO</a:t>
+            </a:r>
+            <a:endParaRPr lang="en-US" sz="1350" dirty="0"/>
+          </a:p>
+        </p:txBody>
+      </p:sp>
+      <p:sp>
+        <p:nvSpPr>
+          <p:cNvPr id="25" name="Shape 15"/>
+          <p:cNvSpPr/>
+          <p:nvPr/>
+        </p:nvSpPr>
+        <p:spPr>
+          <a:xfrm>
+            <a:off x="640080" y="2971800"/>
+            <a:ext cx="2514600" cy="1645920"/>
+          </a:xfrm>
+          <a:prstGeom prst="roundRect">
+            <a:avLst>
+              <a:gd name="adj" fmla="val 6667"/>
+            </a:avLst>
+          </a:prstGeom>
+          <a:solidFill>
+            <a:srgbClr val="F3F5F8"/>
+          </a:solidFill>
+          <a:ln w="6350">
+            <a:solidFill>
+              <a:srgbClr val="F3F5F8"/>
+            </a:solidFill>
+            <a:prstDash val="solid"/>
+          </a:ln>
+        </p:spPr>
+      </p:sp>
+      <p:sp>
+        <p:nvSpPr>
+          <p:cNvPr id="26" name="Text 16"/>
+          <p:cNvSpPr txBox="1"/>
+          <p:nvPr/>
+        </p:nvSpPr>
+        <p:spPr>
+          <a:xfrm>
+            <a:off x="868680" y="3108960"/>
+            <a:ext cx="2103120" cy="256032"/>
+          </a:xfrm>
+          <a:prstGeom prst="rect">
+            <a:avLst/>
+          </a:prstGeom>
+          <a:noFill/>
+          <a:ln/>
+        </p:spPr>
+        <p:txBody>
+          <a:bodyPr wrap="square" lIns="0" tIns="0" rIns="0" bIns="0" rtlCol="0" anchor="ctr"/>
+          <a:lstStyle/>
+          <a:p>
+            <a:pPr indent="0" marL="0">
+              <a:buNone/>
+            </a:pPr>
+            <a:r>
+              <a:rPr lang="en-US" sz="1050" b="1" spc="200" kern="0" dirty="0">
                 <a:solidFill>
                   <a:srgbClr val="0E7490"/>
                 </a:solidFill>
@@ -4184,39 +4888,60 @@
               </a:rPr>
               <a:t>VISÃO</a:t>
             </a:r>
-            <a:endParaRPr lang="en-US" sz="1100" dirty="0"/>
-          </a:p>
-        </p:txBody>
-      </p:sp>
-      <p:sp>
-        <p:nvSpPr>
-          <p:cNvPr id="10" name="Text 8"/>
-          <p:cNvSpPr txBox="1"/>
-          <p:nvPr/>
-        </p:nvSpPr>
-        <p:spPr>
-          <a:xfrm>
-            <a:off x="640080" y="3429000"/>
-            <a:ext cx="2468880" cy="1097280"/>
-          </a:xfrm>
-          <a:prstGeom prst="rect">
-            <a:avLst/>
-          </a:prstGeom>
-          <a:noFill/>
-          <a:ln/>
-        </p:spPr>
-        <p:txBody>
-          <a:bodyPr wrap="square" lIns="0" tIns="0" rIns="0" bIns="0" rtlCol="0" anchor="t"/>
-          <a:lstStyle/>
-          <a:p>
-            <a:pPr indent="0" marL="0">
-              <a:spcAft>
-                <a:spcPts val="400"/>
-              </a:spcAft>
-              <a:buNone/>
-            </a:pPr>
-            <a:r>
-              <a:rPr lang="en-US" sz="1500" dirty="0">
+            <a:endParaRPr lang="en-US" sz="1050" dirty="0"/>
+          </a:p>
+        </p:txBody>
+      </p:sp>
+      <p:pic>
+        <p:nvPicPr>
+          <p:cNvPr id="27" name="Image 8" descr="preencoded.png">    </p:cNvPr>
+          <p:cNvPicPr>
+            <a:picLocks noChangeAspect="1"/>
+          </p:cNvPicPr>
+          <p:nvPr/>
+        </p:nvPicPr>
+        <p:blipFill>
+          <a:blip r:embed="rId9"/>
+          <a:stretch>
+            <a:fillRect/>
+          </a:stretch>
+        </p:blipFill>
+        <p:spPr>
+          <a:xfrm>
+            <a:off x="886968" y="3493008"/>
+            <a:ext cx="246888" cy="246888"/>
+          </a:xfrm>
+          <a:prstGeom prst="rect">
+            <a:avLst/>
+          </a:prstGeom>
+        </p:spPr>
+      </p:pic>
+      <p:sp>
+        <p:nvSpPr>
+          <p:cNvPr id="28" name="Text 17"/>
+          <p:cNvSpPr txBox="1"/>
+          <p:nvPr/>
+        </p:nvSpPr>
+        <p:spPr>
+          <a:xfrm>
+            <a:off x="1280160" y="3474720"/>
+            <a:ext cx="1783080" cy="283464"/>
+          </a:xfrm>
+          <a:prstGeom prst="rect">
+            <a:avLst/>
+          </a:prstGeom>
+          <a:noFill/>
+          <a:ln/>
+        </p:spPr>
+        <p:txBody>
+          <a:bodyPr wrap="square" lIns="0" tIns="0" rIns="0" bIns="0" rtlCol="0" anchor="ctr"/>
+          <a:lstStyle/>
+          <a:p>
+            <a:pPr indent="0" marL="0">
+              <a:buNone/>
+            </a:pPr>
+            <a:r>
+              <a:rPr lang="en-US" sz="1350" dirty="0">
                 <a:solidFill>
                   <a:srgbClr val="1F2937"/>
                 </a:solidFill>
@@ -4224,19 +4949,62 @@
                 <a:ea typeface="Calibri" pitchFamily="34" charset="-122"/>
                 <a:cs typeface="Calibri" pitchFamily="34" charset="-120"/>
               </a:rPr>
-              <a:t>YOLOv8 · PyTorch + CUDA</a:t>
-            </a:r>
-            <a:endParaRPr lang="en-US" sz="1500" dirty="0"/>
-          </a:p>
-          <a:p>
-            <a:pPr indent="0" marL="0">
-              <a:spcAft>
-                <a:spcPts val="400"/>
-              </a:spcAft>
-              <a:buNone/>
-            </a:pPr>
-            <a:r>
-              <a:rPr lang="en-US" sz="1500" dirty="0">
+              <a:t>YOLOv8 (Ultralytics)</a:t>
+            </a:r>
+            <a:endParaRPr lang="en-US" sz="1350" dirty="0"/>
+          </a:p>
+        </p:txBody>
+      </p:sp>
+      <p:pic>
+        <p:nvPicPr>
+          <p:cNvPr id="29" name="Image 9" descr="preencoded.png">    </p:cNvPr>
+          <p:cNvPicPr>
+            <a:picLocks noChangeAspect="1"/>
+          </p:cNvPicPr>
+          <p:nvPr/>
+        </p:nvPicPr>
+        <p:blipFill>
+          <a:blip r:embed="rId10"/>
+          <a:stretch>
+            <a:fillRect/>
+          </a:stretch>
+        </p:blipFill>
+        <p:spPr>
+          <a:xfrm>
+            <a:off x="886968" y="3849624"/>
+            <a:ext cx="246888" cy="246888"/>
+          </a:xfrm>
+          <a:prstGeom prst="rect">
+            <a:avLst/>
+          </a:prstGeom>
+        </p:spPr>
+      </p:pic>
+      <p:sp>
+        <p:nvSpPr>
+          <p:cNvPr id="30" name="Text 18"/>
+          <p:cNvSpPr txBox="1"/>
+          <p:nvPr/>
+        </p:nvSpPr>
+        <p:spPr>
+          <a:xfrm>
+            <a:off x="1280160" y="3831336"/>
+            <a:ext cx="1783080" cy="283464"/>
+          </a:xfrm>
+          <a:prstGeom prst="rect">
+            <a:avLst/>
+          </a:prstGeom>
+          <a:noFill/>
+          <a:ln/>
+        </p:spPr>
+        <p:txBody>
+          <a:bodyPr wrap="square" lIns="0" tIns="0" rIns="0" bIns="0" rtlCol="0" anchor="ctr"/>
+          <a:lstStyle/>
+          <a:p>
+            <a:pPr indent="0" marL="0">
+              <a:buNone/>
+            </a:pPr>
+            <a:r>
+              <a:rPr lang="en-US" sz="1350" dirty="0">
                 <a:solidFill>
                   <a:srgbClr val="1F2937"/>
                 </a:solidFill>
@@ -4244,22 +5012,112 @@
                 <a:ea typeface="Calibri" pitchFamily="34" charset="-122"/>
                 <a:cs typeface="Calibri" pitchFamily="34" charset="-120"/>
               </a:rPr>
+              <a:t>PyTorch + CUDA</a:t>
+            </a:r>
+            <a:endParaRPr lang="en-US" sz="1350" dirty="0"/>
+          </a:p>
+        </p:txBody>
+      </p:sp>
+      <p:pic>
+        <p:nvPicPr>
+          <p:cNvPr id="31" name="Image 10" descr="preencoded.png">    </p:cNvPr>
+          <p:cNvPicPr>
+            <a:picLocks noChangeAspect="1"/>
+          </p:cNvPicPr>
+          <p:nvPr/>
+        </p:nvPicPr>
+        <p:blipFill>
+          <a:blip r:embed="rId11"/>
+          <a:stretch>
+            <a:fillRect/>
+          </a:stretch>
+        </p:blipFill>
+        <p:spPr>
+          <a:xfrm>
+            <a:off x="886968" y="4206240"/>
+            <a:ext cx="246888" cy="246888"/>
+          </a:xfrm>
+          <a:prstGeom prst="rect">
+            <a:avLst/>
+          </a:prstGeom>
+        </p:spPr>
+      </p:pic>
+      <p:sp>
+        <p:nvSpPr>
+          <p:cNvPr id="32" name="Text 19"/>
+          <p:cNvSpPr txBox="1"/>
+          <p:nvPr/>
+        </p:nvSpPr>
+        <p:spPr>
+          <a:xfrm>
+            <a:off x="1280160" y="4187952"/>
+            <a:ext cx="1783080" cy="283464"/>
+          </a:xfrm>
+          <a:prstGeom prst="rect">
+            <a:avLst/>
+          </a:prstGeom>
+          <a:noFill/>
+          <a:ln/>
+        </p:spPr>
+        <p:txBody>
+          <a:bodyPr wrap="square" lIns="0" tIns="0" rIns="0" bIns="0" rtlCol="0" anchor="ctr"/>
+          <a:lstStyle/>
+          <a:p>
+            <a:pPr indent="0" marL="0">
+              <a:buNone/>
+            </a:pPr>
+            <a:r>
+              <a:rPr lang="en-US" sz="1350" dirty="0">
+                <a:solidFill>
+                  <a:srgbClr val="1F2937"/>
+                </a:solidFill>
+                <a:latin typeface="Calibri" pitchFamily="34" charset="0"/>
+                <a:ea typeface="Calibri" pitchFamily="34" charset="-122"/>
+                <a:cs typeface="Calibri" pitchFamily="34" charset="-120"/>
+              </a:rPr>
               <a:t>OpenCV · MediaPipe</a:t>
             </a:r>
-            <a:endParaRPr lang="en-US" sz="1500" dirty="0"/>
-          </a:p>
-        </p:txBody>
-      </p:sp>
-      <p:sp>
-        <p:nvSpPr>
-          <p:cNvPr id="11" name="Text 9"/>
-          <p:cNvSpPr txBox="1"/>
-          <p:nvPr/>
-        </p:nvSpPr>
-        <p:spPr>
-          <a:xfrm>
-            <a:off x="3337560" y="3063240"/>
-            <a:ext cx="2468880" cy="274320"/>
+            <a:endParaRPr lang="en-US" sz="1350" dirty="0"/>
+          </a:p>
+        </p:txBody>
+      </p:sp>
+      <p:sp>
+        <p:nvSpPr>
+          <p:cNvPr id="33" name="Shape 20"/>
+          <p:cNvSpPr/>
+          <p:nvPr/>
+        </p:nvSpPr>
+        <p:spPr>
+          <a:xfrm>
+            <a:off x="3337560" y="2971800"/>
+            <a:ext cx="2514600" cy="1645920"/>
+          </a:xfrm>
+          <a:prstGeom prst="roundRect">
+            <a:avLst>
+              <a:gd name="adj" fmla="val 6667"/>
+            </a:avLst>
+          </a:prstGeom>
+          <a:solidFill>
+            <a:srgbClr val="F3F5F8"/>
+          </a:solidFill>
+          <a:ln w="6350">
+            <a:solidFill>
+              <a:srgbClr val="F3F5F8"/>
+            </a:solidFill>
+            <a:prstDash val="solid"/>
+          </a:ln>
+        </p:spPr>
+      </p:sp>
+      <p:sp>
+        <p:nvSpPr>
+          <p:cNvPr id="34" name="Text 21"/>
+          <p:cNvSpPr txBox="1"/>
+          <p:nvPr/>
+        </p:nvSpPr>
+        <p:spPr>
+          <a:xfrm>
+            <a:off x="3566160" y="3108960"/>
+            <a:ext cx="2103120" cy="256032"/>
           </a:xfrm>
           <a:prstGeom prst="rect">
             <a:avLst/>
@@ -4275,7 +5133,7 @@
               <a:buNone/>
             </a:pPr>
             <a:r>
-              <a:rPr lang="en-US" sz="1100" b="1" spc="200" kern="0" dirty="0">
+              <a:rPr lang="en-US" sz="1050" b="1" spc="200" kern="0" dirty="0">
                 <a:solidFill>
                   <a:srgbClr val="0E7490"/>
                 </a:solidFill>
@@ -4285,39 +5143,60 @@
               </a:rPr>
               <a:t>IA GENERATIVA</a:t>
             </a:r>
-            <a:endParaRPr lang="en-US" sz="1100" dirty="0"/>
-          </a:p>
-        </p:txBody>
-      </p:sp>
-      <p:sp>
-        <p:nvSpPr>
-          <p:cNvPr id="12" name="Text 10"/>
-          <p:cNvSpPr txBox="1"/>
-          <p:nvPr/>
-        </p:nvSpPr>
-        <p:spPr>
-          <a:xfrm>
-            <a:off x="3337560" y="3429000"/>
-            <a:ext cx="2468880" cy="1097280"/>
-          </a:xfrm>
-          <a:prstGeom prst="rect">
-            <a:avLst/>
-          </a:prstGeom>
-          <a:noFill/>
-          <a:ln/>
-        </p:spPr>
-        <p:txBody>
-          <a:bodyPr wrap="square" lIns="0" tIns="0" rIns="0" bIns="0" rtlCol="0" anchor="t"/>
-          <a:lstStyle/>
-          <a:p>
-            <a:pPr indent="0" marL="0">
-              <a:spcAft>
-                <a:spcPts val="400"/>
-              </a:spcAft>
-              <a:buNone/>
-            </a:pPr>
-            <a:r>
-              <a:rPr lang="en-US" sz="1500" dirty="0">
+            <a:endParaRPr lang="en-US" sz="1050" dirty="0"/>
+          </a:p>
+        </p:txBody>
+      </p:sp>
+      <p:pic>
+        <p:nvPicPr>
+          <p:cNvPr id="35" name="Image 11" descr="preencoded.png">    </p:cNvPr>
+          <p:cNvPicPr>
+            <a:picLocks noChangeAspect="1"/>
+          </p:cNvPicPr>
+          <p:nvPr/>
+        </p:nvPicPr>
+        <p:blipFill>
+          <a:blip r:embed="rId12"/>
+          <a:stretch>
+            <a:fillRect/>
+          </a:stretch>
+        </p:blipFill>
+        <p:spPr>
+          <a:xfrm>
+            <a:off x="3584448" y="3493008"/>
+            <a:ext cx="246888" cy="246888"/>
+          </a:xfrm>
+          <a:prstGeom prst="rect">
+            <a:avLst/>
+          </a:prstGeom>
+        </p:spPr>
+      </p:pic>
+      <p:sp>
+        <p:nvSpPr>
+          <p:cNvPr id="36" name="Text 22"/>
+          <p:cNvSpPr txBox="1"/>
+          <p:nvPr/>
+        </p:nvSpPr>
+        <p:spPr>
+          <a:xfrm>
+            <a:off x="3977640" y="3474720"/>
+            <a:ext cx="1783080" cy="283464"/>
+          </a:xfrm>
+          <a:prstGeom prst="rect">
+            <a:avLst/>
+          </a:prstGeom>
+          <a:noFill/>
+          <a:ln/>
+        </p:spPr>
+        <p:txBody>
+          <a:bodyPr wrap="square" lIns="0" tIns="0" rIns="0" bIns="0" rtlCol="0" anchor="ctr"/>
+          <a:lstStyle/>
+          <a:p>
+            <a:pPr indent="0" marL="0">
+              <a:buNone/>
+            </a:pPr>
+            <a:r>
+              <a:rPr lang="en-US" sz="1350" dirty="0">
                 <a:solidFill>
                   <a:srgbClr val="1F2937"/>
                 </a:solidFill>
@@ -4325,19 +5204,62 @@
                 <a:ea typeface="Calibri" pitchFamily="34" charset="-122"/>
                 <a:cs typeface="Calibri" pitchFamily="34" charset="-120"/>
               </a:rPr>
-              <a:t>Gemini (API do Google)</a:t>
-            </a:r>
-            <a:endParaRPr lang="en-US" sz="1500" dirty="0"/>
-          </a:p>
-          <a:p>
-            <a:pPr indent="0" marL="0">
-              <a:spcAft>
-                <a:spcPts val="400"/>
-              </a:spcAft>
-              <a:buNone/>
-            </a:pPr>
-            <a:r>
-              <a:rPr lang="en-US" sz="1500" dirty="0">
+              <a:t>Gemini (API)</a:t>
+            </a:r>
+            <a:endParaRPr lang="en-US" sz="1350" dirty="0"/>
+          </a:p>
+        </p:txBody>
+      </p:sp>
+      <p:pic>
+        <p:nvPicPr>
+          <p:cNvPr id="37" name="Image 12" descr="preencoded.png">    </p:cNvPr>
+          <p:cNvPicPr>
+            <a:picLocks noChangeAspect="1"/>
+          </p:cNvPicPr>
+          <p:nvPr/>
+        </p:nvPicPr>
+        <p:blipFill>
+          <a:blip r:embed="rId13"/>
+          <a:stretch>
+            <a:fillRect/>
+          </a:stretch>
+        </p:blipFill>
+        <p:spPr>
+          <a:xfrm>
+            <a:off x="3584448" y="3849624"/>
+            <a:ext cx="246888" cy="246888"/>
+          </a:xfrm>
+          <a:prstGeom prst="rect">
+            <a:avLst/>
+          </a:prstGeom>
+        </p:spPr>
+      </p:pic>
+      <p:sp>
+        <p:nvSpPr>
+          <p:cNvPr id="38" name="Text 23"/>
+          <p:cNvSpPr txBox="1"/>
+          <p:nvPr/>
+        </p:nvSpPr>
+        <p:spPr>
+          <a:xfrm>
+            <a:off x="3977640" y="3831336"/>
+            <a:ext cx="1783080" cy="283464"/>
+          </a:xfrm>
+          <a:prstGeom prst="rect">
+            <a:avLst/>
+          </a:prstGeom>
+          <a:noFill/>
+          <a:ln/>
+        </p:spPr>
+        <p:txBody>
+          <a:bodyPr wrap="square" lIns="0" tIns="0" rIns="0" bIns="0" rtlCol="0" anchor="ctr"/>
+          <a:lstStyle/>
+          <a:p>
+            <a:pPr indent="0" marL="0">
+              <a:buNone/>
+            </a:pPr>
+            <a:r>
+              <a:rPr lang="en-US" sz="1350" dirty="0">
                 <a:solidFill>
                   <a:srgbClr val="1F2937"/>
                 </a:solidFill>
@@ -4345,22 +5267,46 @@
                 <a:ea typeface="Calibri" pitchFamily="34" charset="-122"/>
                 <a:cs typeface="Calibri" pitchFamily="34" charset="-120"/>
               </a:rPr>
-              <a:t>Saída em JSON validada</a:t>
-            </a:r>
-            <a:endParaRPr lang="en-US" sz="1500" dirty="0"/>
-          </a:p>
-        </p:txBody>
-      </p:sp>
-      <p:sp>
-        <p:nvSpPr>
-          <p:cNvPr id="13" name="Text 11"/>
-          <p:cNvSpPr txBox="1"/>
-          <p:nvPr/>
-        </p:nvSpPr>
-        <p:spPr>
-          <a:xfrm>
-            <a:off x="6035040" y="3063240"/>
-            <a:ext cx="2468880" cy="274320"/>
+              <a:t>Pydantic: schema</a:t>
+            </a:r>
+            <a:endParaRPr lang="en-US" sz="1350" dirty="0"/>
+          </a:p>
+        </p:txBody>
+      </p:sp>
+      <p:pic>
+        <p:nvPicPr>
+          <p:cNvPr id="39" name="Image 13" descr="preencoded.png">    </p:cNvPr>
+          <p:cNvPicPr>
+            <a:picLocks noChangeAspect="1"/>
+          </p:cNvPicPr>
+          <p:nvPr/>
+        </p:nvPicPr>
+        <p:blipFill>
+          <a:blip r:embed="rId14"/>
+          <a:stretch>
+            <a:fillRect/>
+          </a:stretch>
+        </p:blipFill>
+        <p:spPr>
+          <a:xfrm>
+            <a:off x="3584448" y="4206240"/>
+            <a:ext cx="246888" cy="246888"/>
+          </a:xfrm>
+          <a:prstGeom prst="rect">
+            <a:avLst/>
+          </a:prstGeom>
+        </p:spPr>
+      </p:pic>
+      <p:sp>
+        <p:nvSpPr>
+          <p:cNvPr id="40" name="Text 24"/>
+          <p:cNvSpPr txBox="1"/>
+          <p:nvPr/>
+        </p:nvSpPr>
+        <p:spPr>
+          <a:xfrm>
+            <a:off x="3977640" y="4187952"/>
+            <a:ext cx="1783080" cy="283464"/>
           </a:xfrm>
           <a:prstGeom prst="rect">
             <a:avLst/>
@@ -4376,7 +5322,73 @@
               <a:buNone/>
             </a:pPr>
             <a:r>
-              <a:rPr lang="en-US" sz="1100" b="1" spc="200" kern="0" dirty="0">
+              <a:rPr lang="en-US" sz="1350" dirty="0">
+                <a:solidFill>
+                  <a:srgbClr val="1F2937"/>
+                </a:solidFill>
+                <a:latin typeface="Calibri" pitchFamily="34" charset="0"/>
+                <a:ea typeface="Calibri" pitchFamily="34" charset="-122"/>
+                <a:cs typeface="Calibri" pitchFamily="34" charset="-120"/>
+              </a:rPr>
+              <a:t>GPU RTX</a:t>
+            </a:r>
+            <a:endParaRPr lang="en-US" sz="1350" dirty="0"/>
+          </a:p>
+        </p:txBody>
+      </p:sp>
+      <p:sp>
+        <p:nvSpPr>
+          <p:cNvPr id="41" name="Shape 25"/>
+          <p:cNvSpPr/>
+          <p:nvPr/>
+        </p:nvSpPr>
+        <p:spPr>
+          <a:xfrm>
+            <a:off x="6035040" y="2971800"/>
+            <a:ext cx="2514600" cy="1645920"/>
+          </a:xfrm>
+          <a:prstGeom prst="roundRect">
+            <a:avLst>
+              <a:gd name="adj" fmla="val 6667"/>
+            </a:avLst>
+          </a:prstGeom>
+          <a:solidFill>
+            <a:srgbClr val="F3F5F8"/>
+          </a:solidFill>
+          <a:ln w="6350">
+            <a:solidFill>
+              <a:srgbClr val="F3F5F8"/>
+            </a:solidFill>
+            <a:prstDash val="solid"/>
+          </a:ln>
+        </p:spPr>
+      </p:sp>
+      <p:sp>
+        <p:nvSpPr>
+          <p:cNvPr id="42" name="Text 26"/>
+          <p:cNvSpPr txBox="1"/>
+          <p:nvPr/>
+        </p:nvSpPr>
+        <p:spPr>
+          <a:xfrm>
+            <a:off x="6263640" y="3108960"/>
+            <a:ext cx="2103120" cy="256032"/>
+          </a:xfrm>
+          <a:prstGeom prst="rect">
+            <a:avLst/>
+          </a:prstGeom>
+          <a:noFill/>
+          <a:ln/>
+        </p:spPr>
+        <p:txBody>
+          <a:bodyPr wrap="square" lIns="0" tIns="0" rIns="0" bIns="0" rtlCol="0" anchor="ctr"/>
+          <a:lstStyle/>
+          <a:p>
+            <a:pPr indent="0" marL="0">
+              <a:buNone/>
+            </a:pPr>
+            <a:r>
+              <a:rPr lang="en-US" sz="1050" b="1" spc="200" kern="0" dirty="0">
                 <a:solidFill>
                   <a:srgbClr val="0E7490"/>
                 </a:solidFill>
@@ -4386,39 +5398,60 @@
               </a:rPr>
               <a:t>QUALIDADE E APOIO</a:t>
             </a:r>
-            <a:endParaRPr lang="en-US" sz="1100" dirty="0"/>
-          </a:p>
-        </p:txBody>
-      </p:sp>
-      <p:sp>
-        <p:nvSpPr>
-          <p:cNvPr id="14" name="Text 12"/>
-          <p:cNvSpPr txBox="1"/>
-          <p:nvPr/>
-        </p:nvSpPr>
-        <p:spPr>
-          <a:xfrm>
-            <a:off x="6035040" y="3429000"/>
-            <a:ext cx="2468880" cy="1097280"/>
-          </a:xfrm>
-          <a:prstGeom prst="rect">
-            <a:avLst/>
-          </a:prstGeom>
-          <a:noFill/>
-          <a:ln/>
-        </p:spPr>
-        <p:txBody>
-          <a:bodyPr wrap="square" lIns="0" tIns="0" rIns="0" bIns="0" rtlCol="0" anchor="t"/>
-          <a:lstStyle/>
-          <a:p>
-            <a:pPr indent="0" marL="0">
-              <a:spcAft>
-                <a:spcPts val="400"/>
-              </a:spcAft>
-              <a:buNone/>
-            </a:pPr>
-            <a:r>
-              <a:rPr lang="en-US" sz="1500" dirty="0">
+            <a:endParaRPr lang="en-US" sz="1050" dirty="0"/>
+          </a:p>
+        </p:txBody>
+      </p:sp>
+      <p:pic>
+        <p:nvPicPr>
+          <p:cNvPr id="43" name="Image 14" descr="preencoded.png">    </p:cNvPr>
+          <p:cNvPicPr>
+            <a:picLocks noChangeAspect="1"/>
+          </p:cNvPicPr>
+          <p:nvPr/>
+        </p:nvPicPr>
+        <p:blipFill>
+          <a:blip r:embed="rId15"/>
+          <a:stretch>
+            <a:fillRect/>
+          </a:stretch>
+        </p:blipFill>
+        <p:spPr>
+          <a:xfrm>
+            <a:off x="6281928" y="3493008"/>
+            <a:ext cx="246888" cy="246888"/>
+          </a:xfrm>
+          <a:prstGeom prst="rect">
+            <a:avLst/>
+          </a:prstGeom>
+        </p:spPr>
+      </p:pic>
+      <p:sp>
+        <p:nvSpPr>
+          <p:cNvPr id="44" name="Text 27"/>
+          <p:cNvSpPr txBox="1"/>
+          <p:nvPr/>
+        </p:nvSpPr>
+        <p:spPr>
+          <a:xfrm>
+            <a:off x="6675120" y="3474720"/>
+            <a:ext cx="1783080" cy="283464"/>
+          </a:xfrm>
+          <a:prstGeom prst="rect">
+            <a:avLst/>
+          </a:prstGeom>
+          <a:noFill/>
+          <a:ln/>
+        </p:spPr>
+        <p:txBody>
+          <a:bodyPr wrap="square" lIns="0" tIns="0" rIns="0" bIns="0" rtlCol="0" anchor="ctr"/>
+          <a:lstStyle/>
+          <a:p>
+            <a:pPr indent="0" marL="0">
+              <a:buNone/>
+            </a:pPr>
+            <a:r>
+              <a:rPr lang="en-US" sz="1350" dirty="0">
                 <a:solidFill>
                   <a:srgbClr val="1F2937"/>
                 </a:solidFill>
@@ -4426,19 +5459,62 @@
                 <a:ea typeface="Calibri" pitchFamily="34" charset="-122"/>
                 <a:cs typeface="Calibri" pitchFamily="34" charset="-120"/>
               </a:rPr>
-              <a:t>pytest · mais de 370 testes</a:t>
-            </a:r>
-            <a:endParaRPr lang="en-US" sz="1500" dirty="0"/>
-          </a:p>
-          <a:p>
-            <a:pPr indent="0" marL="0">
-              <a:spcAft>
-                <a:spcPts val="400"/>
-              </a:spcAft>
-              <a:buNone/>
-            </a:pPr>
-            <a:r>
-              <a:rPr lang="en-US" sz="1500" dirty="0">
+              <a:t>pytest: 370+ testes</a:t>
+            </a:r>
+            <a:endParaRPr lang="en-US" sz="1350" dirty="0"/>
+          </a:p>
+        </p:txBody>
+      </p:sp>
+      <p:pic>
+        <p:nvPicPr>
+          <p:cNvPr id="45" name="Image 15" descr="preencoded.png">    </p:cNvPr>
+          <p:cNvPicPr>
+            <a:picLocks noChangeAspect="1"/>
+          </p:cNvPicPr>
+          <p:nvPr/>
+        </p:nvPicPr>
+        <p:blipFill>
+          <a:blip r:embed="rId16"/>
+          <a:stretch>
+            <a:fillRect/>
+          </a:stretch>
+        </p:blipFill>
+        <p:spPr>
+          <a:xfrm>
+            <a:off x="6281928" y="3849624"/>
+            <a:ext cx="246888" cy="246888"/>
+          </a:xfrm>
+          <a:prstGeom prst="rect">
+            <a:avLst/>
+          </a:prstGeom>
+        </p:spPr>
+      </p:pic>
+      <p:sp>
+        <p:nvSpPr>
+          <p:cNvPr id="46" name="Text 28"/>
+          <p:cNvSpPr txBox="1"/>
+          <p:nvPr/>
+        </p:nvSpPr>
+        <p:spPr>
+          <a:xfrm>
+            <a:off x="6675120" y="3831336"/>
+            <a:ext cx="1783080" cy="283464"/>
+          </a:xfrm>
+          <a:prstGeom prst="rect">
+            <a:avLst/>
+          </a:prstGeom>
+          <a:noFill/>
+          <a:ln/>
+        </p:spPr>
+        <p:txBody>
+          <a:bodyPr wrap="square" lIns="0" tIns="0" rIns="0" bIns="0" rtlCol="0" anchor="ctr"/>
+          <a:lstStyle/>
+          <a:p>
+            <a:pPr indent="0" marL="0">
+              <a:buNone/>
+            </a:pPr>
+            <a:r>
+              <a:rPr lang="en-US" sz="1350" dirty="0">
                 <a:solidFill>
                   <a:srgbClr val="1F2937"/>
                 </a:solidFill>
@@ -4446,22 +5522,85 @@
                 <a:ea typeface="Calibri" pitchFamily="34" charset="-122"/>
                 <a:cs typeface="Calibri" pitchFamily="34" charset="-120"/>
               </a:rPr>
-              <a:t>Git e GitHub · Claude Code</a:t>
-            </a:r>
-            <a:endParaRPr lang="en-US" sz="1500" dirty="0"/>
-          </a:p>
-        </p:txBody>
-      </p:sp>
-      <p:sp>
-        <p:nvSpPr>
-          <p:cNvPr id="15" name="Text 13"/>
-          <p:cNvSpPr txBox="1"/>
-          <p:nvPr/>
-        </p:nvSpPr>
-        <p:spPr>
-          <a:xfrm>
-            <a:off x="8229600" y="4617720"/>
-            <a:ext cx="457200" cy="274320"/>
+              <a:t>Git e GitHub</a:t>
+            </a:r>
+            <a:endParaRPr lang="en-US" sz="1350" dirty="0"/>
+          </a:p>
+        </p:txBody>
+      </p:sp>
+      <p:pic>
+        <p:nvPicPr>
+          <p:cNvPr id="47" name="Image 16" descr="preencoded.png">    </p:cNvPr>
+          <p:cNvPicPr>
+            <a:picLocks noChangeAspect="1"/>
+          </p:cNvPicPr>
+          <p:nvPr/>
+        </p:nvPicPr>
+        <p:blipFill>
+          <a:blip r:embed="rId17"/>
+          <a:stretch>
+            <a:fillRect/>
+          </a:stretch>
+        </p:blipFill>
+        <p:spPr>
+          <a:xfrm>
+            <a:off x="6281928" y="4206240"/>
+            <a:ext cx="246888" cy="246888"/>
+          </a:xfrm>
+          <a:prstGeom prst="rect">
+            <a:avLst/>
+          </a:prstGeom>
+        </p:spPr>
+      </p:pic>
+      <p:sp>
+        <p:nvSpPr>
+          <p:cNvPr id="48" name="Text 29"/>
+          <p:cNvSpPr txBox="1"/>
+          <p:nvPr/>
+        </p:nvSpPr>
+        <p:spPr>
+          <a:xfrm>
+            <a:off x="6675120" y="4187952"/>
+            <a:ext cx="1783080" cy="283464"/>
+          </a:xfrm>
+          <a:prstGeom prst="rect">
+            <a:avLst/>
+          </a:prstGeom>
+          <a:noFill/>
+          <a:ln/>
+        </p:spPr>
+        <p:txBody>
+          <a:bodyPr wrap="square" lIns="0" tIns="0" rIns="0" bIns="0" rtlCol="0" anchor="ctr"/>
+          <a:lstStyle/>
+          <a:p>
+            <a:pPr indent="0" marL="0">
+              <a:buNone/>
+            </a:pPr>
+            <a:r>
+              <a:rPr lang="en-US" sz="1350" dirty="0">
+                <a:solidFill>
+                  <a:srgbClr val="1F2937"/>
+                </a:solidFill>
+                <a:latin typeface="Calibri" pitchFamily="34" charset="0"/>
+                <a:ea typeface="Calibri" pitchFamily="34" charset="-122"/>
+                <a:cs typeface="Calibri" pitchFamily="34" charset="-120"/>
+              </a:rPr>
+              <a:t>Claude Code</a:t>
+            </a:r>
+            <a:endParaRPr lang="en-US" sz="1350" dirty="0"/>
+          </a:p>
+        </p:txBody>
+      </p:sp>
+      <p:sp>
+        <p:nvSpPr>
+          <p:cNvPr id="49" name="Text 30"/>
+          <p:cNvSpPr txBox="1"/>
+          <p:nvPr/>
+        </p:nvSpPr>
+        <p:spPr>
+          <a:xfrm>
+            <a:off x="8229600" y="4709160"/>
+            <a:ext cx="457200" cy="228600"/>
           </a:xfrm>
           <a:prstGeom prst="rect">
             <a:avLst/>
@@ -4528,14 +5667,63 @@
       </p:grpSpPr>
       <p:sp>
         <p:nvSpPr>
-          <p:cNvPr id="2" name="Text 0"/>
-          <p:cNvSpPr txBox="1"/>
-          <p:nvPr/>
-        </p:nvSpPr>
-        <p:spPr>
-          <a:xfrm>
-            <a:off x="640080" y="914400"/>
-            <a:ext cx="7863840" cy="914400"/>
+          <p:cNvPr id="2" name="Shape 0"/>
+          <p:cNvSpPr/>
+          <p:nvPr/>
+        </p:nvSpPr>
+        <p:spPr>
+          <a:xfrm>
+            <a:off x="5943600" y="1005840"/>
+            <a:ext cx="2743200" cy="2743200"/>
+          </a:xfrm>
+          <a:prstGeom prst="ellipse">
+            <a:avLst/>
+          </a:prstGeom>
+          <a:solidFill>
+            <a:srgbClr val="12324A"/>
+          </a:solidFill>
+          <a:ln w="6350">
+            <a:solidFill>
+              <a:srgbClr val="12324A"/>
+            </a:solidFill>
+            <a:prstDash val="solid"/>
+          </a:ln>
+        </p:spPr>
+      </p:sp>
+      <p:pic>
+        <p:nvPicPr>
+          <p:cNvPr id="3" name="Image 0" descr="preencoded.png">    </p:cNvPr>
+          <p:cNvPicPr>
+            <a:picLocks noChangeAspect="1"/>
+          </p:cNvPicPr>
+          <p:nvPr/>
+        </p:nvPicPr>
+        <p:blipFill>
+          <a:blip r:embed="rId1"/>
+          <a:stretch>
+            <a:fillRect/>
+          </a:stretch>
+        </p:blipFill>
+        <p:spPr>
+          <a:xfrm>
+            <a:off x="6583680" y="1645920"/>
+            <a:ext cx="1463040" cy="1463040"/>
+          </a:xfrm>
+          <a:prstGeom prst="rect">
+            <a:avLst/>
+          </a:prstGeom>
+        </p:spPr>
+      </p:pic>
+      <p:sp>
+        <p:nvSpPr>
+          <p:cNvPr id="4" name="Text 1"/>
+          <p:cNvSpPr txBox="1"/>
+          <p:nvPr/>
+        </p:nvSpPr>
+        <p:spPr>
+          <a:xfrm>
+            <a:off x="640080" y="822960"/>
+            <a:ext cx="5120640" cy="914400"/>
           </a:xfrm>
           <a:prstGeom prst="rect">
             <a:avLst/>
@@ -4551,7 +5739,7 @@
               <a:buNone/>
             </a:pPr>
             <a:r>
-              <a:rPr lang="en-US" sz="4800" b="1" dirty="0">
+              <a:rPr lang="en-US" sz="4600" b="1" dirty="0">
                 <a:solidFill>
                   <a:srgbClr val="FFFFFF"/>
                 </a:solidFill>
@@ -4561,41 +5749,62 @@
               </a:rPr>
               <a:t>Demonstração</a:t>
             </a:r>
-            <a:endParaRPr lang="en-US" sz="4800" dirty="0"/>
-          </a:p>
-        </p:txBody>
-      </p:sp>
-      <p:sp>
-        <p:nvSpPr>
-          <p:cNvPr id="3" name="Text 1"/>
-          <p:cNvSpPr txBox="1"/>
-          <p:nvPr/>
-        </p:nvSpPr>
-        <p:spPr>
-          <a:xfrm>
-            <a:off x="640080" y="2103120"/>
-            <a:ext cx="7863840" cy="2011680"/>
-          </a:xfrm>
-          <a:prstGeom prst="rect">
-            <a:avLst/>
-          </a:prstGeom>
-          <a:noFill/>
-          <a:ln/>
-        </p:spPr>
-        <p:txBody>
-          <a:bodyPr wrap="square" lIns="0" tIns="0" rIns="0" bIns="0" rtlCol="0" anchor="t"/>
-          <a:lstStyle/>
-          <a:p>
-            <a:pPr indent="0" marL="0">
-              <a:spcAft>
-                <a:spcPts val="1000"/>
-              </a:spcAft>
-              <a:buNone/>
-            </a:pPr>
-            <a:r>
-              <a:rPr lang="en-US" sz="2000" dirty="0">
-                <a:solidFill>
-                  <a:srgbClr val="CBD5E1"/>
+            <a:endParaRPr lang="en-US" sz="4600" dirty="0"/>
+          </a:p>
+        </p:txBody>
+      </p:sp>
+      <p:pic>
+        <p:nvPicPr>
+          <p:cNvPr id="5" name="Image 1" descr="preencoded.png">    </p:cNvPr>
+          <p:cNvPicPr>
+            <a:picLocks noChangeAspect="1"/>
+          </p:cNvPicPr>
+          <p:nvPr/>
+        </p:nvPicPr>
+        <p:blipFill>
+          <a:blip r:embed="rId2"/>
+          <a:stretch>
+            <a:fillRect/>
+          </a:stretch>
+        </p:blipFill>
+        <p:spPr>
+          <a:xfrm>
+            <a:off x="640080" y="2148840"/>
+            <a:ext cx="256032" cy="256032"/>
+          </a:xfrm>
+          <a:prstGeom prst="rect">
+            <a:avLst/>
+          </a:prstGeom>
+        </p:spPr>
+      </p:pic>
+      <p:sp>
+        <p:nvSpPr>
+          <p:cNvPr id="6" name="Text 2"/>
+          <p:cNvSpPr txBox="1"/>
+          <p:nvPr/>
+        </p:nvSpPr>
+        <p:spPr>
+          <a:xfrm>
+            <a:off x="1097280" y="2103120"/>
+            <a:ext cx="4846320" cy="365760"/>
+          </a:xfrm>
+          <a:prstGeom prst="rect">
+            <a:avLst/>
+          </a:prstGeom>
+          <a:noFill/>
+          <a:ln/>
+        </p:spPr>
+        <p:txBody>
+          <a:bodyPr wrap="square" lIns="0" tIns="0" rIns="0" bIns="0" rtlCol="0" anchor="ctr"/>
+          <a:lstStyle/>
+          <a:p>
+            <a:pPr indent="0" marL="0">
+              <a:buNone/>
+            </a:pPr>
+            <a:r>
+              <a:rPr lang="en-US" sz="1800" dirty="0">
+                <a:solidFill>
+                  <a:srgbClr val="E2E8F0"/>
                 </a:solidFill>
                 <a:latin typeface="Calibri" pitchFamily="34" charset="0"/>
                 <a:ea typeface="Calibri" pitchFamily="34" charset="-122"/>
@@ -4603,19 +5812,62 @@
               </a:rPr>
               <a:t>Pessoas identificadas e alertas por pessoa</a:t>
             </a:r>
-            <a:endParaRPr lang="en-US" sz="2000" dirty="0"/>
-          </a:p>
-          <a:p>
-            <a:pPr indent="0" marL="0">
-              <a:spcAft>
-                <a:spcPts val="1000"/>
-              </a:spcAft>
-              <a:buNone/>
-            </a:pPr>
-            <a:r>
-              <a:rPr lang="en-US" sz="2000" dirty="0">
-                <a:solidFill>
-                  <a:srgbClr val="CBD5E1"/>
+            <a:endParaRPr lang="en-US" sz="1800" dirty="0"/>
+          </a:p>
+        </p:txBody>
+      </p:sp>
+      <p:pic>
+        <p:nvPicPr>
+          <p:cNvPr id="7" name="Image 2" descr="preencoded.png">    </p:cNvPr>
+          <p:cNvPicPr>
+            <a:picLocks noChangeAspect="1"/>
+          </p:cNvPicPr>
+          <p:nvPr/>
+        </p:nvPicPr>
+        <p:blipFill>
+          <a:blip r:embed="rId3"/>
+          <a:stretch>
+            <a:fillRect/>
+          </a:stretch>
+        </p:blipFill>
+        <p:spPr>
+          <a:xfrm>
+            <a:off x="640080" y="2715768"/>
+            <a:ext cx="256032" cy="256032"/>
+          </a:xfrm>
+          <a:prstGeom prst="rect">
+            <a:avLst/>
+          </a:prstGeom>
+        </p:spPr>
+      </p:pic>
+      <p:sp>
+        <p:nvSpPr>
+          <p:cNvPr id="8" name="Text 3"/>
+          <p:cNvSpPr txBox="1"/>
+          <p:nvPr/>
+        </p:nvSpPr>
+        <p:spPr>
+          <a:xfrm>
+            <a:off x="1097280" y="2670048"/>
+            <a:ext cx="4846320" cy="365760"/>
+          </a:xfrm>
+          <a:prstGeom prst="rect">
+            <a:avLst/>
+          </a:prstGeom>
+          <a:noFill/>
+          <a:ln/>
+        </p:spPr>
+        <p:txBody>
+          <a:bodyPr wrap="square" lIns="0" tIns="0" rIns="0" bIns="0" rtlCol="0" anchor="ctr"/>
+          <a:lstStyle/>
+          <a:p>
+            <a:pPr indent="0" marL="0">
+              <a:buNone/>
+            </a:pPr>
+            <a:r>
+              <a:rPr lang="en-US" sz="1800" dirty="0">
+                <a:solidFill>
+                  <a:srgbClr val="E2E8F0"/>
                 </a:solidFill>
                 <a:latin typeface="Calibri" pitchFamily="34" charset="0"/>
                 <a:ea typeface="Calibri" pitchFamily="34" charset="-122"/>
@@ -4623,19 +5875,62 @@
               </a:rPr>
               <a:t>Zona de risco desenhada no vídeo</a:t>
             </a:r>
-            <a:endParaRPr lang="en-US" sz="2000" dirty="0"/>
-          </a:p>
-          <a:p>
-            <a:pPr indent="0" marL="0">
-              <a:spcAft>
-                <a:spcPts val="1000"/>
-              </a:spcAft>
-              <a:buNone/>
-            </a:pPr>
-            <a:r>
-              <a:rPr lang="en-US" sz="2000" dirty="0">
-                <a:solidFill>
-                  <a:srgbClr val="CBD5E1"/>
+            <a:endParaRPr lang="en-US" sz="1800" dirty="0"/>
+          </a:p>
+        </p:txBody>
+      </p:sp>
+      <p:pic>
+        <p:nvPicPr>
+          <p:cNvPr id="9" name="Image 3" descr="preencoded.png">    </p:cNvPr>
+          <p:cNvPicPr>
+            <a:picLocks noChangeAspect="1"/>
+          </p:cNvPicPr>
+          <p:nvPr/>
+        </p:nvPicPr>
+        <p:blipFill>
+          <a:blip r:embed="rId4"/>
+          <a:stretch>
+            <a:fillRect/>
+          </a:stretch>
+        </p:blipFill>
+        <p:spPr>
+          <a:xfrm>
+            <a:off x="640080" y="3282696"/>
+            <a:ext cx="256032" cy="256032"/>
+          </a:xfrm>
+          <a:prstGeom prst="rect">
+            <a:avLst/>
+          </a:prstGeom>
+        </p:spPr>
+      </p:pic>
+      <p:sp>
+        <p:nvSpPr>
+          <p:cNvPr id="10" name="Text 4"/>
+          <p:cNvSpPr txBox="1"/>
+          <p:nvPr/>
+        </p:nvSpPr>
+        <p:spPr>
+          <a:xfrm>
+            <a:off x="1097280" y="3236976"/>
+            <a:ext cx="4846320" cy="365760"/>
+          </a:xfrm>
+          <a:prstGeom prst="rect">
+            <a:avLst/>
+          </a:prstGeom>
+          <a:noFill/>
+          <a:ln/>
+        </p:spPr>
+        <p:txBody>
+          <a:bodyPr wrap="square" lIns="0" tIns="0" rIns="0" bIns="0" rtlCol="0" anchor="ctr"/>
+          <a:lstStyle/>
+          <a:p>
+            <a:pPr indent="0" marL="0">
+              <a:buNone/>
+            </a:pPr>
+            <a:r>
+              <a:rPr lang="en-US" sz="1800" dirty="0">
+                <a:solidFill>
+                  <a:srgbClr val="E2E8F0"/>
                 </a:solidFill>
                 <a:latin typeface="Calibri" pitchFamily="34" charset="0"/>
                 <a:ea typeface="Calibri" pitchFamily="34" charset="-122"/>
@@ -4643,19 +5938,62 @@
               </a:rPr>
               <a:t>Modo portaria: negada e liberada</a:t>
             </a:r>
-            <a:endParaRPr lang="en-US" sz="2000" dirty="0"/>
-          </a:p>
-          <a:p>
-            <a:pPr indent="0" marL="0">
-              <a:spcAft>
-                <a:spcPts val="1000"/>
-              </a:spcAft>
-              <a:buNone/>
-            </a:pPr>
-            <a:r>
-              <a:rPr lang="en-US" sz="2000" dirty="0">
-                <a:solidFill>
-                  <a:srgbClr val="CBD5E1"/>
+            <a:endParaRPr lang="en-US" sz="1800" dirty="0"/>
+          </a:p>
+        </p:txBody>
+      </p:sp>
+      <p:pic>
+        <p:nvPicPr>
+          <p:cNvPr id="11" name="Image 4" descr="preencoded.png">    </p:cNvPr>
+          <p:cNvPicPr>
+            <a:picLocks noChangeAspect="1"/>
+          </p:cNvPicPr>
+          <p:nvPr/>
+        </p:nvPicPr>
+        <p:blipFill>
+          <a:blip r:embed="rId5"/>
+          <a:stretch>
+            <a:fillRect/>
+          </a:stretch>
+        </p:blipFill>
+        <p:spPr>
+          <a:xfrm>
+            <a:off x="640080" y="3849624"/>
+            <a:ext cx="256032" cy="256032"/>
+          </a:xfrm>
+          <a:prstGeom prst="rect">
+            <a:avLst/>
+          </a:prstGeom>
+        </p:spPr>
+      </p:pic>
+      <p:sp>
+        <p:nvSpPr>
+          <p:cNvPr id="12" name="Text 5"/>
+          <p:cNvSpPr txBox="1"/>
+          <p:nvPr/>
+        </p:nvSpPr>
+        <p:spPr>
+          <a:xfrm>
+            <a:off x="1097280" y="3803904"/>
+            <a:ext cx="4846320" cy="365760"/>
+          </a:xfrm>
+          <a:prstGeom prst="rect">
+            <a:avLst/>
+          </a:prstGeom>
+          <a:noFill/>
+          <a:ln/>
+        </p:spPr>
+        <p:txBody>
+          <a:bodyPr wrap="square" lIns="0" tIns="0" rIns="0" bIns="0" rtlCol="0" anchor="ctr"/>
+          <a:lstStyle/>
+          <a:p>
+            <a:pPr indent="0" marL="0">
+              <a:buNone/>
+            </a:pPr>
+            <a:r>
+              <a:rPr lang="en-US" sz="1800" dirty="0">
+                <a:solidFill>
+                  <a:srgbClr val="E2E8F0"/>
                 </a:solidFill>
                 <a:latin typeface="Calibri" pitchFamily="34" charset="0"/>
                 <a:ea typeface="Calibri" pitchFamily="34" charset="-122"/>
@@ -4663,20 +6001,20 @@
               </a:rPr>
               <a:t>Tela do operador e criação de contas</a:t>
             </a:r>
-            <a:endParaRPr lang="en-US" sz="2000" dirty="0"/>
-          </a:p>
-        </p:txBody>
-      </p:sp>
-      <p:sp>
-        <p:nvSpPr>
-          <p:cNvPr id="4" name="Text 2"/>
-          <p:cNvSpPr txBox="1"/>
-          <p:nvPr/>
-        </p:nvSpPr>
-        <p:spPr>
-          <a:xfrm>
-            <a:off x="8229600" y="4617720"/>
-            <a:ext cx="457200" cy="274320"/>
+            <a:endParaRPr lang="en-US" sz="1800" dirty="0"/>
+          </a:p>
+        </p:txBody>
+      </p:sp>
+      <p:sp>
+        <p:nvSpPr>
+          <p:cNvPr id="13" name="Text 6"/>
+          <p:cNvSpPr txBox="1"/>
+          <p:nvPr/>
+        </p:nvSpPr>
+        <p:spPr>
+          <a:xfrm>
+            <a:off x="8229600" y="4709160"/>
+            <a:ext cx="457200" cy="228600"/>
           </a:xfrm>
           <a:prstGeom prst="rect">
             <a:avLst/>
@@ -4749,7 +6087,7 @@
         </p:nvSpPr>
         <p:spPr>
           <a:xfrm>
-            <a:off x="640080" y="457200"/>
+            <a:off x="640080" y="411480"/>
             <a:ext cx="7863840" cy="640080"/>
           </a:xfrm>
           <a:prstGeom prst="rect">
@@ -4782,14 +6120,65 @@
       </p:sp>
       <p:sp>
         <p:nvSpPr>
-          <p:cNvPr id="3" name="Text 1"/>
-          <p:cNvSpPr txBox="1"/>
-          <p:nvPr/>
-        </p:nvSpPr>
-        <p:spPr>
-          <a:xfrm>
-            <a:off x="640080" y="1325880"/>
-            <a:ext cx="3108960" cy="365760"/>
+          <p:cNvPr id="3" name="Shape 1"/>
+          <p:cNvSpPr/>
+          <p:nvPr/>
+        </p:nvSpPr>
+        <p:spPr>
+          <a:xfrm>
+            <a:off x="502920" y="1188720"/>
+            <a:ext cx="8138160" cy="3383280"/>
+          </a:xfrm>
+          <a:prstGeom prst="roundRect">
+            <a:avLst>
+              <a:gd name="adj" fmla="val 3243"/>
+            </a:avLst>
+          </a:prstGeom>
+          <a:solidFill>
+            <a:srgbClr val="F8FAFC"/>
+          </a:solidFill>
+          <a:ln w="6350">
+            <a:solidFill>
+              <a:srgbClr val="F8FAFC"/>
+            </a:solidFill>
+            <a:prstDash val="solid"/>
+          </a:ln>
+        </p:spPr>
+      </p:sp>
+      <p:pic>
+        <p:nvPicPr>
+          <p:cNvPr id="4" name="Image 0" descr="preencoded.png">    </p:cNvPr>
+          <p:cNvPicPr>
+            <a:picLocks noChangeAspect="1"/>
+          </p:cNvPicPr>
+          <p:nvPr/>
+        </p:nvPicPr>
+        <p:blipFill>
+          <a:blip r:embed="rId1"/>
+          <a:stretch>
+            <a:fillRect/>
+          </a:stretch>
+        </p:blipFill>
+        <p:spPr>
+          <a:xfrm>
+            <a:off x="731520" y="1380744"/>
+            <a:ext cx="219456" cy="219456"/>
+          </a:xfrm>
+          <a:prstGeom prst="rect">
+            <a:avLst/>
+          </a:prstGeom>
+        </p:spPr>
+      </p:pic>
+      <p:sp>
+        <p:nvSpPr>
+          <p:cNvPr id="5" name="Text 2"/>
+          <p:cNvSpPr txBox="1"/>
+          <p:nvPr/>
+        </p:nvSpPr>
+        <p:spPr>
+          <a:xfrm>
+            <a:off x="1097280" y="1298448"/>
+            <a:ext cx="3017520" cy="384048"/>
           </a:xfrm>
           <a:prstGeom prst="rect">
             <a:avLst/>
@@ -4821,14 +6210,14 @@
       </p:sp>
       <p:sp>
         <p:nvSpPr>
-          <p:cNvPr id="4" name="Text 2"/>
-          <p:cNvSpPr txBox="1"/>
-          <p:nvPr/>
-        </p:nvSpPr>
-        <p:spPr>
-          <a:xfrm>
-            <a:off x="3749040" y="1325880"/>
-            <a:ext cx="914400" cy="365760"/>
+          <p:cNvPr id="6" name="Text 3"/>
+          <p:cNvSpPr txBox="1"/>
+          <p:nvPr/>
+        </p:nvSpPr>
+        <p:spPr>
+          <a:xfrm>
+            <a:off x="3977640" y="1298448"/>
+            <a:ext cx="822960" cy="384048"/>
           </a:xfrm>
           <a:prstGeom prst="rect">
             <a:avLst/>
@@ -4844,7 +6233,7 @@
               <a:buNone/>
             </a:pPr>
             <a:r>
-              <a:rPr lang="en-US" sz="1400" b="1" dirty="0">
+              <a:rPr lang="en-US" sz="1300" b="1" dirty="0">
                 <a:solidFill>
                   <a:srgbClr val="15803D"/>
                 </a:solidFill>
@@ -4854,20 +6243,20 @@
               </a:rPr>
               <a:t>Pronto</a:t>
             </a:r>
-            <a:endParaRPr lang="en-US" sz="1400" dirty="0"/>
-          </a:p>
-        </p:txBody>
-      </p:sp>
-      <p:sp>
-        <p:nvSpPr>
-          <p:cNvPr id="5" name="Text 3"/>
-          <p:cNvSpPr txBox="1"/>
-          <p:nvPr/>
-        </p:nvSpPr>
-        <p:spPr>
-          <a:xfrm>
-            <a:off x="4754880" y="1325880"/>
-            <a:ext cx="3840480" cy="365760"/>
+            <a:endParaRPr lang="en-US" sz="1300" dirty="0"/>
+          </a:p>
+        </p:txBody>
+      </p:sp>
+      <p:sp>
+        <p:nvSpPr>
+          <p:cNvPr id="7" name="Text 4"/>
+          <p:cNvSpPr txBox="1"/>
+          <p:nvPr/>
+        </p:nvSpPr>
+        <p:spPr>
+          <a:xfrm>
+            <a:off x="4846320" y="1298448"/>
+            <a:ext cx="3566160" cy="384048"/>
           </a:xfrm>
           <a:prstGeom prst="rect">
             <a:avLst/>
@@ -4883,7 +6272,7 @@
               <a:buNone/>
             </a:pPr>
             <a:r>
-              <a:rPr lang="en-US" sz="1300" dirty="0">
+              <a:rPr lang="en-US" sz="1250" dirty="0">
                 <a:solidFill>
                   <a:srgbClr val="6B7280"/>
                 </a:solidFill>
@@ -4893,20 +6282,20 @@
               </a:rPr>
               <a:t>Dois modelos, rastreador e pose</a:t>
             </a:r>
-            <a:endParaRPr lang="en-US" sz="1300" dirty="0"/>
-          </a:p>
-        </p:txBody>
-      </p:sp>
-      <p:sp>
-        <p:nvSpPr>
-          <p:cNvPr id="6" name="Shape 4"/>
+            <a:endParaRPr lang="en-US" sz="1250" dirty="0"/>
+          </a:p>
+        </p:txBody>
+      </p:sp>
+      <p:sp>
+        <p:nvSpPr>
+          <p:cNvPr id="8" name="Shape 5"/>
           <p:cNvSpPr/>
           <p:nvPr/>
         </p:nvSpPr>
         <p:spPr>
           <a:xfrm>
-            <a:off x="640080" y="1746504"/>
-            <a:ext cx="7955280" cy="0"/>
+            <a:off x="731520" y="1728216"/>
+            <a:ext cx="7772400" cy="0"/>
           </a:xfrm>
           <a:prstGeom prst="line">
             <a:avLst/>
@@ -4920,16 +6309,40 @@
           </a:ln>
         </p:spPr>
       </p:sp>
-      <p:sp>
-        <p:nvSpPr>
-          <p:cNvPr id="7" name="Text 5"/>
-          <p:cNvSpPr txBox="1"/>
-          <p:nvPr/>
-        </p:nvSpPr>
-        <p:spPr>
-          <a:xfrm>
-            <a:off x="640080" y="1801368"/>
-            <a:ext cx="3108960" cy="365760"/>
+      <p:pic>
+        <p:nvPicPr>
+          <p:cNvPr id="9" name="Image 1" descr="preencoded.png">    </p:cNvPr>
+          <p:cNvPicPr>
+            <a:picLocks noChangeAspect="1"/>
+          </p:cNvPicPr>
+          <p:nvPr/>
+        </p:nvPicPr>
+        <p:blipFill>
+          <a:blip r:embed="rId2"/>
+          <a:stretch>
+            <a:fillRect/>
+          </a:stretch>
+        </p:blipFill>
+        <p:spPr>
+          <a:xfrm>
+            <a:off x="731520" y="1856232"/>
+            <a:ext cx="219456" cy="219456"/>
+          </a:xfrm>
+          <a:prstGeom prst="rect">
+            <a:avLst/>
+          </a:prstGeom>
+        </p:spPr>
+      </p:pic>
+      <p:sp>
+        <p:nvSpPr>
+          <p:cNvPr id="10" name="Text 6"/>
+          <p:cNvSpPr txBox="1"/>
+          <p:nvPr/>
+        </p:nvSpPr>
+        <p:spPr>
+          <a:xfrm>
+            <a:off x="1097280" y="1773936"/>
+            <a:ext cx="3017520" cy="384048"/>
           </a:xfrm>
           <a:prstGeom prst="rect">
             <a:avLst/>
@@ -4961,14 +6374,14 @@
       </p:sp>
       <p:sp>
         <p:nvSpPr>
-          <p:cNvPr id="8" name="Text 6"/>
-          <p:cNvSpPr txBox="1"/>
-          <p:nvPr/>
-        </p:nvSpPr>
-        <p:spPr>
-          <a:xfrm>
-            <a:off x="3749040" y="1801368"/>
-            <a:ext cx="914400" cy="365760"/>
+          <p:cNvPr id="11" name="Text 7"/>
+          <p:cNvSpPr txBox="1"/>
+          <p:nvPr/>
+        </p:nvSpPr>
+        <p:spPr>
+          <a:xfrm>
+            <a:off x="3977640" y="1773936"/>
+            <a:ext cx="822960" cy="384048"/>
           </a:xfrm>
           <a:prstGeom prst="rect">
             <a:avLst/>
@@ -4984,7 +6397,7 @@
               <a:buNone/>
             </a:pPr>
             <a:r>
-              <a:rPr lang="en-US" sz="1400" b="1" dirty="0">
+              <a:rPr lang="en-US" sz="1300" b="1" dirty="0">
                 <a:solidFill>
                   <a:srgbClr val="15803D"/>
                 </a:solidFill>
@@ -4994,20 +6407,20 @@
               </a:rPr>
               <a:t>Pronto</a:t>
             </a:r>
-            <a:endParaRPr lang="en-US" sz="1400" dirty="0"/>
-          </a:p>
-        </p:txBody>
-      </p:sp>
-      <p:sp>
-        <p:nvSpPr>
-          <p:cNvPr id="9" name="Text 7"/>
-          <p:cNvSpPr txBox="1"/>
-          <p:nvPr/>
-        </p:nvSpPr>
-        <p:spPr>
-          <a:xfrm>
-            <a:off x="4754880" y="1801368"/>
-            <a:ext cx="3840480" cy="365760"/>
+            <a:endParaRPr lang="en-US" sz="1300" dirty="0"/>
+          </a:p>
+        </p:txBody>
+      </p:sp>
+      <p:sp>
+        <p:nvSpPr>
+          <p:cNvPr id="12" name="Text 8"/>
+          <p:cNvSpPr txBox="1"/>
+          <p:nvPr/>
+        </p:nvSpPr>
+        <p:spPr>
+          <a:xfrm>
+            <a:off x="4846320" y="1773936"/>
+            <a:ext cx="3566160" cy="384048"/>
           </a:xfrm>
           <a:prstGeom prst="rect">
             <a:avLst/>
@@ -5023,7 +6436,7 @@
               <a:buNone/>
             </a:pPr>
             <a:r>
-              <a:rPr lang="en-US" sz="1300" dirty="0">
+              <a:rPr lang="en-US" sz="1250" dirty="0">
                 <a:solidFill>
                   <a:srgbClr val="6B7280"/>
                 </a:solidFill>
@@ -5033,20 +6446,20 @@
               </a:rPr>
               <a:t>Várias câmeras, zona própria em cada uma</a:t>
             </a:r>
-            <a:endParaRPr lang="en-US" sz="1300" dirty="0"/>
-          </a:p>
-        </p:txBody>
-      </p:sp>
-      <p:sp>
-        <p:nvSpPr>
-          <p:cNvPr id="10" name="Shape 8"/>
+            <a:endParaRPr lang="en-US" sz="1250" dirty="0"/>
+          </a:p>
+        </p:txBody>
+      </p:sp>
+      <p:sp>
+        <p:nvSpPr>
+          <p:cNvPr id="13" name="Shape 9"/>
           <p:cNvSpPr/>
           <p:nvPr/>
         </p:nvSpPr>
         <p:spPr>
           <a:xfrm>
-            <a:off x="640080" y="2221992"/>
-            <a:ext cx="7955280" cy="0"/>
+            <a:off x="731520" y="2203704"/>
+            <a:ext cx="7772400" cy="0"/>
           </a:xfrm>
           <a:prstGeom prst="line">
             <a:avLst/>
@@ -5060,16 +6473,40 @@
           </a:ln>
         </p:spPr>
       </p:sp>
-      <p:sp>
-        <p:nvSpPr>
-          <p:cNvPr id="11" name="Text 9"/>
-          <p:cNvSpPr txBox="1"/>
-          <p:nvPr/>
-        </p:nvSpPr>
-        <p:spPr>
-          <a:xfrm>
-            <a:off x="640080" y="2276856"/>
-            <a:ext cx="3108960" cy="365760"/>
+      <p:pic>
+        <p:nvPicPr>
+          <p:cNvPr id="14" name="Image 2" descr="preencoded.png">    </p:cNvPr>
+          <p:cNvPicPr>
+            <a:picLocks noChangeAspect="1"/>
+          </p:cNvPicPr>
+          <p:nvPr/>
+        </p:nvPicPr>
+        <p:blipFill>
+          <a:blip r:embed="rId3"/>
+          <a:stretch>
+            <a:fillRect/>
+          </a:stretch>
+        </p:blipFill>
+        <p:spPr>
+          <a:xfrm>
+            <a:off x="731520" y="2331720"/>
+            <a:ext cx="219456" cy="219456"/>
+          </a:xfrm>
+          <a:prstGeom prst="rect">
+            <a:avLst/>
+          </a:prstGeom>
+        </p:spPr>
+      </p:pic>
+      <p:sp>
+        <p:nvSpPr>
+          <p:cNvPr id="15" name="Text 10"/>
+          <p:cNvSpPr txBox="1"/>
+          <p:nvPr/>
+        </p:nvSpPr>
+        <p:spPr>
+          <a:xfrm>
+            <a:off x="1097280" y="2249424"/>
+            <a:ext cx="3017520" cy="384048"/>
           </a:xfrm>
           <a:prstGeom prst="rect">
             <a:avLst/>
@@ -5101,14 +6538,14 @@
       </p:sp>
       <p:sp>
         <p:nvSpPr>
-          <p:cNvPr id="12" name="Text 10"/>
-          <p:cNvSpPr txBox="1"/>
-          <p:nvPr/>
-        </p:nvSpPr>
-        <p:spPr>
-          <a:xfrm>
-            <a:off x="3749040" y="2276856"/>
-            <a:ext cx="914400" cy="365760"/>
+          <p:cNvPr id="16" name="Text 11"/>
+          <p:cNvSpPr txBox="1"/>
+          <p:nvPr/>
+        </p:nvSpPr>
+        <p:spPr>
+          <a:xfrm>
+            <a:off x="3977640" y="2249424"/>
+            <a:ext cx="822960" cy="384048"/>
           </a:xfrm>
           <a:prstGeom prst="rect">
             <a:avLst/>
@@ -5124,7 +6561,7 @@
               <a:buNone/>
             </a:pPr>
             <a:r>
-              <a:rPr lang="en-US" sz="1400" b="1" dirty="0">
+              <a:rPr lang="en-US" sz="1300" b="1" dirty="0">
                 <a:solidFill>
                   <a:srgbClr val="15803D"/>
                 </a:solidFill>
@@ -5134,20 +6571,20 @@
               </a:rPr>
               <a:t>Pronto</a:t>
             </a:r>
-            <a:endParaRPr lang="en-US" sz="1400" dirty="0"/>
-          </a:p>
-        </p:txBody>
-      </p:sp>
-      <p:sp>
-        <p:nvSpPr>
-          <p:cNvPr id="13" name="Text 11"/>
-          <p:cNvSpPr txBox="1"/>
-          <p:nvPr/>
-        </p:nvSpPr>
-        <p:spPr>
-          <a:xfrm>
-            <a:off x="4754880" y="2276856"/>
-            <a:ext cx="3840480" cy="365760"/>
+            <a:endParaRPr lang="en-US" sz="1300" dirty="0"/>
+          </a:p>
+        </p:txBody>
+      </p:sp>
+      <p:sp>
+        <p:nvSpPr>
+          <p:cNvPr id="17" name="Text 12"/>
+          <p:cNvSpPr txBox="1"/>
+          <p:nvPr/>
+        </p:nvSpPr>
+        <p:spPr>
+          <a:xfrm>
+            <a:off x="4846320" y="2249424"/>
+            <a:ext cx="3566160" cy="384048"/>
           </a:xfrm>
           <a:prstGeom prst="rect">
             <a:avLst/>
@@ -5163,7 +6600,7 @@
               <a:buNone/>
             </a:pPr>
             <a:r>
-              <a:rPr lang="en-US" sz="1300" dirty="0">
+              <a:rPr lang="en-US" sz="1250" dirty="0">
                 <a:solidFill>
                   <a:srgbClr val="6B7280"/>
                 </a:solidFill>
@@ -5173,20 +6610,20 @@
               </a:rPr>
               <a:t>Agrupados, com filtros e ações em lote</a:t>
             </a:r>
-            <a:endParaRPr lang="en-US" sz="1300" dirty="0"/>
-          </a:p>
-        </p:txBody>
-      </p:sp>
-      <p:sp>
-        <p:nvSpPr>
-          <p:cNvPr id="14" name="Shape 12"/>
+            <a:endParaRPr lang="en-US" sz="1250" dirty="0"/>
+          </a:p>
+        </p:txBody>
+      </p:sp>
+      <p:sp>
+        <p:nvSpPr>
+          <p:cNvPr id="18" name="Shape 13"/>
           <p:cNvSpPr/>
           <p:nvPr/>
         </p:nvSpPr>
         <p:spPr>
           <a:xfrm>
-            <a:off x="640080" y="2697480"/>
-            <a:ext cx="7955280" cy="0"/>
+            <a:off x="731520" y="2679192"/>
+            <a:ext cx="7772400" cy="0"/>
           </a:xfrm>
           <a:prstGeom prst="line">
             <a:avLst/>
@@ -5200,16 +6637,40 @@
           </a:ln>
         </p:spPr>
       </p:sp>
-      <p:sp>
-        <p:nvSpPr>
-          <p:cNvPr id="15" name="Text 13"/>
-          <p:cNvSpPr txBox="1"/>
-          <p:nvPr/>
-        </p:nvSpPr>
-        <p:spPr>
-          <a:xfrm>
-            <a:off x="640080" y="2752344"/>
-            <a:ext cx="3108960" cy="365760"/>
+      <p:pic>
+        <p:nvPicPr>
+          <p:cNvPr id="19" name="Image 3" descr="preencoded.png">    </p:cNvPr>
+          <p:cNvPicPr>
+            <a:picLocks noChangeAspect="1"/>
+          </p:cNvPicPr>
+          <p:nvPr/>
+        </p:nvPicPr>
+        <p:blipFill>
+          <a:blip r:embed="rId4"/>
+          <a:stretch>
+            <a:fillRect/>
+          </a:stretch>
+        </p:blipFill>
+        <p:spPr>
+          <a:xfrm>
+            <a:off x="731520" y="2807208"/>
+            <a:ext cx="219456" cy="219456"/>
+          </a:xfrm>
+          <a:prstGeom prst="rect">
+            <a:avLst/>
+          </a:prstGeom>
+        </p:spPr>
+      </p:pic>
+      <p:sp>
+        <p:nvSpPr>
+          <p:cNvPr id="20" name="Text 14"/>
+          <p:cNvSpPr txBox="1"/>
+          <p:nvPr/>
+        </p:nvSpPr>
+        <p:spPr>
+          <a:xfrm>
+            <a:off x="1097280" y="2724912"/>
+            <a:ext cx="3017520" cy="384048"/>
           </a:xfrm>
           <a:prstGeom prst="rect">
             <a:avLst/>
@@ -5241,14 +6702,14 @@
       </p:sp>
       <p:sp>
         <p:nvSpPr>
-          <p:cNvPr id="16" name="Text 14"/>
-          <p:cNvSpPr txBox="1"/>
-          <p:nvPr/>
-        </p:nvSpPr>
-        <p:spPr>
-          <a:xfrm>
-            <a:off x="3749040" y="2752344"/>
-            <a:ext cx="914400" cy="365760"/>
+          <p:cNvPr id="21" name="Text 15"/>
+          <p:cNvSpPr txBox="1"/>
+          <p:nvPr/>
+        </p:nvSpPr>
+        <p:spPr>
+          <a:xfrm>
+            <a:off x="3977640" y="2724912"/>
+            <a:ext cx="822960" cy="384048"/>
           </a:xfrm>
           <a:prstGeom prst="rect">
             <a:avLst/>
@@ -5264,7 +6725,7 @@
               <a:buNone/>
             </a:pPr>
             <a:r>
-              <a:rPr lang="en-US" sz="1400" b="1" dirty="0">
+              <a:rPr lang="en-US" sz="1300" b="1" dirty="0">
                 <a:solidFill>
                   <a:srgbClr val="15803D"/>
                 </a:solidFill>
@@ -5274,20 +6735,20 @@
               </a:rPr>
               <a:t>Pronto</a:t>
             </a:r>
-            <a:endParaRPr lang="en-US" sz="1400" dirty="0"/>
-          </a:p>
-        </p:txBody>
-      </p:sp>
-      <p:sp>
-        <p:nvSpPr>
-          <p:cNvPr id="17" name="Text 15"/>
-          <p:cNvSpPr txBox="1"/>
-          <p:nvPr/>
-        </p:nvSpPr>
-        <p:spPr>
-          <a:xfrm>
-            <a:off x="4754880" y="2752344"/>
-            <a:ext cx="3840480" cy="365760"/>
+            <a:endParaRPr lang="en-US" sz="1300" dirty="0"/>
+          </a:p>
+        </p:txBody>
+      </p:sp>
+      <p:sp>
+        <p:nvSpPr>
+          <p:cNvPr id="22" name="Text 16"/>
+          <p:cNvSpPr txBox="1"/>
+          <p:nvPr/>
+        </p:nvSpPr>
+        <p:spPr>
+          <a:xfrm>
+            <a:off x="4846320" y="2724912"/>
+            <a:ext cx="3566160" cy="384048"/>
           </a:xfrm>
           <a:prstGeom prst="rect">
             <a:avLst/>
@@ -5303,7 +6764,7 @@
               <a:buNone/>
             </a:pPr>
             <a:r>
-              <a:rPr lang="en-US" sz="1300" dirty="0">
+              <a:rPr lang="en-US" sz="1250" dirty="0">
                 <a:solidFill>
                   <a:srgbClr val="6B7280"/>
                 </a:solidFill>
@@ -5313,20 +6774,20 @@
               </a:rPr>
               <a:t>Testado na tela do operador</a:t>
             </a:r>
-            <a:endParaRPr lang="en-US" sz="1300" dirty="0"/>
-          </a:p>
-        </p:txBody>
-      </p:sp>
-      <p:sp>
-        <p:nvSpPr>
-          <p:cNvPr id="18" name="Shape 16"/>
+            <a:endParaRPr lang="en-US" sz="1250" dirty="0"/>
+          </a:p>
+        </p:txBody>
+      </p:sp>
+      <p:sp>
+        <p:nvSpPr>
+          <p:cNvPr id="23" name="Shape 17"/>
           <p:cNvSpPr/>
           <p:nvPr/>
         </p:nvSpPr>
         <p:spPr>
           <a:xfrm>
-            <a:off x="640080" y="3172968"/>
-            <a:ext cx="7955280" cy="0"/>
+            <a:off x="731520" y="3154680"/>
+            <a:ext cx="7772400" cy="0"/>
           </a:xfrm>
           <a:prstGeom prst="line">
             <a:avLst/>
@@ -5340,16 +6801,40 @@
           </a:ln>
         </p:spPr>
       </p:sp>
-      <p:sp>
-        <p:nvSpPr>
-          <p:cNvPr id="19" name="Text 17"/>
-          <p:cNvSpPr txBox="1"/>
-          <p:nvPr/>
-        </p:nvSpPr>
-        <p:spPr>
-          <a:xfrm>
-            <a:off x="640080" y="3227832"/>
-            <a:ext cx="3108960" cy="365760"/>
+      <p:pic>
+        <p:nvPicPr>
+          <p:cNvPr id="24" name="Image 4" descr="preencoded.png">    </p:cNvPr>
+          <p:cNvPicPr>
+            <a:picLocks noChangeAspect="1"/>
+          </p:cNvPicPr>
+          <p:nvPr/>
+        </p:nvPicPr>
+        <p:blipFill>
+          <a:blip r:embed="rId5"/>
+          <a:stretch>
+            <a:fillRect/>
+          </a:stretch>
+        </p:blipFill>
+        <p:spPr>
+          <a:xfrm>
+            <a:off x="731520" y="3282696"/>
+            <a:ext cx="219456" cy="219456"/>
+          </a:xfrm>
+          <a:prstGeom prst="rect">
+            <a:avLst/>
+          </a:prstGeom>
+        </p:spPr>
+      </p:pic>
+      <p:sp>
+        <p:nvSpPr>
+          <p:cNvPr id="25" name="Text 18"/>
+          <p:cNvSpPr txBox="1"/>
+          <p:nvPr/>
+        </p:nvSpPr>
+        <p:spPr>
+          <a:xfrm>
+            <a:off x="1097280" y="3200400"/>
+            <a:ext cx="3017520" cy="384048"/>
           </a:xfrm>
           <a:prstGeom prst="rect">
             <a:avLst/>
@@ -5381,14 +6866,14 @@
       </p:sp>
       <p:sp>
         <p:nvSpPr>
-          <p:cNvPr id="20" name="Text 18"/>
-          <p:cNvSpPr txBox="1"/>
-          <p:nvPr/>
-        </p:nvSpPr>
-        <p:spPr>
-          <a:xfrm>
-            <a:off x="3749040" y="3227832"/>
-            <a:ext cx="914400" cy="365760"/>
+          <p:cNvPr id="26" name="Text 19"/>
+          <p:cNvSpPr txBox="1"/>
+          <p:nvPr/>
+        </p:nvSpPr>
+        <p:spPr>
+          <a:xfrm>
+            <a:off x="3977640" y="3200400"/>
+            <a:ext cx="822960" cy="384048"/>
           </a:xfrm>
           <a:prstGeom prst="rect">
             <a:avLst/>
@@ -5404,7 +6889,7 @@
               <a:buNone/>
             </a:pPr>
             <a:r>
-              <a:rPr lang="en-US" sz="1400" b="1" dirty="0">
+              <a:rPr lang="en-US" sz="1300" b="1" dirty="0">
                 <a:solidFill>
                   <a:srgbClr val="15803D"/>
                 </a:solidFill>
@@ -5414,20 +6899,20 @@
               </a:rPr>
               <a:t>Pronto</a:t>
             </a:r>
-            <a:endParaRPr lang="en-US" sz="1400" dirty="0"/>
-          </a:p>
-        </p:txBody>
-      </p:sp>
-      <p:sp>
-        <p:nvSpPr>
-          <p:cNvPr id="21" name="Text 19"/>
-          <p:cNvSpPr txBox="1"/>
-          <p:nvPr/>
-        </p:nvSpPr>
-        <p:spPr>
-          <a:xfrm>
-            <a:off x="4754880" y="3227832"/>
-            <a:ext cx="3840480" cy="365760"/>
+            <a:endParaRPr lang="en-US" sz="1300" dirty="0"/>
+          </a:p>
+        </p:txBody>
+      </p:sp>
+      <p:sp>
+        <p:nvSpPr>
+          <p:cNvPr id="27" name="Text 20"/>
+          <p:cNvSpPr txBox="1"/>
+          <p:nvPr/>
+        </p:nvSpPr>
+        <p:spPr>
+          <a:xfrm>
+            <a:off x="4846320" y="3200400"/>
+            <a:ext cx="3566160" cy="384048"/>
           </a:xfrm>
           <a:prstGeom prst="rect">
             <a:avLst/>
@@ -5443,7 +6928,7 @@
               <a:buNone/>
             </a:pPr>
             <a:r>
-              <a:rPr lang="en-US" sz="1300" dirty="0">
+              <a:rPr lang="en-US" sz="1250" dirty="0">
                 <a:solidFill>
                   <a:srgbClr val="6B7280"/>
                 </a:solidFill>
@@ -5453,20 +6938,20 @@
               </a:rPr>
               <a:t>Operador, técnico e supervisor</a:t>
             </a:r>
-            <a:endParaRPr lang="en-US" sz="1300" dirty="0"/>
-          </a:p>
-        </p:txBody>
-      </p:sp>
-      <p:sp>
-        <p:nvSpPr>
-          <p:cNvPr id="22" name="Shape 20"/>
+            <a:endParaRPr lang="en-US" sz="1250" dirty="0"/>
+          </a:p>
+        </p:txBody>
+      </p:sp>
+      <p:sp>
+        <p:nvSpPr>
+          <p:cNvPr id="28" name="Shape 21"/>
           <p:cNvSpPr/>
           <p:nvPr/>
         </p:nvSpPr>
         <p:spPr>
           <a:xfrm>
-            <a:off x="640080" y="3648456"/>
-            <a:ext cx="7955280" cy="0"/>
+            <a:off x="731520" y="3630168"/>
+            <a:ext cx="7772400" cy="0"/>
           </a:xfrm>
           <a:prstGeom prst="line">
             <a:avLst/>
@@ -5480,16 +6965,40 @@
           </a:ln>
         </p:spPr>
       </p:sp>
-      <p:sp>
-        <p:nvSpPr>
-          <p:cNvPr id="23" name="Text 21"/>
-          <p:cNvSpPr txBox="1"/>
-          <p:nvPr/>
-        </p:nvSpPr>
-        <p:spPr>
-          <a:xfrm>
-            <a:off x="640080" y="3703320"/>
-            <a:ext cx="3108960" cy="365760"/>
+      <p:pic>
+        <p:nvPicPr>
+          <p:cNvPr id="29" name="Image 5" descr="preencoded.png">    </p:cNvPr>
+          <p:cNvPicPr>
+            <a:picLocks noChangeAspect="1"/>
+          </p:cNvPicPr>
+          <p:nvPr/>
+        </p:nvPicPr>
+        <p:blipFill>
+          <a:blip r:embed="rId6"/>
+          <a:stretch>
+            <a:fillRect/>
+          </a:stretch>
+        </p:blipFill>
+        <p:spPr>
+          <a:xfrm>
+            <a:off x="731520" y="3758184"/>
+            <a:ext cx="219456" cy="219456"/>
+          </a:xfrm>
+          <a:prstGeom prst="rect">
+            <a:avLst/>
+          </a:prstGeom>
+        </p:spPr>
+      </p:pic>
+      <p:sp>
+        <p:nvSpPr>
+          <p:cNvPr id="30" name="Text 22"/>
+          <p:cNvSpPr txBox="1"/>
+          <p:nvPr/>
+        </p:nvSpPr>
+        <p:spPr>
+          <a:xfrm>
+            <a:off x="1097280" y="3675888"/>
+            <a:ext cx="3017520" cy="384048"/>
           </a:xfrm>
           <a:prstGeom prst="rect">
             <a:avLst/>
@@ -5521,14 +7030,14 @@
       </p:sp>
       <p:sp>
         <p:nvSpPr>
-          <p:cNvPr id="24" name="Text 22"/>
-          <p:cNvSpPr txBox="1"/>
-          <p:nvPr/>
-        </p:nvSpPr>
-        <p:spPr>
-          <a:xfrm>
-            <a:off x="3749040" y="3703320"/>
-            <a:ext cx="914400" cy="365760"/>
+          <p:cNvPr id="31" name="Text 23"/>
+          <p:cNvSpPr txBox="1"/>
+          <p:nvPr/>
+        </p:nvSpPr>
+        <p:spPr>
+          <a:xfrm>
+            <a:off x="3977640" y="3675888"/>
+            <a:ext cx="822960" cy="384048"/>
           </a:xfrm>
           <a:prstGeom prst="rect">
             <a:avLst/>
@@ -5544,7 +7053,7 @@
               <a:buNone/>
             </a:pPr>
             <a:r>
-              <a:rPr lang="en-US" sz="1400" b="1" dirty="0">
+              <a:rPr lang="en-US" sz="1300" b="1" dirty="0">
                 <a:solidFill>
                   <a:srgbClr val="B45309"/>
                 </a:solidFill>
@@ -5554,20 +7063,20 @@
               </a:rPr>
               <a:t>Parcial</a:t>
             </a:r>
-            <a:endParaRPr lang="en-US" sz="1400" dirty="0"/>
-          </a:p>
-        </p:txBody>
-      </p:sp>
-      <p:sp>
-        <p:nvSpPr>
-          <p:cNvPr id="25" name="Text 23"/>
-          <p:cNvSpPr txBox="1"/>
-          <p:nvPr/>
-        </p:nvSpPr>
-        <p:spPr>
-          <a:xfrm>
-            <a:off x="4754880" y="3703320"/>
-            <a:ext cx="3840480" cy="365760"/>
+            <a:endParaRPr lang="en-US" sz="1300" dirty="0"/>
+          </a:p>
+        </p:txBody>
+      </p:sp>
+      <p:sp>
+        <p:nvSpPr>
+          <p:cNvPr id="32" name="Text 24"/>
+          <p:cNvSpPr txBox="1"/>
+          <p:nvPr/>
+        </p:nvSpPr>
+        <p:spPr>
+          <a:xfrm>
+            <a:off x="4846320" y="3675888"/>
+            <a:ext cx="3566160" cy="384048"/>
           </a:xfrm>
           <a:prstGeom prst="rect">
             <a:avLst/>
@@ -5583,7 +7092,7 @@
               <a:buNone/>
             </a:pPr>
             <a:r>
-              <a:rPr lang="en-US" sz="1300" dirty="0">
+              <a:rPr lang="en-US" sz="1250" dirty="0">
                 <a:solidFill>
                   <a:srgbClr val="6B7280"/>
                 </a:solidFill>
@@ -5593,20 +7102,20 @@
               </a:rPr>
               <a:t>Código e tela prontos; falta ligar a chave da API</a:t>
             </a:r>
-            <a:endParaRPr lang="en-US" sz="1300" dirty="0"/>
-          </a:p>
-        </p:txBody>
-      </p:sp>
-      <p:sp>
-        <p:nvSpPr>
-          <p:cNvPr id="26" name="Shape 24"/>
+            <a:endParaRPr lang="en-US" sz="1250" dirty="0"/>
+          </a:p>
+        </p:txBody>
+      </p:sp>
+      <p:sp>
+        <p:nvSpPr>
+          <p:cNvPr id="33" name="Shape 25"/>
           <p:cNvSpPr/>
           <p:nvPr/>
         </p:nvSpPr>
         <p:spPr>
           <a:xfrm>
-            <a:off x="640080" y="4123944"/>
-            <a:ext cx="7955280" cy="0"/>
+            <a:off x="731520" y="4105656"/>
+            <a:ext cx="7772400" cy="0"/>
           </a:xfrm>
           <a:prstGeom prst="line">
             <a:avLst/>
@@ -5620,16 +7129,40 @@
           </a:ln>
         </p:spPr>
       </p:sp>
-      <p:sp>
-        <p:nvSpPr>
-          <p:cNvPr id="27" name="Text 25"/>
-          <p:cNvSpPr txBox="1"/>
-          <p:nvPr/>
-        </p:nvSpPr>
-        <p:spPr>
-          <a:xfrm>
-            <a:off x="640080" y="4178808"/>
-            <a:ext cx="3108960" cy="365760"/>
+      <p:pic>
+        <p:nvPicPr>
+          <p:cNvPr id="34" name="Image 6" descr="preencoded.png">    </p:cNvPr>
+          <p:cNvPicPr>
+            <a:picLocks noChangeAspect="1"/>
+          </p:cNvPicPr>
+          <p:nvPr/>
+        </p:nvPicPr>
+        <p:blipFill>
+          <a:blip r:embed="rId7"/>
+          <a:stretch>
+            <a:fillRect/>
+          </a:stretch>
+        </p:blipFill>
+        <p:spPr>
+          <a:xfrm>
+            <a:off x="731520" y="4233672"/>
+            <a:ext cx="219456" cy="219456"/>
+          </a:xfrm>
+          <a:prstGeom prst="rect">
+            <a:avLst/>
+          </a:prstGeom>
+        </p:spPr>
+      </p:pic>
+      <p:sp>
+        <p:nvSpPr>
+          <p:cNvPr id="35" name="Text 26"/>
+          <p:cNvSpPr txBox="1"/>
+          <p:nvPr/>
+        </p:nvSpPr>
+        <p:spPr>
+          <a:xfrm>
+            <a:off x="1097280" y="4151376"/>
+            <a:ext cx="3017520" cy="384048"/>
           </a:xfrm>
           <a:prstGeom prst="rect">
             <a:avLst/>
@@ -5661,14 +7194,14 @@
       </p:sp>
       <p:sp>
         <p:nvSpPr>
-          <p:cNvPr id="28" name="Text 26"/>
-          <p:cNvSpPr txBox="1"/>
-          <p:nvPr/>
-        </p:nvSpPr>
-        <p:spPr>
-          <a:xfrm>
-            <a:off x="3749040" y="4178808"/>
-            <a:ext cx="914400" cy="365760"/>
+          <p:cNvPr id="36" name="Text 27"/>
+          <p:cNvSpPr txBox="1"/>
+          <p:nvPr/>
+        </p:nvSpPr>
+        <p:spPr>
+          <a:xfrm>
+            <a:off x="3977640" y="4151376"/>
+            <a:ext cx="822960" cy="384048"/>
           </a:xfrm>
           <a:prstGeom prst="rect">
             <a:avLst/>
@@ -5684,7 +7217,7 @@
               <a:buNone/>
             </a:pPr>
             <a:r>
-              <a:rPr lang="en-US" sz="1400" b="1" dirty="0">
+              <a:rPr lang="en-US" sz="1300" b="1" dirty="0">
                 <a:solidFill>
                   <a:srgbClr val="B45309"/>
                 </a:solidFill>
@@ -5694,20 +7227,20 @@
               </a:rPr>
               <a:t>Parcial</a:t>
             </a:r>
-            <a:endParaRPr lang="en-US" sz="1400" dirty="0"/>
-          </a:p>
-        </p:txBody>
-      </p:sp>
-      <p:sp>
-        <p:nvSpPr>
-          <p:cNvPr id="29" name="Text 27"/>
-          <p:cNvSpPr txBox="1"/>
-          <p:nvPr/>
-        </p:nvSpPr>
-        <p:spPr>
-          <a:xfrm>
-            <a:off x="4754880" y="4178808"/>
-            <a:ext cx="3840480" cy="365760"/>
+            <a:endParaRPr lang="en-US" sz="1300" dirty="0"/>
+          </a:p>
+        </p:txBody>
+      </p:sp>
+      <p:sp>
+        <p:nvSpPr>
+          <p:cNvPr id="37" name="Text 28"/>
+          <p:cNvSpPr txBox="1"/>
+          <p:nvPr/>
+        </p:nvSpPr>
+        <p:spPr>
+          <a:xfrm>
+            <a:off x="4846320" y="4151376"/>
+            <a:ext cx="3566160" cy="384048"/>
           </a:xfrm>
           <a:prstGeom prst="rect">
             <a:avLst/>
@@ -5723,7 +7256,7 @@
               <a:buNone/>
             </a:pPr>
             <a:r>
-              <a:rPr lang="en-US" sz="1300" dirty="0">
+              <a:rPr lang="en-US" sz="1250" dirty="0">
                 <a:solidFill>
                   <a:srgbClr val="6B7280"/>
                 </a:solidFill>
@@ -5733,20 +7266,20 @@
               </a:rPr>
               <a:t>Câmeras conectadas; falta testar a detecção lá</a:t>
             </a:r>
-            <a:endParaRPr lang="en-US" sz="1300" dirty="0"/>
-          </a:p>
-        </p:txBody>
-      </p:sp>
-      <p:sp>
-        <p:nvSpPr>
-          <p:cNvPr id="30" name="Text 28"/>
-          <p:cNvSpPr txBox="1"/>
-          <p:nvPr/>
-        </p:nvSpPr>
-        <p:spPr>
-          <a:xfrm>
-            <a:off x="8229600" y="4617720"/>
-            <a:ext cx="457200" cy="274320"/>
+            <a:endParaRPr lang="en-US" sz="1250" dirty="0"/>
+          </a:p>
+        </p:txBody>
+      </p:sp>
+      <p:sp>
+        <p:nvSpPr>
+          <p:cNvPr id="38" name="Text 29"/>
+          <p:cNvSpPr txBox="1"/>
+          <p:nvPr/>
+        </p:nvSpPr>
+        <p:spPr>
+          <a:xfrm>
+            <a:off x="8229600" y="4709160"/>
+            <a:ext cx="457200" cy="228600"/>
           </a:xfrm>
           <a:prstGeom prst="rect">
             <a:avLst/>
@@ -5819,7 +7352,7 @@
         </p:nvSpPr>
         <p:spPr>
           <a:xfrm>
-            <a:off x="640080" y="457200"/>
+            <a:off x="640080" y="411480"/>
             <a:ext cx="7863840" cy="640080"/>
           </a:xfrm>
           <a:prstGeom prst="rect">
@@ -5858,12 +7391,12 @@
         </p:nvSpPr>
         <p:spPr>
           <a:xfrm>
-            <a:off x="640080" y="1371600"/>
-            <a:ext cx="3931920" cy="3063240"/>
+            <a:off x="640080" y="1280160"/>
+            <a:ext cx="3931920" cy="3200400"/>
           </a:xfrm>
           <a:prstGeom prst="roundRect">
             <a:avLst>
-              <a:gd name="adj" fmla="val 2388"/>
+              <a:gd name="adj" fmla="val 2857"/>
             </a:avLst>
           </a:prstGeom>
           <a:solidFill>
@@ -5885,8 +7418,8 @@
         </p:nvSpPr>
         <p:spPr>
           <a:xfrm>
-            <a:off x="822960" y="1463040"/>
-            <a:ext cx="3566160" cy="274320"/>
+            <a:off x="868680" y="1389888"/>
+            <a:ext cx="3474720" cy="274320"/>
           </a:xfrm>
           <a:prstGeom prst="rect">
             <a:avLst/>
@@ -5924,8 +7457,8 @@
         </p:nvSpPr>
         <p:spPr>
           <a:xfrm>
-            <a:off x="822960" y="1810512"/>
-            <a:ext cx="3566160" cy="2560320"/>
+            <a:off x="868680" y="1783080"/>
+            <a:ext cx="3474720" cy="2651760"/>
           </a:xfrm>
           <a:prstGeom prst="rect">
             <a:avLst/>
@@ -6201,12 +7734,12 @@
         </p:nvSpPr>
         <p:spPr>
           <a:xfrm>
-            <a:off x="4754880" y="1371600"/>
-            <a:ext cx="3749040" cy="3063240"/>
+            <a:off x="4754880" y="1280160"/>
+            <a:ext cx="3749040" cy="3200400"/>
           </a:xfrm>
           <a:prstGeom prst="roundRect">
             <a:avLst>
-              <a:gd name="adj" fmla="val 2388"/>
+              <a:gd name="adj" fmla="val 2857"/>
             </a:avLst>
           </a:prstGeom>
           <a:solidFill>
@@ -6228,8 +7761,8 @@
         </p:nvSpPr>
         <p:spPr>
           <a:xfrm>
-            <a:off x="4937760" y="1463040"/>
-            <a:ext cx="3383280" cy="274320"/>
+            <a:off x="4983480" y="1389888"/>
+            <a:ext cx="3291840" cy="274320"/>
           </a:xfrm>
           <a:prstGeom prst="rect">
             <a:avLst/>
@@ -6267,8 +7800,8 @@
         </p:nvSpPr>
         <p:spPr>
           <a:xfrm>
-            <a:off x="4937760" y="1810512"/>
-            <a:ext cx="3383280" cy="2560320"/>
+            <a:off x="4983480" y="1783080"/>
+            <a:ext cx="3291840" cy="2651760"/>
           </a:xfrm>
           <a:prstGeom prst="rect">
             <a:avLst/>
@@ -6482,8 +8015,8 @@
         </p:nvSpPr>
         <p:spPr>
           <a:xfrm>
-            <a:off x="8229600" y="4617720"/>
-            <a:ext cx="457200" cy="274320"/>
+            <a:off x="8229600" y="4709160"/>
+            <a:ext cx="457200" cy="228600"/>
           </a:xfrm>
           <a:prstGeom prst="rect">
             <a:avLst/>
@@ -6556,8 +8089,8 @@
         </p:nvSpPr>
         <p:spPr>
           <a:xfrm>
-            <a:off x="640080" y="914400"/>
-            <a:ext cx="7863840" cy="2194560"/>
+            <a:off x="640080" y="548640"/>
+            <a:ext cx="7863840" cy="548640"/>
           </a:xfrm>
           <a:prstGeom prst="rect">
             <a:avLst/>
@@ -6573,7 +8106,122 @@
               <a:buNone/>
             </a:pPr>
             <a:r>
-              <a:rPr lang="en-US" sz="4400" b="1" dirty="0">
+              <a:rPr lang="en-US" sz="1600" b="1" spc="300" kern="0" dirty="0">
+                <a:solidFill>
+                  <a:srgbClr val="67E8F9"/>
+                </a:solidFill>
+                <a:latin typeface="Calibri" pitchFamily="34" charset="0"/>
+                <a:ea typeface="Calibri" pitchFamily="34" charset="-122"/>
+                <a:cs typeface="Calibri" pitchFamily="34" charset="-120"/>
+              </a:rPr>
+              <a:t>Benefícios</a:t>
+            </a:r>
+            <a:endParaRPr lang="en-US" sz="1600" dirty="0"/>
+          </a:p>
+        </p:txBody>
+      </p:sp>
+      <p:sp>
+        <p:nvSpPr>
+          <p:cNvPr id="3" name="Shape 1"/>
+          <p:cNvSpPr/>
+          <p:nvPr/>
+        </p:nvSpPr>
+        <p:spPr>
+          <a:xfrm>
+            <a:off x="640080" y="1234440"/>
+            <a:ext cx="2514600" cy="2377440"/>
+          </a:xfrm>
+          <a:prstGeom prst="roundRect">
+            <a:avLst>
+              <a:gd name="adj" fmla="val 4615"/>
+            </a:avLst>
+          </a:prstGeom>
+          <a:solidFill>
+            <a:srgbClr val="12324A"/>
+          </a:solidFill>
+          <a:ln w="6350">
+            <a:solidFill>
+              <a:srgbClr val="12324A"/>
+            </a:solidFill>
+            <a:prstDash val="solid"/>
+          </a:ln>
+        </p:spPr>
+      </p:sp>
+      <p:sp>
+        <p:nvSpPr>
+          <p:cNvPr id="4" name="Shape 2"/>
+          <p:cNvSpPr/>
+          <p:nvPr/>
+        </p:nvSpPr>
+        <p:spPr>
+          <a:xfrm>
+            <a:off x="914400" y="1508760"/>
+            <a:ext cx="685800" cy="685800"/>
+          </a:xfrm>
+          <a:prstGeom prst="ellipse">
+            <a:avLst/>
+          </a:prstGeom>
+          <a:solidFill>
+            <a:srgbClr val="0E7490"/>
+          </a:solidFill>
+          <a:ln w="6350">
+            <a:solidFill>
+              <a:srgbClr val="0E7490"/>
+            </a:solidFill>
+            <a:prstDash val="solid"/>
+          </a:ln>
+        </p:spPr>
+      </p:sp>
+      <p:pic>
+        <p:nvPicPr>
+          <p:cNvPr id="5" name="Image 0" descr="preencoded.png">    </p:cNvPr>
+          <p:cNvPicPr>
+            <a:picLocks noChangeAspect="1"/>
+          </p:cNvPicPr>
+          <p:nvPr/>
+        </p:nvPicPr>
+        <p:blipFill>
+          <a:blip r:embed="rId1"/>
+          <a:stretch>
+            <a:fillRect/>
+          </a:stretch>
+        </p:blipFill>
+        <p:spPr>
+          <a:xfrm>
+            <a:off x="1092708" y="1687068"/>
+            <a:ext cx="329184" cy="329184"/>
+          </a:xfrm>
+          <a:prstGeom prst="rect">
+            <a:avLst/>
+          </a:prstGeom>
+        </p:spPr>
+      </p:pic>
+      <p:sp>
+        <p:nvSpPr>
+          <p:cNvPr id="6" name="Text 3"/>
+          <p:cNvSpPr txBox="1"/>
+          <p:nvPr/>
+        </p:nvSpPr>
+        <p:spPr>
+          <a:xfrm>
+            <a:off x="914400" y="2377440"/>
+            <a:ext cx="2103120" cy="457200"/>
+          </a:xfrm>
+          <a:prstGeom prst="rect">
+            <a:avLst/>
+          </a:prstGeom>
+          <a:noFill/>
+          <a:ln/>
+        </p:spPr>
+        <p:txBody>
+          <a:bodyPr wrap="square" lIns="0" tIns="0" rIns="0" bIns="0" rtlCol="0" anchor="ctr"/>
+          <a:lstStyle/>
+          <a:p>
+            <a:pPr indent="0" marL="0">
+              <a:buNone/>
+            </a:pPr>
+            <a:r>
+              <a:rPr lang="en-US" sz="2200" b="1" dirty="0">
                 <a:solidFill>
                   <a:srgbClr val="FFFFFF"/>
                 </a:solidFill>
@@ -6581,16 +8229,153 @@
                 <a:ea typeface="Calibri" pitchFamily="34" charset="-122"/>
                 <a:cs typeface="Calibri" pitchFamily="34" charset="-120"/>
               </a:rPr>
-              <a:t>Menos acidentes.</a:t>
-            </a:r>
-            <a:endParaRPr lang="en-US" sz="4400" dirty="0"/>
-          </a:p>
-          <a:p>
-            <a:pPr indent="0" marL="0">
-              <a:buNone/>
-            </a:pPr>
-            <a:r>
-              <a:rPr lang="en-US" sz="4400" b="1" dirty="0">
+              <a:t>Menos acidentes</a:t>
+            </a:r>
+            <a:endParaRPr lang="en-US" sz="2200" dirty="0"/>
+          </a:p>
+        </p:txBody>
+      </p:sp>
+      <p:sp>
+        <p:nvSpPr>
+          <p:cNvPr id="7" name="Text 4"/>
+          <p:cNvSpPr txBox="1"/>
+          <p:nvPr/>
+        </p:nvSpPr>
+        <p:spPr>
+          <a:xfrm>
+            <a:off x="914400" y="2880360"/>
+            <a:ext cx="2103120" cy="640080"/>
+          </a:xfrm>
+          <a:prstGeom prst="rect">
+            <a:avLst/>
+          </a:prstGeom>
+          <a:noFill/>
+          <a:ln/>
+        </p:spPr>
+        <p:txBody>
+          <a:bodyPr wrap="square" lIns="0" tIns="0" rIns="0" bIns="0" rtlCol="0" anchor="t"/>
+          <a:lstStyle/>
+          <a:p>
+            <a:pPr indent="0" marL="0">
+              <a:buNone/>
+            </a:pPr>
+            <a:r>
+              <a:rPr lang="en-US" sz="1300" dirty="0">
+                <a:solidFill>
+                  <a:srgbClr val="CBD5E1"/>
+                </a:solidFill>
+                <a:latin typeface="Calibri" pitchFamily="34" charset="0"/>
+                <a:ea typeface="Calibri" pitchFamily="34" charset="-122"/>
+                <a:cs typeface="Calibri" pitchFamily="34" charset="-120"/>
+              </a:rPr>
+              <a:t>Quem está sem EPI é visto na hora.</a:t>
+            </a:r>
+            <a:endParaRPr lang="en-US" sz="1300" dirty="0"/>
+          </a:p>
+        </p:txBody>
+      </p:sp>
+      <p:sp>
+        <p:nvSpPr>
+          <p:cNvPr id="8" name="Shape 5"/>
+          <p:cNvSpPr/>
+          <p:nvPr/>
+        </p:nvSpPr>
+        <p:spPr>
+          <a:xfrm>
+            <a:off x="3383280" y="1234440"/>
+            <a:ext cx="2514600" cy="2377440"/>
+          </a:xfrm>
+          <a:prstGeom prst="roundRect">
+            <a:avLst>
+              <a:gd name="adj" fmla="val 4615"/>
+            </a:avLst>
+          </a:prstGeom>
+          <a:solidFill>
+            <a:srgbClr val="12324A"/>
+          </a:solidFill>
+          <a:ln w="6350">
+            <a:solidFill>
+              <a:srgbClr val="12324A"/>
+            </a:solidFill>
+            <a:prstDash val="solid"/>
+          </a:ln>
+        </p:spPr>
+      </p:sp>
+      <p:sp>
+        <p:nvSpPr>
+          <p:cNvPr id="9" name="Shape 6"/>
+          <p:cNvSpPr/>
+          <p:nvPr/>
+        </p:nvSpPr>
+        <p:spPr>
+          <a:xfrm>
+            <a:off x="3657600" y="1508760"/>
+            <a:ext cx="685800" cy="685800"/>
+          </a:xfrm>
+          <a:prstGeom prst="ellipse">
+            <a:avLst/>
+          </a:prstGeom>
+          <a:solidFill>
+            <a:srgbClr val="0E7490"/>
+          </a:solidFill>
+          <a:ln w="6350">
+            <a:solidFill>
+              <a:srgbClr val="0E7490"/>
+            </a:solidFill>
+            <a:prstDash val="solid"/>
+          </a:ln>
+        </p:spPr>
+      </p:sp>
+      <p:pic>
+        <p:nvPicPr>
+          <p:cNvPr id="10" name="Image 1" descr="preencoded.png">    </p:cNvPr>
+          <p:cNvPicPr>
+            <a:picLocks noChangeAspect="1"/>
+          </p:cNvPicPr>
+          <p:nvPr/>
+        </p:nvPicPr>
+        <p:blipFill>
+          <a:blip r:embed="rId2"/>
+          <a:stretch>
+            <a:fillRect/>
+          </a:stretch>
+        </p:blipFill>
+        <p:spPr>
+          <a:xfrm>
+            <a:off x="3835908" y="1687068"/>
+            <a:ext cx="329184" cy="329184"/>
+          </a:xfrm>
+          <a:prstGeom prst="rect">
+            <a:avLst/>
+          </a:prstGeom>
+        </p:spPr>
+      </p:pic>
+      <p:sp>
+        <p:nvSpPr>
+          <p:cNvPr id="11" name="Text 7"/>
+          <p:cNvSpPr txBox="1"/>
+          <p:nvPr/>
+        </p:nvSpPr>
+        <p:spPr>
+          <a:xfrm>
+            <a:off x="3657600" y="2377440"/>
+            <a:ext cx="2103120" cy="457200"/>
+          </a:xfrm>
+          <a:prstGeom prst="rect">
+            <a:avLst/>
+          </a:prstGeom>
+          <a:noFill/>
+          <a:ln/>
+        </p:spPr>
+        <p:txBody>
+          <a:bodyPr wrap="square" lIns="0" tIns="0" rIns="0" bIns="0" rtlCol="0" anchor="ctr"/>
+          <a:lstStyle/>
+          <a:p>
+            <a:pPr indent="0" marL="0">
+              <a:buNone/>
+            </a:pPr>
+            <a:r>
+              <a:rPr lang="en-US" sz="2200" b="1" dirty="0">
                 <a:solidFill>
                   <a:srgbClr val="FFFFFF"/>
                 </a:solidFill>
@@ -6598,16 +8383,153 @@
                 <a:ea typeface="Calibri" pitchFamily="34" charset="-122"/>
                 <a:cs typeface="Calibri" pitchFamily="34" charset="-120"/>
               </a:rPr>
-              <a:t>Menos ruído.</a:t>
-            </a:r>
-            <a:endParaRPr lang="en-US" sz="4400" dirty="0"/>
-          </a:p>
-          <a:p>
-            <a:pPr indent="0" marL="0">
-              <a:buNone/>
-            </a:pPr>
-            <a:r>
-              <a:rPr lang="en-US" sz="4400" b="1" dirty="0">
+              <a:t>Menos ruído</a:t>
+            </a:r>
+            <a:endParaRPr lang="en-US" sz="2200" dirty="0"/>
+          </a:p>
+        </p:txBody>
+      </p:sp>
+      <p:sp>
+        <p:nvSpPr>
+          <p:cNvPr id="12" name="Text 8"/>
+          <p:cNvSpPr txBox="1"/>
+          <p:nvPr/>
+        </p:nvSpPr>
+        <p:spPr>
+          <a:xfrm>
+            <a:off x="3657600" y="2880360"/>
+            <a:ext cx="2103120" cy="640080"/>
+          </a:xfrm>
+          <a:prstGeom prst="rect">
+            <a:avLst/>
+          </a:prstGeom>
+          <a:noFill/>
+          <a:ln/>
+        </p:spPr>
+        <p:txBody>
+          <a:bodyPr wrap="square" lIns="0" tIns="0" rIns="0" bIns="0" rtlCol="0" anchor="t"/>
+          <a:lstStyle/>
+          <a:p>
+            <a:pPr indent="0" marL="0">
+              <a:buNone/>
+            </a:pPr>
+            <a:r>
+              <a:rPr lang="en-US" sz="1300" dirty="0">
+                <a:solidFill>
+                  <a:srgbClr val="CBD5E1"/>
+                </a:solidFill>
+                <a:latin typeface="Calibri" pitchFamily="34" charset="0"/>
+                <a:ea typeface="Calibri" pitchFamily="34" charset="-122"/>
+                <a:cs typeface="Calibri" pitchFamily="34" charset="-120"/>
+              </a:rPr>
+              <a:t>Alertas confiáveis, agrupados por pessoa.</a:t>
+            </a:r>
+            <a:endParaRPr lang="en-US" sz="1300" dirty="0"/>
+          </a:p>
+        </p:txBody>
+      </p:sp>
+      <p:sp>
+        <p:nvSpPr>
+          <p:cNvPr id="13" name="Shape 9"/>
+          <p:cNvSpPr/>
+          <p:nvPr/>
+        </p:nvSpPr>
+        <p:spPr>
+          <a:xfrm>
+            <a:off x="6126480" y="1234440"/>
+            <a:ext cx="2514600" cy="2377440"/>
+          </a:xfrm>
+          <a:prstGeom prst="roundRect">
+            <a:avLst>
+              <a:gd name="adj" fmla="val 4615"/>
+            </a:avLst>
+          </a:prstGeom>
+          <a:solidFill>
+            <a:srgbClr val="12324A"/>
+          </a:solidFill>
+          <a:ln w="6350">
+            <a:solidFill>
+              <a:srgbClr val="12324A"/>
+            </a:solidFill>
+            <a:prstDash val="solid"/>
+          </a:ln>
+        </p:spPr>
+      </p:sp>
+      <p:sp>
+        <p:nvSpPr>
+          <p:cNvPr id="14" name="Shape 10"/>
+          <p:cNvSpPr/>
+          <p:nvPr/>
+        </p:nvSpPr>
+        <p:spPr>
+          <a:xfrm>
+            <a:off x="6400800" y="1508760"/>
+            <a:ext cx="685800" cy="685800"/>
+          </a:xfrm>
+          <a:prstGeom prst="ellipse">
+            <a:avLst/>
+          </a:prstGeom>
+          <a:solidFill>
+            <a:srgbClr val="0E7490"/>
+          </a:solidFill>
+          <a:ln w="6350">
+            <a:solidFill>
+              <a:srgbClr val="0E7490"/>
+            </a:solidFill>
+            <a:prstDash val="solid"/>
+          </a:ln>
+        </p:spPr>
+      </p:sp>
+      <p:pic>
+        <p:nvPicPr>
+          <p:cNvPr id="15" name="Image 2" descr="preencoded.png">    </p:cNvPr>
+          <p:cNvPicPr>
+            <a:picLocks noChangeAspect="1"/>
+          </p:cNvPicPr>
+          <p:nvPr/>
+        </p:nvPicPr>
+        <p:blipFill>
+          <a:blip r:embed="rId3"/>
+          <a:stretch>
+            <a:fillRect/>
+          </a:stretch>
+        </p:blipFill>
+        <p:spPr>
+          <a:xfrm>
+            <a:off x="6579108" y="1687068"/>
+            <a:ext cx="329184" cy="329184"/>
+          </a:xfrm>
+          <a:prstGeom prst="rect">
+            <a:avLst/>
+          </a:prstGeom>
+        </p:spPr>
+      </p:pic>
+      <p:sp>
+        <p:nvSpPr>
+          <p:cNvPr id="16" name="Text 11"/>
+          <p:cNvSpPr txBox="1"/>
+          <p:nvPr/>
+        </p:nvSpPr>
+        <p:spPr>
+          <a:xfrm>
+            <a:off x="6400800" y="2377440"/>
+            <a:ext cx="2103120" cy="457200"/>
+          </a:xfrm>
+          <a:prstGeom prst="rect">
+            <a:avLst/>
+          </a:prstGeom>
+          <a:noFill/>
+          <a:ln/>
+        </p:spPr>
+        <p:txBody>
+          <a:bodyPr wrap="square" lIns="0" tIns="0" rIns="0" bIns="0" rtlCol="0" anchor="ctr"/>
+          <a:lstStyle/>
+          <a:p>
+            <a:pPr indent="0" marL="0">
+              <a:buNone/>
+            </a:pPr>
+            <a:r>
+              <a:rPr lang="en-US" sz="2200" b="1" dirty="0">
                 <a:solidFill>
                   <a:srgbClr val="FFFFFF"/>
                 </a:solidFill>
@@ -6615,22 +8537,22 @@
                 <a:ea typeface="Calibri" pitchFamily="34" charset="-122"/>
                 <a:cs typeface="Calibri" pitchFamily="34" charset="-120"/>
               </a:rPr>
-              <a:t>Mais controle.</a:t>
-            </a:r>
-            <a:endParaRPr lang="en-US" sz="4400" dirty="0"/>
-          </a:p>
-        </p:txBody>
-      </p:sp>
-      <p:sp>
-        <p:nvSpPr>
-          <p:cNvPr id="3" name="Text 1"/>
-          <p:cNvSpPr txBox="1"/>
-          <p:nvPr/>
-        </p:nvSpPr>
-        <p:spPr>
-          <a:xfrm>
-            <a:off x="640080" y="3246120"/>
-            <a:ext cx="6858000" cy="731520"/>
+              <a:t>Mais controle</a:t>
+            </a:r>
+            <a:endParaRPr lang="en-US" sz="2200" dirty="0"/>
+          </a:p>
+        </p:txBody>
+      </p:sp>
+      <p:sp>
+        <p:nvSpPr>
+          <p:cNvPr id="17" name="Text 12"/>
+          <p:cNvSpPr txBox="1"/>
+          <p:nvPr/>
+        </p:nvSpPr>
+        <p:spPr>
+          <a:xfrm>
+            <a:off x="6400800" y="2880360"/>
+            <a:ext cx="2103120" cy="640080"/>
           </a:xfrm>
           <a:prstGeom prst="rect">
             <a:avLst/>
@@ -6646,7 +8568,7 @@
               <a:buNone/>
             </a:pPr>
             <a:r>
-              <a:rPr lang="en-US" sz="1700" dirty="0">
+              <a:rPr lang="en-US" sz="1300" dirty="0">
                 <a:solidFill>
                   <a:srgbClr val="CBD5E1"/>
                 </a:solidFill>
@@ -6654,22 +8576,22 @@
                 <a:ea typeface="Calibri" pitchFamily="34" charset="-122"/>
                 <a:cs typeface="Calibri" pitchFamily="34" charset="-120"/>
               </a:rPr>
-              <a:t>Quem está sem EPI é visto na hora, os alertas são confiáveis e a portaria é automática.</a:t>
-            </a:r>
-            <a:endParaRPr lang="en-US" sz="1700" dirty="0"/>
-          </a:p>
-        </p:txBody>
-      </p:sp>
-      <p:sp>
-        <p:nvSpPr>
-          <p:cNvPr id="4" name="Text 2"/>
-          <p:cNvSpPr txBox="1"/>
-          <p:nvPr/>
-        </p:nvSpPr>
-        <p:spPr>
-          <a:xfrm>
-            <a:off x="640080" y="4160520"/>
-            <a:ext cx="5486400" cy="457200"/>
+              <a:t>Portaria automática e cada perfil vê o que precisa.</a:t>
+            </a:r>
+            <a:endParaRPr lang="en-US" sz="1300" dirty="0"/>
+          </a:p>
+        </p:txBody>
+      </p:sp>
+      <p:sp>
+        <p:nvSpPr>
+          <p:cNvPr id="18" name="Text 13"/>
+          <p:cNvSpPr txBox="1"/>
+          <p:nvPr/>
+        </p:nvSpPr>
+        <p:spPr>
+          <a:xfrm>
+            <a:off x="640080" y="4023360"/>
+            <a:ext cx="5486400" cy="548640"/>
           </a:xfrm>
           <a:prstGeom prst="rect">
             <a:avLst/>
@@ -6685,7 +8607,7 @@
               <a:buNone/>
             </a:pPr>
             <a:r>
-              <a:rPr lang="en-US" sz="2200" b="1" dirty="0">
+              <a:rPr lang="en-US" sz="2800" b="1" dirty="0">
                 <a:solidFill>
                   <a:srgbClr val="67E8F9"/>
                 </a:solidFill>
@@ -6695,7 +8617,7 @@
               </a:rPr>
               <a:t>Obrigado!</a:t>
             </a:r>
-            <a:endParaRPr lang="en-US" sz="2200" dirty="0"/>
+            <a:endParaRPr lang="en-US" sz="2800" dirty="0"/>
           </a:p>
         </p:txBody>
       </p:sp>
